--- a/PryFinal-PresDataXperiencie.pptx
+++ b/PryFinal-PresDataXperiencie.pptx
@@ -4,17 +4,22 @@
   <p:sldMasterIdLst>
     <p:sldMasterId id="2147483711" r:id="rId1"/>
   </p:sldMasterIdLst>
+  <p:notesMasterIdLst>
+    <p:notesMasterId r:id="rId14"/>
+  </p:notesMasterIdLst>
   <p:sldIdLst>
     <p:sldId id="256" r:id="rId2"/>
     <p:sldId id="257" r:id="rId3"/>
     <p:sldId id="258" r:id="rId4"/>
-    <p:sldId id="262" r:id="rId5"/>
-    <p:sldId id="260" r:id="rId6"/>
-    <p:sldId id="259" r:id="rId7"/>
-    <p:sldId id="267" r:id="rId8"/>
-    <p:sldId id="268" r:id="rId9"/>
-    <p:sldId id="261" r:id="rId10"/>
-    <p:sldId id="266" r:id="rId11"/>
+    <p:sldId id="269" r:id="rId5"/>
+    <p:sldId id="270" r:id="rId6"/>
+    <p:sldId id="262" r:id="rId7"/>
+    <p:sldId id="260" r:id="rId8"/>
+    <p:sldId id="259" r:id="rId9"/>
+    <p:sldId id="267" r:id="rId10"/>
+    <p:sldId id="268" r:id="rId11"/>
+    <p:sldId id="261" r:id="rId12"/>
+    <p:sldId id="266" r:id="rId13"/>
   </p:sldIdLst>
   <p:sldSz cx="12192000" cy="6858000"/>
   <p:notesSz cx="6858000" cy="9144000"/>
@@ -945,6 +950,22 @@
             <a:t>Total_Cup_Points</a:t>
           </a:r>
           <a:r>
+            <a:rPr lang="es-CO" dirty="0"/>
+            <a:t>.</a:t>
+          </a:r>
+        </a:p>
+        <a:p>
+          <a:r>
+            <a:rPr lang="es-CO" b="0" i="0" dirty="0">
+              <a:solidFill>
+                <a:schemeClr val="tx1"/>
+              </a:solidFill>
+              <a:effectLst/>
+              <a:latin typeface="+mn-lt"/>
+            </a:rPr>
+            <a:t>El proyecto integra preparación de datos, análisis estadístico, visualización y un modelo predictivo simple.</a:t>
+          </a:r>
+          <a:r>
             <a:rPr lang="es-ES" dirty="0"/>
             <a:t>  </a:t>
           </a:r>
@@ -1171,12 +1192,12 @@
         <a:fontRef idx="minor"/>
       </dsp:style>
       <dsp:txBody>
-        <a:bodyPr spcFirstLastPara="0" vert="horz" wrap="square" lIns="99060" tIns="99060" rIns="99060" bIns="99060" numCol="1" spcCol="1270" anchor="ctr" anchorCtr="0">
+        <a:bodyPr spcFirstLastPara="0" vert="horz" wrap="square" lIns="76200" tIns="76200" rIns="76200" bIns="76200" numCol="1" spcCol="1270" anchor="ctr" anchorCtr="0">
           <a:noAutofit/>
         </a:bodyPr>
         <a:lstStyle/>
         <a:p>
-          <a:pPr marL="0" lvl="0" indent="0" algn="ctr" defTabSz="1155700">
+          <a:pPr marL="0" lvl="0" indent="0" algn="ctr" defTabSz="889000">
             <a:lnSpc>
               <a:spcPct val="90000"/>
             </a:lnSpc>
@@ -1189,12 +1210,12 @@
             <a:buNone/>
           </a:pPr>
           <a:r>
-            <a:rPr lang="es-CO" sz="2600" b="1" kern="1200" dirty="0"/>
+            <a:rPr lang="es-CO" sz="2000" b="1" kern="1200" dirty="0"/>
             <a:t>Pregunta de análisis:</a:t>
           </a:r>
         </a:p>
         <a:p>
-          <a:pPr marL="0" lvl="0" indent="0" algn="ctr" defTabSz="1155700">
+          <a:pPr marL="0" lvl="0" indent="0" algn="ctr" defTabSz="889000">
             <a:lnSpc>
               <a:spcPct val="90000"/>
             </a:lnSpc>
@@ -1207,10 +1228,10 @@
             <a:buNone/>
           </a:pPr>
           <a:r>
-            <a:rPr lang="es-ES" sz="2600" b="1" kern="1200" dirty="0"/>
+            <a:rPr lang="es-ES" sz="2000" b="1" kern="1200" dirty="0"/>
             <a:t>¿Qué características del café están relacionadas con su calidad y puntaje sensorial?</a:t>
           </a:r>
-          <a:endParaRPr lang="en-US" sz="2600" kern="1200" dirty="0"/>
+          <a:endParaRPr lang="en-US" sz="2000" kern="1200" dirty="0"/>
         </a:p>
       </dsp:txBody>
       <dsp:txXfrm>
@@ -1319,12 +1340,12 @@
         <a:fontRef idx="minor"/>
       </dsp:style>
       <dsp:txBody>
-        <a:bodyPr spcFirstLastPara="0" vert="horz" wrap="square" lIns="99060" tIns="99060" rIns="99060" bIns="99060" numCol="1" spcCol="1270" anchor="ctr" anchorCtr="0">
+        <a:bodyPr spcFirstLastPara="0" vert="horz" wrap="square" lIns="76200" tIns="76200" rIns="76200" bIns="76200" numCol="1" spcCol="1270" anchor="ctr" anchorCtr="0">
           <a:noAutofit/>
         </a:bodyPr>
         <a:lstStyle/>
         <a:p>
-          <a:pPr marL="0" lvl="0" indent="0" algn="ctr" defTabSz="1155700">
+          <a:pPr marL="0" lvl="0" indent="0" algn="ctr" defTabSz="889000">
             <a:lnSpc>
               <a:spcPct val="90000"/>
             </a:lnSpc>
@@ -1337,22 +1358,50 @@
             <a:buNone/>
           </a:pPr>
           <a:r>
-            <a:rPr lang="es-ES" sz="2600" kern="1200" dirty="0"/>
+            <a:rPr lang="es-ES" sz="2000" kern="1200" dirty="0"/>
             <a:t>Para el análisis Se desarrolló un modelo de regresión lineal múltiple</a:t>
           </a:r>
           <a:r>
-            <a:rPr lang="es-CO" sz="2600" kern="1200" dirty="0"/>
+            <a:rPr lang="es-CO" sz="2000" kern="1200" dirty="0"/>
             <a:t> para estimar </a:t>
           </a:r>
           <a:r>
-            <a:rPr lang="es-CO" sz="2600" kern="1200" dirty="0" err="1"/>
+            <a:rPr lang="es-CO" sz="2000" kern="1200" dirty="0" err="1"/>
             <a:t>Total_Cup_Points</a:t>
           </a:r>
           <a:r>
-            <a:rPr lang="es-ES" sz="2600" kern="1200" dirty="0"/>
+            <a:rPr lang="es-CO" sz="2000" kern="1200" dirty="0"/>
+            <a:t>.</a:t>
+          </a:r>
+        </a:p>
+        <a:p>
+          <a:pPr marL="0" lvl="0" indent="0" algn="ctr" defTabSz="889000">
+            <a:lnSpc>
+              <a:spcPct val="90000"/>
+            </a:lnSpc>
+            <a:spcBef>
+              <a:spcPct val="0"/>
+            </a:spcBef>
+            <a:spcAft>
+              <a:spcPct val="35000"/>
+            </a:spcAft>
+            <a:buNone/>
+          </a:pPr>
+          <a:r>
+            <a:rPr lang="es-CO" sz="2000" b="0" i="0" kern="1200" dirty="0">
+              <a:solidFill>
+                <a:schemeClr val="tx1"/>
+              </a:solidFill>
+              <a:effectLst/>
+              <a:latin typeface="+mn-lt"/>
+            </a:rPr>
+            <a:t>El proyecto integra preparación de datos, análisis estadístico, visualización y un modelo predictivo simple.</a:t>
+          </a:r>
+          <a:r>
+            <a:rPr lang="es-ES" sz="2000" kern="1200" dirty="0"/>
             <a:t>  </a:t>
           </a:r>
-          <a:endParaRPr lang="en-US" sz="2600" kern="1200" dirty="0"/>
+          <a:endParaRPr lang="en-US" sz="2000" kern="1200" dirty="0"/>
         </a:p>
       </dsp:txBody>
       <dsp:txXfrm>
@@ -2961,6 +3010,440 @@
 </dgm:styleDef>
 </file>
 
+<file path=ppt/notesMasters/notesMaster1.xml><?xml version="1.0" encoding="utf-8"?>
+<p:notesMaster xmlns:a="http://schemas.openxmlformats.org/drawingml/2006/main" xmlns:r="http://schemas.openxmlformats.org/officeDocument/2006/relationships" xmlns:p="http://schemas.openxmlformats.org/presentationml/2006/main">
+  <p:cSld>
+    <p:bg>
+      <p:bgRef idx="1001">
+        <a:schemeClr val="bg1"/>
+      </p:bgRef>
+    </p:bg>
+    <p:spTree>
+      <p:nvGrpSpPr>
+        <p:cNvPr id="1" name=""/>
+        <p:cNvGrpSpPr/>
+        <p:nvPr/>
+      </p:nvGrpSpPr>
+      <p:grpSpPr>
+        <a:xfrm>
+          <a:off x="0" y="0"/>
+          <a:ext cx="0" cy="0"/>
+          <a:chOff x="0" y="0"/>
+          <a:chExt cx="0" cy="0"/>
+        </a:xfrm>
+      </p:grpSpPr>
+      <p:sp>
+        <p:nvSpPr>
+          <p:cNvPr id="2" name="Marcador de encabezado 1"/>
+          <p:cNvSpPr>
+            <a:spLocks noGrp="1"/>
+          </p:cNvSpPr>
+          <p:nvPr>
+            <p:ph type="hdr" sz="quarter"/>
+          </p:nvPr>
+        </p:nvSpPr>
+        <p:spPr>
+          <a:xfrm>
+            <a:off x="0" y="0"/>
+            <a:ext cx="2971800" cy="458788"/>
+          </a:xfrm>
+          <a:prstGeom prst="rect">
+            <a:avLst/>
+          </a:prstGeom>
+        </p:spPr>
+        <p:txBody>
+          <a:bodyPr vert="horz" lIns="91440" tIns="45720" rIns="91440" bIns="45720" rtlCol="0"/>
+          <a:lstStyle>
+            <a:lvl1pPr algn="l">
+              <a:defRPr sz="1200"/>
+            </a:lvl1pPr>
+          </a:lstStyle>
+          <a:p>
+            <a:endParaRPr lang="es-CO"/>
+          </a:p>
+        </p:txBody>
+      </p:sp>
+      <p:sp>
+        <p:nvSpPr>
+          <p:cNvPr id="3" name="Marcador de fecha 2"/>
+          <p:cNvSpPr>
+            <a:spLocks noGrp="1"/>
+          </p:cNvSpPr>
+          <p:nvPr>
+            <p:ph type="dt" idx="1"/>
+          </p:nvPr>
+        </p:nvSpPr>
+        <p:spPr>
+          <a:xfrm>
+            <a:off x="3884613" y="0"/>
+            <a:ext cx="2971800" cy="458788"/>
+          </a:xfrm>
+          <a:prstGeom prst="rect">
+            <a:avLst/>
+          </a:prstGeom>
+        </p:spPr>
+        <p:txBody>
+          <a:bodyPr vert="horz" lIns="91440" tIns="45720" rIns="91440" bIns="45720" rtlCol="0"/>
+          <a:lstStyle>
+            <a:lvl1pPr algn="r">
+              <a:defRPr sz="1200"/>
+            </a:lvl1pPr>
+          </a:lstStyle>
+          <a:p>
+            <a:fld id="{ACC90DC6-DFD8-49A8-A2A6-C03BD3BF4E74}" type="datetimeFigureOut">
+              <a:rPr lang="es-CO" smtClean="0"/>
+              <a:t>12/09/2026</a:t>
+            </a:fld>
+            <a:endParaRPr lang="es-CO"/>
+          </a:p>
+        </p:txBody>
+      </p:sp>
+      <p:sp>
+        <p:nvSpPr>
+          <p:cNvPr id="4" name="Marcador de imagen de diapositiva 3"/>
+          <p:cNvSpPr>
+            <a:spLocks noGrp="1" noRot="1" noChangeAspect="1"/>
+          </p:cNvSpPr>
+          <p:nvPr>
+            <p:ph type="sldImg" idx="2"/>
+          </p:nvPr>
+        </p:nvSpPr>
+        <p:spPr>
+          <a:xfrm>
+            <a:off x="685800" y="1143000"/>
+            <a:ext cx="5486400" cy="3086100"/>
+          </a:xfrm>
+          <a:prstGeom prst="rect">
+            <a:avLst/>
+          </a:prstGeom>
+          <a:noFill/>
+          <a:ln w="12700">
+            <a:solidFill>
+              <a:prstClr val="black"/>
+            </a:solidFill>
+          </a:ln>
+        </p:spPr>
+        <p:txBody>
+          <a:bodyPr vert="horz" lIns="91440" tIns="45720" rIns="91440" bIns="45720" rtlCol="0" anchor="ctr"/>
+          <a:lstStyle/>
+          <a:p>
+            <a:endParaRPr lang="es-CO"/>
+          </a:p>
+        </p:txBody>
+      </p:sp>
+      <p:sp>
+        <p:nvSpPr>
+          <p:cNvPr id="5" name="Marcador de notas 4"/>
+          <p:cNvSpPr>
+            <a:spLocks noGrp="1"/>
+          </p:cNvSpPr>
+          <p:nvPr>
+            <p:ph type="body" sz="quarter" idx="3"/>
+          </p:nvPr>
+        </p:nvSpPr>
+        <p:spPr>
+          <a:xfrm>
+            <a:off x="685800" y="4400550"/>
+            <a:ext cx="5486400" cy="3600450"/>
+          </a:xfrm>
+          <a:prstGeom prst="rect">
+            <a:avLst/>
+          </a:prstGeom>
+        </p:spPr>
+        <p:txBody>
+          <a:bodyPr vert="horz" lIns="91440" tIns="45720" rIns="91440" bIns="45720" rtlCol="0"/>
+          <a:lstStyle/>
+          <a:p>
+            <a:pPr lvl="0"/>
+            <a:r>
+              <a:rPr lang="es-ES"/>
+              <a:t>Haga clic para modificar los estilos de texto del patrón</a:t>
+            </a:r>
+          </a:p>
+          <a:p>
+            <a:pPr lvl="1"/>
+            <a:r>
+              <a:rPr lang="es-ES"/>
+              <a:t>Segundo nivel</a:t>
+            </a:r>
+          </a:p>
+          <a:p>
+            <a:pPr lvl="2"/>
+            <a:r>
+              <a:rPr lang="es-ES"/>
+              <a:t>Tercer nivel</a:t>
+            </a:r>
+          </a:p>
+          <a:p>
+            <a:pPr lvl="3"/>
+            <a:r>
+              <a:rPr lang="es-ES"/>
+              <a:t>Cuarto nivel</a:t>
+            </a:r>
+          </a:p>
+          <a:p>
+            <a:pPr lvl="4"/>
+            <a:r>
+              <a:rPr lang="es-ES"/>
+              <a:t>Quinto nivel</a:t>
+            </a:r>
+            <a:endParaRPr lang="es-CO"/>
+          </a:p>
+        </p:txBody>
+      </p:sp>
+      <p:sp>
+        <p:nvSpPr>
+          <p:cNvPr id="6" name="Marcador de pie de página 5"/>
+          <p:cNvSpPr>
+            <a:spLocks noGrp="1"/>
+          </p:cNvSpPr>
+          <p:nvPr>
+            <p:ph type="ftr" sz="quarter" idx="4"/>
+          </p:nvPr>
+        </p:nvSpPr>
+        <p:spPr>
+          <a:xfrm>
+            <a:off x="0" y="8685213"/>
+            <a:ext cx="2971800" cy="458787"/>
+          </a:xfrm>
+          <a:prstGeom prst="rect">
+            <a:avLst/>
+          </a:prstGeom>
+        </p:spPr>
+        <p:txBody>
+          <a:bodyPr vert="horz" lIns="91440" tIns="45720" rIns="91440" bIns="45720" rtlCol="0" anchor="b"/>
+          <a:lstStyle>
+            <a:lvl1pPr algn="l">
+              <a:defRPr sz="1200"/>
+            </a:lvl1pPr>
+          </a:lstStyle>
+          <a:p>
+            <a:endParaRPr lang="es-CO"/>
+          </a:p>
+        </p:txBody>
+      </p:sp>
+      <p:sp>
+        <p:nvSpPr>
+          <p:cNvPr id="7" name="Marcador de número de diapositiva 6"/>
+          <p:cNvSpPr>
+            <a:spLocks noGrp="1"/>
+          </p:cNvSpPr>
+          <p:nvPr>
+            <p:ph type="sldNum" sz="quarter" idx="5"/>
+          </p:nvPr>
+        </p:nvSpPr>
+        <p:spPr>
+          <a:xfrm>
+            <a:off x="3884613" y="8685213"/>
+            <a:ext cx="2971800" cy="458787"/>
+          </a:xfrm>
+          <a:prstGeom prst="rect">
+            <a:avLst/>
+          </a:prstGeom>
+        </p:spPr>
+        <p:txBody>
+          <a:bodyPr vert="horz" lIns="91440" tIns="45720" rIns="91440" bIns="45720" rtlCol="0" anchor="b"/>
+          <a:lstStyle>
+            <a:lvl1pPr algn="r">
+              <a:defRPr sz="1200"/>
+            </a:lvl1pPr>
+          </a:lstStyle>
+          <a:p>
+            <a:fld id="{BD16EA11-831D-49FD-A31E-F84111DC0B22}" type="slidenum">
+              <a:rPr lang="es-CO" smtClean="0"/>
+              <a:t>‹Nº›</a:t>
+            </a:fld>
+            <a:endParaRPr lang="es-CO"/>
+          </a:p>
+        </p:txBody>
+      </p:sp>
+    </p:spTree>
+    <p:extLst>
+      <p:ext uri="{BB962C8B-B14F-4D97-AF65-F5344CB8AC3E}">
+        <p14:creationId xmlns:p14="http://schemas.microsoft.com/office/powerpoint/2010/main" val="2836649918"/>
+      </p:ext>
+    </p:extLst>
+  </p:cSld>
+  <p:clrMap bg1="lt1" tx1="dk1" bg2="lt2" tx2="dk2" accent1="accent1" accent2="accent2" accent3="accent3" accent4="accent4" accent5="accent5" accent6="accent6" hlink="hlink" folHlink="folHlink"/>
+  <p:notesStyle>
+    <a:lvl1pPr marL="0" algn="l" defTabSz="914400" rtl="0" eaLnBrk="1" latinLnBrk="0" hangingPunct="1">
+      <a:defRPr sz="1200" kern="1200">
+        <a:solidFill>
+          <a:schemeClr val="tx1"/>
+        </a:solidFill>
+        <a:latin typeface="+mn-lt"/>
+        <a:ea typeface="+mn-ea"/>
+        <a:cs typeface="+mn-cs"/>
+      </a:defRPr>
+    </a:lvl1pPr>
+    <a:lvl2pPr marL="457200" algn="l" defTabSz="914400" rtl="0" eaLnBrk="1" latinLnBrk="0" hangingPunct="1">
+      <a:defRPr sz="1200" kern="1200">
+        <a:solidFill>
+          <a:schemeClr val="tx1"/>
+        </a:solidFill>
+        <a:latin typeface="+mn-lt"/>
+        <a:ea typeface="+mn-ea"/>
+        <a:cs typeface="+mn-cs"/>
+      </a:defRPr>
+    </a:lvl2pPr>
+    <a:lvl3pPr marL="914400" algn="l" defTabSz="914400" rtl="0" eaLnBrk="1" latinLnBrk="0" hangingPunct="1">
+      <a:defRPr sz="1200" kern="1200">
+        <a:solidFill>
+          <a:schemeClr val="tx1"/>
+        </a:solidFill>
+        <a:latin typeface="+mn-lt"/>
+        <a:ea typeface="+mn-ea"/>
+        <a:cs typeface="+mn-cs"/>
+      </a:defRPr>
+    </a:lvl3pPr>
+    <a:lvl4pPr marL="1371600" algn="l" defTabSz="914400" rtl="0" eaLnBrk="1" latinLnBrk="0" hangingPunct="1">
+      <a:defRPr sz="1200" kern="1200">
+        <a:solidFill>
+          <a:schemeClr val="tx1"/>
+        </a:solidFill>
+        <a:latin typeface="+mn-lt"/>
+        <a:ea typeface="+mn-ea"/>
+        <a:cs typeface="+mn-cs"/>
+      </a:defRPr>
+    </a:lvl4pPr>
+    <a:lvl5pPr marL="1828800" algn="l" defTabSz="914400" rtl="0" eaLnBrk="1" latinLnBrk="0" hangingPunct="1">
+      <a:defRPr sz="1200" kern="1200">
+        <a:solidFill>
+          <a:schemeClr val="tx1"/>
+        </a:solidFill>
+        <a:latin typeface="+mn-lt"/>
+        <a:ea typeface="+mn-ea"/>
+        <a:cs typeface="+mn-cs"/>
+      </a:defRPr>
+    </a:lvl5pPr>
+    <a:lvl6pPr marL="2286000" algn="l" defTabSz="914400" rtl="0" eaLnBrk="1" latinLnBrk="0" hangingPunct="1">
+      <a:defRPr sz="1200" kern="1200">
+        <a:solidFill>
+          <a:schemeClr val="tx1"/>
+        </a:solidFill>
+        <a:latin typeface="+mn-lt"/>
+        <a:ea typeface="+mn-ea"/>
+        <a:cs typeface="+mn-cs"/>
+      </a:defRPr>
+    </a:lvl6pPr>
+    <a:lvl7pPr marL="2743200" algn="l" defTabSz="914400" rtl="0" eaLnBrk="1" latinLnBrk="0" hangingPunct="1">
+      <a:defRPr sz="1200" kern="1200">
+        <a:solidFill>
+          <a:schemeClr val="tx1"/>
+        </a:solidFill>
+        <a:latin typeface="+mn-lt"/>
+        <a:ea typeface="+mn-ea"/>
+        <a:cs typeface="+mn-cs"/>
+      </a:defRPr>
+    </a:lvl7pPr>
+    <a:lvl8pPr marL="3200400" algn="l" defTabSz="914400" rtl="0" eaLnBrk="1" latinLnBrk="0" hangingPunct="1">
+      <a:defRPr sz="1200" kern="1200">
+        <a:solidFill>
+          <a:schemeClr val="tx1"/>
+        </a:solidFill>
+        <a:latin typeface="+mn-lt"/>
+        <a:ea typeface="+mn-ea"/>
+        <a:cs typeface="+mn-cs"/>
+      </a:defRPr>
+    </a:lvl8pPr>
+    <a:lvl9pPr marL="3657600" algn="l" defTabSz="914400" rtl="0" eaLnBrk="1" latinLnBrk="0" hangingPunct="1">
+      <a:defRPr sz="1200" kern="1200">
+        <a:solidFill>
+          <a:schemeClr val="tx1"/>
+        </a:solidFill>
+        <a:latin typeface="+mn-lt"/>
+        <a:ea typeface="+mn-ea"/>
+        <a:cs typeface="+mn-cs"/>
+      </a:defRPr>
+    </a:lvl9pPr>
+  </p:notesStyle>
+</p:notesMaster>
+</file>
+
+<file path=ppt/notesSlides/notesSlide1.xml><?xml version="1.0" encoding="utf-8"?>
+<p:notes xmlns:a="http://schemas.openxmlformats.org/drawingml/2006/main" xmlns:r="http://schemas.openxmlformats.org/officeDocument/2006/relationships" xmlns:p="http://schemas.openxmlformats.org/presentationml/2006/main">
+  <p:cSld>
+    <p:spTree>
+      <p:nvGrpSpPr>
+        <p:cNvPr id="1" name=""/>
+        <p:cNvGrpSpPr/>
+        <p:nvPr/>
+      </p:nvGrpSpPr>
+      <p:grpSpPr>
+        <a:xfrm>
+          <a:off x="0" y="0"/>
+          <a:ext cx="0" cy="0"/>
+          <a:chOff x="0" y="0"/>
+          <a:chExt cx="0" cy="0"/>
+        </a:xfrm>
+      </p:grpSpPr>
+      <p:sp>
+        <p:nvSpPr>
+          <p:cNvPr id="2" name="Marcador de imagen de diapositiva 1"/>
+          <p:cNvSpPr>
+            <a:spLocks noGrp="1" noRot="1" noChangeAspect="1"/>
+          </p:cNvSpPr>
+          <p:nvPr>
+            <p:ph type="sldImg"/>
+          </p:nvPr>
+        </p:nvSpPr>
+        <p:spPr/>
+      </p:sp>
+      <p:sp>
+        <p:nvSpPr>
+          <p:cNvPr id="3" name="Marcador de notas 2"/>
+          <p:cNvSpPr>
+            <a:spLocks noGrp="1"/>
+          </p:cNvSpPr>
+          <p:nvPr>
+            <p:ph type="body" idx="1"/>
+          </p:nvPr>
+        </p:nvSpPr>
+        <p:spPr/>
+        <p:txBody>
+          <a:bodyPr/>
+          <a:lstStyle/>
+          <a:p>
+            <a:endParaRPr lang="es-CO" dirty="0"/>
+          </a:p>
+        </p:txBody>
+      </p:sp>
+      <p:sp>
+        <p:nvSpPr>
+          <p:cNvPr id="4" name="Marcador de número de diapositiva 3"/>
+          <p:cNvSpPr>
+            <a:spLocks noGrp="1"/>
+          </p:cNvSpPr>
+          <p:nvPr>
+            <p:ph type="sldNum" sz="quarter" idx="5"/>
+          </p:nvPr>
+        </p:nvSpPr>
+        <p:spPr/>
+        <p:txBody>
+          <a:bodyPr/>
+          <a:lstStyle/>
+          <a:p>
+            <a:fld id="{BD16EA11-831D-49FD-A31E-F84111DC0B22}" type="slidenum">
+              <a:rPr lang="es-CO" smtClean="0"/>
+              <a:t>5</a:t>
+            </a:fld>
+            <a:endParaRPr lang="es-CO"/>
+          </a:p>
+        </p:txBody>
+      </p:sp>
+    </p:spTree>
+    <p:extLst>
+      <p:ext uri="{BB962C8B-B14F-4D97-AF65-F5344CB8AC3E}">
+        <p14:creationId xmlns:p14="http://schemas.microsoft.com/office/powerpoint/2010/main" val="137163087"/>
+      </p:ext>
+    </p:extLst>
+  </p:cSld>
+  <p:clrMapOvr>
+    <a:masterClrMapping/>
+  </p:clrMapOvr>
+</p:notes>
+</file>
+
 <file path=ppt/slideLayouts/slideLayout1.xml><?xml version="1.0" encoding="utf-8"?>
 <p:sldLayout xmlns:a="http://schemas.openxmlformats.org/drawingml/2006/main" xmlns:r="http://schemas.openxmlformats.org/officeDocument/2006/relationships" xmlns:p="http://schemas.openxmlformats.org/presentationml/2006/main" showMasterSp="0" type="title" preserve="1">
   <p:cSld name="Diapositiva de título">
@@ -8858,7 +9341,7 @@
             <a:pPr algn="r"/>
             <a:r>
               <a:rPr lang="es-ES" sz="2000" dirty="0"/>
-              <a:t>NESTOR FELIPE BUITRAGO</a:t>
+              <a:t>NESTOR FELIPE BUITRAGO LOPEZ</a:t>
             </a:r>
           </a:p>
           <a:p>
@@ -8907,3071 +9390,6 @@
 </file>
 
 <file path=ppt/slides/slide10.xml><?xml version="1.0" encoding="utf-8"?>
-<p:sld xmlns:a="http://schemas.openxmlformats.org/drawingml/2006/main" xmlns:r="http://schemas.openxmlformats.org/officeDocument/2006/relationships" xmlns:p="http://schemas.openxmlformats.org/presentationml/2006/main">
-  <p:cSld>
-    <p:spTree>
-      <p:nvGrpSpPr>
-        <p:cNvPr id="1" name="">
-          <a:extLst>
-            <a:ext uri="{FF2B5EF4-FFF2-40B4-BE49-F238E27FC236}">
-              <a16:creationId xmlns:a16="http://schemas.microsoft.com/office/drawing/2014/main" id="{E0A69F28-A69C-66B9-AA46-5304C775B0A3}"/>
-            </a:ext>
-          </a:extLst>
-        </p:cNvPr>
-        <p:cNvGrpSpPr/>
-        <p:nvPr/>
-      </p:nvGrpSpPr>
-      <p:grpSpPr>
-        <a:xfrm>
-          <a:off x="0" y="0"/>
-          <a:ext cx="0" cy="0"/>
-          <a:chOff x="0" y="0"/>
-          <a:chExt cx="0" cy="0"/>
-        </a:xfrm>
-      </p:grpSpPr>
-      <p:sp>
-        <p:nvSpPr>
-          <p:cNvPr id="4" name="CuadroTexto 3">
-            <a:extLst>
-              <a:ext uri="{FF2B5EF4-FFF2-40B4-BE49-F238E27FC236}">
-                <a16:creationId xmlns:a16="http://schemas.microsoft.com/office/drawing/2014/main" id="{0A8AE81C-E1A8-E00B-F0D8-A3532CC5C1A2}"/>
-              </a:ext>
-            </a:extLst>
-          </p:cNvPr>
-          <p:cNvSpPr txBox="1"/>
-          <p:nvPr/>
-        </p:nvSpPr>
-        <p:spPr>
-          <a:xfrm>
-            <a:off x="3416969" y="2331133"/>
-            <a:ext cx="3320715" cy="1938992"/>
-          </a:xfrm>
-          <a:prstGeom prst="rect">
-            <a:avLst/>
-          </a:prstGeom>
-          <a:noFill/>
-        </p:spPr>
-        <p:txBody>
-          <a:bodyPr wrap="square" rtlCol="0">
-            <a:spAutoFit/>
-          </a:bodyPr>
-          <a:lstStyle/>
-          <a:p>
-            <a:pPr algn="ctr"/>
-            <a:r>
-              <a:rPr lang="es-ES" sz="6000" b="1" dirty="0">
-                <a:solidFill>
-                  <a:schemeClr val="accent1">
-                    <a:lumMod val="50000"/>
-                  </a:schemeClr>
-                </a:solidFill>
-              </a:rPr>
-              <a:t>Muchas Gracias</a:t>
-            </a:r>
-          </a:p>
-        </p:txBody>
-      </p:sp>
-    </p:spTree>
-    <p:extLst>
-      <p:ext uri="{BB962C8B-B14F-4D97-AF65-F5344CB8AC3E}">
-        <p14:creationId xmlns:p14="http://schemas.microsoft.com/office/powerpoint/2010/main" val="2438160481"/>
-      </p:ext>
-    </p:extLst>
-  </p:cSld>
-  <p:clrMapOvr>
-    <a:masterClrMapping/>
-  </p:clrMapOvr>
-</p:sld>
-</file>
-
-<file path=ppt/slides/slide2.xml><?xml version="1.0" encoding="utf-8"?>
-<p:sld xmlns:a="http://schemas.openxmlformats.org/drawingml/2006/main" xmlns:r="http://schemas.openxmlformats.org/officeDocument/2006/relationships" xmlns:p="http://schemas.openxmlformats.org/presentationml/2006/main">
-  <p:cSld>
-    <p:spTree>
-      <p:nvGrpSpPr>
-        <p:cNvPr id="1" name="">
-          <a:extLst>
-            <a:ext uri="{FF2B5EF4-FFF2-40B4-BE49-F238E27FC236}">
-              <a16:creationId xmlns:a16="http://schemas.microsoft.com/office/drawing/2014/main" id="{28490D83-D0F5-806F-30B9-211BCE8C9CF1}"/>
-            </a:ext>
-          </a:extLst>
-        </p:cNvPr>
-        <p:cNvGrpSpPr/>
-        <p:nvPr/>
-      </p:nvGrpSpPr>
-      <p:grpSpPr>
-        <a:xfrm>
-          <a:off x="0" y="0"/>
-          <a:ext cx="0" cy="0"/>
-          <a:chOff x="0" y="0"/>
-          <a:chExt cx="0" cy="0"/>
-        </a:xfrm>
-      </p:grpSpPr>
-      <p:sp>
-        <p:nvSpPr>
-          <p:cNvPr id="4" name="CuadroTexto 3">
-            <a:extLst>
-              <a:ext uri="{FF2B5EF4-FFF2-40B4-BE49-F238E27FC236}">
-                <a16:creationId xmlns:a16="http://schemas.microsoft.com/office/drawing/2014/main" id="{F7ECAA00-8B35-BD42-19CB-1BF2C307254D}"/>
-              </a:ext>
-            </a:extLst>
-          </p:cNvPr>
-          <p:cNvSpPr txBox="1"/>
-          <p:nvPr/>
-        </p:nvSpPr>
-        <p:spPr>
-          <a:xfrm>
-            <a:off x="914401" y="524869"/>
-            <a:ext cx="8357936" cy="707886"/>
-          </a:xfrm>
-          <a:prstGeom prst="rect">
-            <a:avLst/>
-          </a:prstGeom>
-          <a:noFill/>
-        </p:spPr>
-        <p:txBody>
-          <a:bodyPr wrap="square" rtlCol="0">
-            <a:spAutoFit/>
-          </a:bodyPr>
-          <a:lstStyle/>
-          <a:p>
-            <a:pPr algn="ctr"/>
-            <a:r>
-              <a:rPr lang="es-ES" sz="4000" b="1" dirty="0">
-                <a:solidFill>
-                  <a:schemeClr val="accent1">
-                    <a:lumMod val="50000"/>
-                  </a:schemeClr>
-                </a:solidFill>
-              </a:rPr>
-              <a:t>Descripción del Proyecto</a:t>
-            </a:r>
-          </a:p>
-        </p:txBody>
-      </p:sp>
-      <p:sp>
-        <p:nvSpPr>
-          <p:cNvPr id="2" name="CuadroTexto 1">
-            <a:extLst>
-              <a:ext uri="{FF2B5EF4-FFF2-40B4-BE49-F238E27FC236}">
-                <a16:creationId xmlns:a16="http://schemas.microsoft.com/office/drawing/2014/main" id="{08FF49B1-68AB-75EC-BB22-7FDA30C12181}"/>
-              </a:ext>
-            </a:extLst>
-          </p:cNvPr>
-          <p:cNvSpPr txBox="1"/>
-          <p:nvPr/>
-        </p:nvSpPr>
-        <p:spPr>
-          <a:xfrm>
-            <a:off x="1155032" y="1652337"/>
-            <a:ext cx="8357936" cy="2400657"/>
-          </a:xfrm>
-          <a:prstGeom prst="rect">
-            <a:avLst/>
-          </a:prstGeom>
-          <a:noFill/>
-        </p:spPr>
-        <p:txBody>
-          <a:bodyPr wrap="square" rtlCol="0">
-            <a:spAutoFit/>
-          </a:bodyPr>
-          <a:lstStyle/>
-          <a:p>
-            <a:endParaRPr lang="es-ES" dirty="0"/>
-          </a:p>
-          <a:p>
-            <a:r>
-              <a:rPr lang="es-ES" sz="2400" dirty="0"/>
-              <a:t>Este proyecto fue desarrollado como parte del curso de Ciencia de Datos y tiene como objetivo analizar qué características del café están relacionadas con su </a:t>
-            </a:r>
-            <a:r>
-              <a:rPr lang="es-ES" sz="2400" b="1" dirty="0">
-                <a:solidFill>
-                  <a:srgbClr val="0070C0"/>
-                </a:solidFill>
-              </a:rPr>
-              <a:t>calidad y puntaje sensorial</a:t>
-            </a:r>
-            <a:r>
-              <a:rPr lang="es-ES" sz="2400" dirty="0"/>
-              <a:t>.  </a:t>
-            </a:r>
-          </a:p>
-          <a:p>
-            <a:endParaRPr lang="es-ES" dirty="0"/>
-          </a:p>
-          <a:p>
-            <a:endParaRPr lang="es-CO" dirty="0"/>
-          </a:p>
-        </p:txBody>
-      </p:sp>
-    </p:spTree>
-    <p:extLst>
-      <p:ext uri="{BB962C8B-B14F-4D97-AF65-F5344CB8AC3E}">
-        <p14:creationId xmlns:p14="http://schemas.microsoft.com/office/powerpoint/2010/main" val="362647730"/>
-      </p:ext>
-    </p:extLst>
-  </p:cSld>
-  <p:clrMapOvr>
-    <a:masterClrMapping/>
-  </p:clrMapOvr>
-</p:sld>
-</file>
-
-<file path=ppt/slides/slide3.xml><?xml version="1.0" encoding="utf-8"?>
-<p:sld xmlns:a="http://schemas.openxmlformats.org/drawingml/2006/main" xmlns:r="http://schemas.openxmlformats.org/officeDocument/2006/relationships" xmlns:p="http://schemas.openxmlformats.org/presentationml/2006/main">
-  <p:cSld>
-    <p:bg>
-      <p:bgPr>
-        <a:solidFill>
-          <a:schemeClr val="bg1"/>
-        </a:solidFill>
-        <a:effectLst/>
-      </p:bgPr>
-    </p:bg>
-    <p:spTree>
-      <p:nvGrpSpPr>
-        <p:cNvPr id="1" name="">
-          <a:extLst>
-            <a:ext uri="{FF2B5EF4-FFF2-40B4-BE49-F238E27FC236}">
-              <a16:creationId xmlns:a16="http://schemas.microsoft.com/office/drawing/2014/main" id="{4340F5AF-5ED2-EA30-9952-46847BEBA143}"/>
-            </a:ext>
-          </a:extLst>
-        </p:cNvPr>
-        <p:cNvGrpSpPr/>
-        <p:nvPr/>
-      </p:nvGrpSpPr>
-      <p:grpSpPr>
-        <a:xfrm>
-          <a:off x="0" y="0"/>
-          <a:ext cx="0" cy="0"/>
-          <a:chOff x="0" y="0"/>
-          <a:chExt cx="0" cy="0"/>
-        </a:xfrm>
-      </p:grpSpPr>
-      <p:grpSp>
-        <p:nvGrpSpPr>
-          <p:cNvPr id="10" name="Group 9">
-            <a:extLst>
-              <a:ext uri="{FF2B5EF4-FFF2-40B4-BE49-F238E27FC236}">
-                <a16:creationId xmlns:a16="http://schemas.microsoft.com/office/drawing/2014/main" id="{947CDE17-06F4-4FCE-8BFE-AD89EACB7094}"/>
-              </a:ext>
-              <a:ext uri="{C183D7F6-B498-43B3-948B-1728B52AA6E4}">
-                <adec:decorative xmlns:adec="http://schemas.microsoft.com/office/drawing/2017/decorative" val="1"/>
-              </a:ext>
-            </a:extLst>
-          </p:cNvPr>
-          <p:cNvGrpSpPr>
-            <a:grpSpLocks noGrp="1" noUngrp="1" noRot="1" noChangeAspect="1" noMove="1" noResize="1"/>
-          </p:cNvGrpSpPr>
-          <p:nvPr>
-            <p:extLst>
-              <p:ext uri="{386F3935-93C4-4BCD-93E2-E3B085C9AB24}">
-                <p16:designElem xmlns:p16="http://schemas.microsoft.com/office/powerpoint/2015/main" val="1"/>
-              </p:ext>
-            </p:extLst>
-          </p:nvPr>
-        </p:nvGrpSpPr>
-        <p:grpSpPr>
-          <a:xfrm>
-            <a:off x="0" y="-8467"/>
-            <a:ext cx="12192000" cy="6866467"/>
-            <a:chOff x="0" y="-8467"/>
-            <a:chExt cx="12192000" cy="6866467"/>
-          </a:xfrm>
-        </p:grpSpPr>
-        <p:cxnSp>
-          <p:nvCxnSpPr>
-            <p:cNvPr id="11" name="Straight Connector 10">
-              <a:extLst>
-                <a:ext uri="{FF2B5EF4-FFF2-40B4-BE49-F238E27FC236}">
-                  <a16:creationId xmlns:a16="http://schemas.microsoft.com/office/drawing/2014/main" id="{4A64534B-C7D9-476B-876D-0A9259D5027E}"/>
-                </a:ext>
-                <a:ext uri="{C183D7F6-B498-43B3-948B-1728B52AA6E4}">
-                  <adec:decorative xmlns:adec="http://schemas.microsoft.com/office/drawing/2017/decorative" val="1"/>
-                </a:ext>
-              </a:extLst>
-            </p:cNvPr>
-            <p:cNvCxnSpPr/>
-            <p:nvPr>
-              <p:extLst>
-                <p:ext uri="{386F3935-93C4-4BCD-93E2-E3B085C9AB24}">
-                  <p16:designElem xmlns:p16="http://schemas.microsoft.com/office/powerpoint/2015/main" val="1"/>
-                </p:ext>
-              </p:extLst>
-            </p:nvPr>
-          </p:nvCxnSpPr>
-          <p:spPr>
-            <a:xfrm>
-              <a:off x="9371012" y="0"/>
-              <a:ext cx="1219200" cy="6858000"/>
-            </a:xfrm>
-            <a:prstGeom prst="line">
-              <a:avLst/>
-            </a:prstGeom>
-            <a:ln w="9525">
-              <a:solidFill>
-                <a:schemeClr val="accent1">
-                  <a:alpha val="70000"/>
-                </a:schemeClr>
-              </a:solidFill>
-            </a:ln>
-          </p:spPr>
-          <p:style>
-            <a:lnRef idx="2">
-              <a:schemeClr val="accent1"/>
-            </a:lnRef>
-            <a:fillRef idx="0">
-              <a:schemeClr val="accent1"/>
-            </a:fillRef>
-            <a:effectRef idx="1">
-              <a:schemeClr val="accent1"/>
-            </a:effectRef>
-            <a:fontRef idx="minor">
-              <a:schemeClr val="tx1"/>
-            </a:fontRef>
-          </p:style>
-        </p:cxnSp>
-        <p:cxnSp>
-          <p:nvCxnSpPr>
-            <p:cNvPr id="12" name="Straight Connector 11">
-              <a:extLst>
-                <a:ext uri="{FF2B5EF4-FFF2-40B4-BE49-F238E27FC236}">
-                  <a16:creationId xmlns:a16="http://schemas.microsoft.com/office/drawing/2014/main" id="{C527E124-CDC8-4D04-848D-E43E18F42545}"/>
-                </a:ext>
-                <a:ext uri="{C183D7F6-B498-43B3-948B-1728B52AA6E4}">
-                  <adec:decorative xmlns:adec="http://schemas.microsoft.com/office/drawing/2017/decorative" val="1"/>
-                </a:ext>
-              </a:extLst>
-            </p:cNvPr>
-            <p:cNvCxnSpPr/>
-            <p:nvPr>
-              <p:extLst>
-                <p:ext uri="{386F3935-93C4-4BCD-93E2-E3B085C9AB24}">
-                  <p16:designElem xmlns:p16="http://schemas.microsoft.com/office/powerpoint/2015/main" val="1"/>
-                </p:ext>
-              </p:extLst>
-            </p:nvPr>
-          </p:nvCxnSpPr>
-          <p:spPr>
-            <a:xfrm flipH="1">
-              <a:off x="7425267" y="3681413"/>
-              <a:ext cx="4763558" cy="3176587"/>
-            </a:xfrm>
-            <a:prstGeom prst="line">
-              <a:avLst/>
-            </a:prstGeom>
-            <a:ln w="9525">
-              <a:solidFill>
-                <a:schemeClr val="accent1">
-                  <a:alpha val="70000"/>
-                </a:schemeClr>
-              </a:solidFill>
-            </a:ln>
-          </p:spPr>
-          <p:style>
-            <a:lnRef idx="2">
-              <a:schemeClr val="accent1"/>
-            </a:lnRef>
-            <a:fillRef idx="0">
-              <a:schemeClr val="accent1"/>
-            </a:fillRef>
-            <a:effectRef idx="1">
-              <a:schemeClr val="accent1"/>
-            </a:effectRef>
-            <a:fontRef idx="minor">
-              <a:schemeClr val="tx1"/>
-            </a:fontRef>
-          </p:style>
-        </p:cxnSp>
-        <p:sp>
-          <p:nvSpPr>
-            <p:cNvPr id="13" name="Rectangle 23">
-              <a:extLst>
-                <a:ext uri="{FF2B5EF4-FFF2-40B4-BE49-F238E27FC236}">
-                  <a16:creationId xmlns:a16="http://schemas.microsoft.com/office/drawing/2014/main" id="{A768FF94-39B1-44FB-9670-D6F5007FB81F}"/>
-                </a:ext>
-                <a:ext uri="{C183D7F6-B498-43B3-948B-1728B52AA6E4}">
-                  <adec:decorative xmlns:adec="http://schemas.microsoft.com/office/drawing/2017/decorative" val="1"/>
-                </a:ext>
-              </a:extLst>
-            </p:cNvPr>
-            <p:cNvSpPr/>
-            <p:nvPr>
-              <p:extLst>
-                <p:ext uri="{386F3935-93C4-4BCD-93E2-E3B085C9AB24}">
-                  <p16:designElem xmlns:p16="http://schemas.microsoft.com/office/powerpoint/2015/main" val="1"/>
-                </p:ext>
-              </p:extLst>
-            </p:nvPr>
-          </p:nvSpPr>
-          <p:spPr>
-            <a:xfrm>
-              <a:off x="9181476" y="-8467"/>
-              <a:ext cx="3007349" cy="6866467"/>
-            </a:xfrm>
-            <a:custGeom>
-              <a:avLst/>
-              <a:gdLst/>
-              <a:ahLst/>
-              <a:cxnLst/>
-              <a:rect l="l" t="t" r="r" b="b"/>
-              <a:pathLst>
-                <a:path w="3007349" h="6866467">
-                  <a:moveTo>
-                    <a:pt x="2045532" y="0"/>
-                  </a:moveTo>
-                  <a:lnTo>
-                    <a:pt x="3007349" y="0"/>
-                  </a:lnTo>
-                  <a:lnTo>
-                    <a:pt x="3007349" y="6866467"/>
-                  </a:lnTo>
-                  <a:lnTo>
-                    <a:pt x="0" y="6866467"/>
-                  </a:lnTo>
-                  <a:lnTo>
-                    <a:pt x="2045532" y="0"/>
-                  </a:lnTo>
-                  <a:close/>
-                </a:path>
-              </a:pathLst>
-            </a:custGeom>
-            <a:solidFill>
-              <a:schemeClr val="accent1">
-                <a:alpha val="36000"/>
-              </a:schemeClr>
-            </a:solidFill>
-            <a:ln>
-              <a:noFill/>
-            </a:ln>
-            <a:effectLst/>
-          </p:spPr>
-          <p:style>
-            <a:lnRef idx="1">
-              <a:schemeClr val="accent1"/>
-            </a:lnRef>
-            <a:fillRef idx="3">
-              <a:schemeClr val="accent1"/>
-            </a:fillRef>
-            <a:effectRef idx="2">
-              <a:schemeClr val="accent1"/>
-            </a:effectRef>
-            <a:fontRef idx="minor">
-              <a:schemeClr val="lt1"/>
-            </a:fontRef>
-          </p:style>
-          <p:txBody>
-            <a:bodyPr/>
-            <a:lstStyle/>
-            <a:p>
-              <a:endParaRPr lang="es-CO"/>
-            </a:p>
-          </p:txBody>
-        </p:sp>
-        <p:sp>
-          <p:nvSpPr>
-            <p:cNvPr id="14" name="Rectangle 25">
-              <a:extLst>
-                <a:ext uri="{FF2B5EF4-FFF2-40B4-BE49-F238E27FC236}">
-                  <a16:creationId xmlns:a16="http://schemas.microsoft.com/office/drawing/2014/main" id="{FCE6337A-0F72-4D0B-81DA-748DC80AB66F}"/>
-                </a:ext>
-                <a:ext uri="{C183D7F6-B498-43B3-948B-1728B52AA6E4}">
-                  <adec:decorative xmlns:adec="http://schemas.microsoft.com/office/drawing/2017/decorative" val="1"/>
-                </a:ext>
-              </a:extLst>
-            </p:cNvPr>
-            <p:cNvSpPr/>
-            <p:nvPr>
-              <p:extLst>
-                <p:ext uri="{386F3935-93C4-4BCD-93E2-E3B085C9AB24}">
-                  <p16:designElem xmlns:p16="http://schemas.microsoft.com/office/powerpoint/2015/main" val="1"/>
-                </p:ext>
-              </p:extLst>
-            </p:nvPr>
-          </p:nvSpPr>
-          <p:spPr>
-            <a:xfrm>
-              <a:off x="9603442" y="-8467"/>
-              <a:ext cx="2588558" cy="6866467"/>
-            </a:xfrm>
-            <a:custGeom>
-              <a:avLst/>
-              <a:gdLst/>
-              <a:ahLst/>
-              <a:cxnLst/>
-              <a:rect l="l" t="t" r="r" b="b"/>
-              <a:pathLst>
-                <a:path w="2573311" h="6866467">
-                  <a:moveTo>
-                    <a:pt x="0" y="0"/>
-                  </a:moveTo>
-                  <a:lnTo>
-                    <a:pt x="2573311" y="0"/>
-                  </a:lnTo>
-                  <a:lnTo>
-                    <a:pt x="2573311" y="6866467"/>
-                  </a:lnTo>
-                  <a:lnTo>
-                    <a:pt x="1202336" y="6866467"/>
-                  </a:lnTo>
-                  <a:lnTo>
-                    <a:pt x="0" y="0"/>
-                  </a:lnTo>
-                  <a:close/>
-                </a:path>
-              </a:pathLst>
-            </a:custGeom>
-            <a:solidFill>
-              <a:schemeClr val="accent1">
-                <a:alpha val="20000"/>
-              </a:schemeClr>
-            </a:solidFill>
-            <a:ln>
-              <a:noFill/>
-            </a:ln>
-            <a:effectLst/>
-          </p:spPr>
-          <p:style>
-            <a:lnRef idx="1">
-              <a:schemeClr val="accent1"/>
-            </a:lnRef>
-            <a:fillRef idx="3">
-              <a:schemeClr val="accent1"/>
-            </a:fillRef>
-            <a:effectRef idx="2">
-              <a:schemeClr val="accent1"/>
-            </a:effectRef>
-            <a:fontRef idx="minor">
-              <a:schemeClr val="lt1"/>
-            </a:fontRef>
-          </p:style>
-          <p:txBody>
-            <a:bodyPr/>
-            <a:lstStyle/>
-            <a:p>
-              <a:endParaRPr lang="es-CO"/>
-            </a:p>
-          </p:txBody>
-        </p:sp>
-        <p:sp>
-          <p:nvSpPr>
-            <p:cNvPr id="15" name="Isosceles Triangle 14">
-              <a:extLst>
-                <a:ext uri="{FF2B5EF4-FFF2-40B4-BE49-F238E27FC236}">
-                  <a16:creationId xmlns:a16="http://schemas.microsoft.com/office/drawing/2014/main" id="{2972CF86-A510-4E29-8CED-C0612D080F1F}"/>
-                </a:ext>
-                <a:ext uri="{C183D7F6-B498-43B3-948B-1728B52AA6E4}">
-                  <adec:decorative xmlns:adec="http://schemas.microsoft.com/office/drawing/2017/decorative" val="1"/>
-                </a:ext>
-              </a:extLst>
-            </p:cNvPr>
-            <p:cNvSpPr/>
-            <p:nvPr>
-              <p:extLst>
-                <p:ext uri="{386F3935-93C4-4BCD-93E2-E3B085C9AB24}">
-                  <p16:designElem xmlns:p16="http://schemas.microsoft.com/office/powerpoint/2015/main" val="1"/>
-                </p:ext>
-              </p:extLst>
-            </p:nvPr>
-          </p:nvSpPr>
-          <p:spPr>
-            <a:xfrm>
-              <a:off x="8932333" y="3048000"/>
-              <a:ext cx="3259667" cy="3810000"/>
-            </a:xfrm>
-            <a:prstGeom prst="triangle">
-              <a:avLst>
-                <a:gd name="adj" fmla="val 100000"/>
-              </a:avLst>
-            </a:prstGeom>
-            <a:solidFill>
-              <a:schemeClr val="accent1">
-                <a:lumMod val="75000"/>
-                <a:alpha val="66000"/>
-              </a:schemeClr>
-            </a:solidFill>
-            <a:ln>
-              <a:noFill/>
-            </a:ln>
-            <a:effectLst/>
-          </p:spPr>
-          <p:style>
-            <a:lnRef idx="1">
-              <a:schemeClr val="accent1"/>
-            </a:lnRef>
-            <a:fillRef idx="3">
-              <a:schemeClr val="accent1"/>
-            </a:fillRef>
-            <a:effectRef idx="2">
-              <a:schemeClr val="accent1"/>
-            </a:effectRef>
-            <a:fontRef idx="minor">
-              <a:schemeClr val="lt1"/>
-            </a:fontRef>
-          </p:style>
-          <p:txBody>
-            <a:bodyPr/>
-            <a:lstStyle/>
-            <a:p>
-              <a:endParaRPr lang="es-CO"/>
-            </a:p>
-          </p:txBody>
-        </p:sp>
-        <p:sp>
-          <p:nvSpPr>
-            <p:cNvPr id="16" name="Rectangle 27">
-              <a:extLst>
-                <a:ext uri="{FF2B5EF4-FFF2-40B4-BE49-F238E27FC236}">
-                  <a16:creationId xmlns:a16="http://schemas.microsoft.com/office/drawing/2014/main" id="{51B0A8D9-B28B-4CE3-8AB6-6633ADD997AD}"/>
-                </a:ext>
-                <a:ext uri="{C183D7F6-B498-43B3-948B-1728B52AA6E4}">
-                  <adec:decorative xmlns:adec="http://schemas.microsoft.com/office/drawing/2017/decorative" val="1"/>
-                </a:ext>
-              </a:extLst>
-            </p:cNvPr>
-            <p:cNvSpPr/>
-            <p:nvPr>
-              <p:extLst>
-                <p:ext uri="{386F3935-93C4-4BCD-93E2-E3B085C9AB24}">
-                  <p16:designElem xmlns:p16="http://schemas.microsoft.com/office/powerpoint/2015/main" val="1"/>
-                </p:ext>
-              </p:extLst>
-            </p:nvPr>
-          </p:nvSpPr>
-          <p:spPr>
-            <a:xfrm>
-              <a:off x="9334500" y="-8467"/>
-              <a:ext cx="2854326" cy="6866467"/>
-            </a:xfrm>
-            <a:custGeom>
-              <a:avLst/>
-              <a:gdLst/>
-              <a:ahLst/>
-              <a:cxnLst/>
-              <a:rect l="l" t="t" r="r" b="b"/>
-              <a:pathLst>
-                <a:path w="2858013" h="6866467">
-                  <a:moveTo>
-                    <a:pt x="0" y="0"/>
-                  </a:moveTo>
-                  <a:lnTo>
-                    <a:pt x="2858013" y="0"/>
-                  </a:lnTo>
-                  <a:lnTo>
-                    <a:pt x="2858013" y="6866467"/>
-                  </a:lnTo>
-                  <a:lnTo>
-                    <a:pt x="2473942" y="6866467"/>
-                  </a:lnTo>
-                  <a:lnTo>
-                    <a:pt x="0" y="0"/>
-                  </a:lnTo>
-                  <a:close/>
-                </a:path>
-              </a:pathLst>
-            </a:custGeom>
-            <a:solidFill>
-              <a:schemeClr val="accent1">
-                <a:lumMod val="75000"/>
-                <a:alpha val="50000"/>
-              </a:schemeClr>
-            </a:solidFill>
-            <a:ln>
-              <a:noFill/>
-            </a:ln>
-            <a:effectLst/>
-          </p:spPr>
-          <p:style>
-            <a:lnRef idx="1">
-              <a:schemeClr val="accent1"/>
-            </a:lnRef>
-            <a:fillRef idx="3">
-              <a:schemeClr val="accent1"/>
-            </a:fillRef>
-            <a:effectRef idx="2">
-              <a:schemeClr val="accent1"/>
-            </a:effectRef>
-            <a:fontRef idx="minor">
-              <a:schemeClr val="lt1"/>
-            </a:fontRef>
-          </p:style>
-          <p:txBody>
-            <a:bodyPr/>
-            <a:lstStyle/>
-            <a:p>
-              <a:endParaRPr lang="es-CO"/>
-            </a:p>
-          </p:txBody>
-        </p:sp>
-        <p:sp>
-          <p:nvSpPr>
-            <p:cNvPr id="17" name="Rectangle 28">
-              <a:extLst>
-                <a:ext uri="{FF2B5EF4-FFF2-40B4-BE49-F238E27FC236}">
-                  <a16:creationId xmlns:a16="http://schemas.microsoft.com/office/drawing/2014/main" id="{525DA9CC-B1B1-4F33-9ED2-89012EA5B495}"/>
-                </a:ext>
-                <a:ext uri="{C183D7F6-B498-43B3-948B-1728B52AA6E4}">
-                  <adec:decorative xmlns:adec="http://schemas.microsoft.com/office/drawing/2017/decorative" val="1"/>
-                </a:ext>
-              </a:extLst>
-            </p:cNvPr>
-            <p:cNvSpPr/>
-            <p:nvPr>
-              <p:extLst>
-                <p:ext uri="{386F3935-93C4-4BCD-93E2-E3B085C9AB24}">
-                  <p16:designElem xmlns:p16="http://schemas.microsoft.com/office/powerpoint/2015/main" val="1"/>
-                </p:ext>
-              </p:extLst>
-            </p:nvPr>
-          </p:nvSpPr>
-          <p:spPr>
-            <a:xfrm>
-              <a:off x="10898730" y="-8467"/>
-              <a:ext cx="1290094" cy="6866467"/>
-            </a:xfrm>
-            <a:custGeom>
-              <a:avLst/>
-              <a:gdLst/>
-              <a:ahLst/>
-              <a:cxnLst/>
-              <a:rect l="l" t="t" r="r" b="b"/>
-              <a:pathLst>
-                <a:path w="1290094" h="6858000">
-                  <a:moveTo>
-                    <a:pt x="1019735" y="0"/>
-                  </a:moveTo>
-                  <a:lnTo>
-                    <a:pt x="1290094" y="0"/>
-                  </a:lnTo>
-                  <a:lnTo>
-                    <a:pt x="1290094" y="6858000"/>
-                  </a:lnTo>
-                  <a:lnTo>
-                    <a:pt x="0" y="6858000"/>
-                  </a:lnTo>
-                  <a:lnTo>
-                    <a:pt x="1019735" y="0"/>
-                  </a:lnTo>
-                  <a:close/>
-                </a:path>
-              </a:pathLst>
-            </a:custGeom>
-            <a:solidFill>
-              <a:schemeClr val="accent2">
-                <a:alpha val="70000"/>
-              </a:schemeClr>
-            </a:solidFill>
-            <a:ln>
-              <a:noFill/>
-            </a:ln>
-            <a:effectLst/>
-          </p:spPr>
-          <p:style>
-            <a:lnRef idx="1">
-              <a:schemeClr val="accent1"/>
-            </a:lnRef>
-            <a:fillRef idx="3">
-              <a:schemeClr val="accent1"/>
-            </a:fillRef>
-            <a:effectRef idx="2">
-              <a:schemeClr val="accent1"/>
-            </a:effectRef>
-            <a:fontRef idx="minor">
-              <a:schemeClr val="lt1"/>
-            </a:fontRef>
-          </p:style>
-          <p:txBody>
-            <a:bodyPr/>
-            <a:lstStyle/>
-            <a:p>
-              <a:endParaRPr lang="es-CO"/>
-            </a:p>
-          </p:txBody>
-        </p:sp>
-        <p:sp>
-          <p:nvSpPr>
-            <p:cNvPr id="18" name="Rectangle 29">
-              <a:extLst>
-                <a:ext uri="{FF2B5EF4-FFF2-40B4-BE49-F238E27FC236}">
-                  <a16:creationId xmlns:a16="http://schemas.microsoft.com/office/drawing/2014/main" id="{6AE546F2-92C0-4C9C-BF28-052A7D0A3B73}"/>
-                </a:ext>
-                <a:ext uri="{C183D7F6-B498-43B3-948B-1728B52AA6E4}">
-                  <adec:decorative xmlns:adec="http://schemas.microsoft.com/office/drawing/2017/decorative" val="1"/>
-                </a:ext>
-              </a:extLst>
-            </p:cNvPr>
-            <p:cNvSpPr/>
-            <p:nvPr>
-              <p:extLst>
-                <p:ext uri="{386F3935-93C4-4BCD-93E2-E3B085C9AB24}">
-                  <p16:designElem xmlns:p16="http://schemas.microsoft.com/office/powerpoint/2015/main" val="1"/>
-                </p:ext>
-              </p:extLst>
-            </p:nvPr>
-          </p:nvSpPr>
-          <p:spPr>
-            <a:xfrm>
-              <a:off x="10938999" y="-8467"/>
-              <a:ext cx="1249825" cy="6866467"/>
-            </a:xfrm>
-            <a:custGeom>
-              <a:avLst/>
-              <a:gdLst/>
-              <a:ahLst/>
-              <a:cxnLst/>
-              <a:rect l="l" t="t" r="r" b="b"/>
-              <a:pathLst>
-                <a:path w="1249825" h="6858000">
-                  <a:moveTo>
-                    <a:pt x="0" y="0"/>
-                  </a:moveTo>
-                  <a:lnTo>
-                    <a:pt x="1249825" y="0"/>
-                  </a:lnTo>
-                  <a:lnTo>
-                    <a:pt x="1249825" y="6858000"/>
-                  </a:lnTo>
-                  <a:lnTo>
-                    <a:pt x="1109382" y="6858000"/>
-                  </a:lnTo>
-                  <a:lnTo>
-                    <a:pt x="0" y="0"/>
-                  </a:lnTo>
-                  <a:close/>
-                </a:path>
-              </a:pathLst>
-            </a:custGeom>
-            <a:solidFill>
-              <a:schemeClr val="accent2">
-                <a:lumMod val="75000"/>
-                <a:alpha val="80000"/>
-              </a:schemeClr>
-            </a:solidFill>
-            <a:ln>
-              <a:noFill/>
-            </a:ln>
-            <a:effectLst/>
-          </p:spPr>
-          <p:style>
-            <a:lnRef idx="1">
-              <a:schemeClr val="accent1"/>
-            </a:lnRef>
-            <a:fillRef idx="3">
-              <a:schemeClr val="accent1"/>
-            </a:fillRef>
-            <a:effectRef idx="2">
-              <a:schemeClr val="accent1"/>
-            </a:effectRef>
-            <a:fontRef idx="minor">
-              <a:schemeClr val="lt1"/>
-            </a:fontRef>
-          </p:style>
-          <p:txBody>
-            <a:bodyPr/>
-            <a:lstStyle/>
-            <a:p>
-              <a:endParaRPr lang="es-CO"/>
-            </a:p>
-          </p:txBody>
-        </p:sp>
-        <p:sp>
-          <p:nvSpPr>
-            <p:cNvPr id="19" name="Isosceles Triangle 18">
-              <a:extLst>
-                <a:ext uri="{FF2B5EF4-FFF2-40B4-BE49-F238E27FC236}">
-                  <a16:creationId xmlns:a16="http://schemas.microsoft.com/office/drawing/2014/main" id="{1111385C-91E7-44E8-AAE5-019E48D76FF1}"/>
-                </a:ext>
-                <a:ext uri="{C183D7F6-B498-43B3-948B-1728B52AA6E4}">
-                  <adec:decorative xmlns:adec="http://schemas.microsoft.com/office/drawing/2017/decorative" val="1"/>
-                </a:ext>
-              </a:extLst>
-            </p:cNvPr>
-            <p:cNvSpPr/>
-            <p:nvPr>
-              <p:extLst>
-                <p:ext uri="{386F3935-93C4-4BCD-93E2-E3B085C9AB24}">
-                  <p16:designElem xmlns:p16="http://schemas.microsoft.com/office/powerpoint/2015/main" val="1"/>
-                </p:ext>
-              </p:extLst>
-            </p:nvPr>
-          </p:nvSpPr>
-          <p:spPr>
-            <a:xfrm>
-              <a:off x="10371666" y="3589867"/>
-              <a:ext cx="1817159" cy="3268133"/>
-            </a:xfrm>
-            <a:prstGeom prst="triangle">
-              <a:avLst>
-                <a:gd name="adj" fmla="val 100000"/>
-              </a:avLst>
-            </a:prstGeom>
-            <a:solidFill>
-              <a:schemeClr val="accent1">
-                <a:lumMod val="75000"/>
-                <a:alpha val="66000"/>
-              </a:schemeClr>
-            </a:solidFill>
-            <a:ln>
-              <a:noFill/>
-            </a:ln>
-            <a:effectLst/>
-          </p:spPr>
-          <p:style>
-            <a:lnRef idx="1">
-              <a:schemeClr val="accent1"/>
-            </a:lnRef>
-            <a:fillRef idx="3">
-              <a:schemeClr val="accent1"/>
-            </a:fillRef>
-            <a:effectRef idx="2">
-              <a:schemeClr val="accent1"/>
-            </a:effectRef>
-            <a:fontRef idx="minor">
-              <a:schemeClr val="lt1"/>
-            </a:fontRef>
-          </p:style>
-          <p:txBody>
-            <a:bodyPr/>
-            <a:lstStyle/>
-            <a:p>
-              <a:endParaRPr lang="es-CO"/>
-            </a:p>
-          </p:txBody>
-        </p:sp>
-        <p:sp>
-          <p:nvSpPr>
-            <p:cNvPr id="20" name="Isosceles Triangle 19">
-              <a:extLst>
-                <a:ext uri="{FF2B5EF4-FFF2-40B4-BE49-F238E27FC236}">
-                  <a16:creationId xmlns:a16="http://schemas.microsoft.com/office/drawing/2014/main" id="{54455A30-C651-4002-BE70-2A0F05BA38B9}"/>
-                </a:ext>
-                <a:ext uri="{C183D7F6-B498-43B3-948B-1728B52AA6E4}">
-                  <adec:decorative xmlns:adec="http://schemas.microsoft.com/office/drawing/2017/decorative" val="1"/>
-                </a:ext>
-              </a:extLst>
-            </p:cNvPr>
-            <p:cNvSpPr/>
-            <p:nvPr>
-              <p:extLst>
-                <p:ext uri="{386F3935-93C4-4BCD-93E2-E3B085C9AB24}">
-                  <p16:designElem xmlns:p16="http://schemas.microsoft.com/office/powerpoint/2015/main" val="1"/>
-                </p:ext>
-              </p:extLst>
-            </p:nvPr>
-          </p:nvSpPr>
-          <p:spPr>
-            <a:xfrm>
-              <a:off x="0" y="4013200"/>
-              <a:ext cx="448733" cy="2844800"/>
-            </a:xfrm>
-            <a:prstGeom prst="triangle">
-              <a:avLst>
-                <a:gd name="adj" fmla="val 0"/>
-              </a:avLst>
-            </a:prstGeom>
-            <a:solidFill>
-              <a:schemeClr val="accent1">
-                <a:alpha val="70000"/>
-              </a:schemeClr>
-            </a:solidFill>
-            <a:ln>
-              <a:noFill/>
-            </a:ln>
-            <a:effectLst/>
-          </p:spPr>
-          <p:style>
-            <a:lnRef idx="1">
-              <a:schemeClr val="accent1"/>
-            </a:lnRef>
-            <a:fillRef idx="3">
-              <a:schemeClr val="accent1"/>
-            </a:fillRef>
-            <a:effectRef idx="2">
-              <a:schemeClr val="accent1"/>
-            </a:effectRef>
-            <a:fontRef idx="minor">
-              <a:schemeClr val="lt1"/>
-            </a:fontRef>
-          </p:style>
-          <p:txBody>
-            <a:bodyPr/>
-            <a:lstStyle/>
-            <a:p>
-              <a:endParaRPr lang="es-CO"/>
-            </a:p>
-          </p:txBody>
-        </p:sp>
-      </p:grpSp>
-      <p:sp useBgFill="1">
-        <p:nvSpPr>
-          <p:cNvPr id="22" name="Rectangle 21">
-            <a:extLst>
-              <a:ext uri="{FF2B5EF4-FFF2-40B4-BE49-F238E27FC236}">
-                <a16:creationId xmlns:a16="http://schemas.microsoft.com/office/drawing/2014/main" id="{45B71F80-1F92-4074-84D9-16A062B215B3}"/>
-              </a:ext>
-              <a:ext uri="{C183D7F6-B498-43B3-948B-1728B52AA6E4}">
-                <adec:decorative xmlns:adec="http://schemas.microsoft.com/office/drawing/2017/decorative" val="1"/>
-              </a:ext>
-            </a:extLst>
-          </p:cNvPr>
-          <p:cNvSpPr>
-            <a:spLocks noGrp="1" noRot="1" noChangeAspect="1" noMove="1" noResize="1" noEditPoints="1" noAdjustHandles="1" noChangeArrowheads="1" noChangeShapeType="1" noTextEdit="1"/>
-          </p:cNvSpPr>
-          <p:nvPr>
-            <p:extLst>
-              <p:ext uri="{386F3935-93C4-4BCD-93E2-E3B085C9AB24}">
-                <p16:designElem xmlns:p16="http://schemas.microsoft.com/office/powerpoint/2015/main" val="1"/>
-              </p:ext>
-            </p:extLst>
-          </p:nvPr>
-        </p:nvSpPr>
-        <p:spPr>
-          <a:xfrm>
-            <a:off x="0" y="0"/>
-            <a:ext cx="12192000" cy="6858000"/>
-          </a:xfrm>
-          <a:prstGeom prst="rect">
-            <a:avLst/>
-          </a:prstGeom>
-          <a:ln>
-            <a:noFill/>
-          </a:ln>
-        </p:spPr>
-        <p:style>
-          <a:lnRef idx="2">
-            <a:schemeClr val="accent1">
-              <a:shade val="50000"/>
-            </a:schemeClr>
-          </a:lnRef>
-          <a:fillRef idx="1">
-            <a:schemeClr val="accent1"/>
-          </a:fillRef>
-          <a:effectRef idx="0">
-            <a:schemeClr val="accent1"/>
-          </a:effectRef>
-          <a:fontRef idx="minor">
-            <a:schemeClr val="lt1"/>
-          </a:fontRef>
-        </p:style>
-        <p:txBody>
-          <a:bodyPr rtlCol="0" anchor="ctr"/>
-          <a:lstStyle/>
-          <a:p>
-            <a:pPr algn="ctr"/>
-            <a:endParaRPr lang="en-US"/>
-          </a:p>
-        </p:txBody>
-      </p:sp>
-      <p:sp>
-        <p:nvSpPr>
-          <p:cNvPr id="4" name="CuadroTexto 3">
-            <a:extLst>
-              <a:ext uri="{FF2B5EF4-FFF2-40B4-BE49-F238E27FC236}">
-                <a16:creationId xmlns:a16="http://schemas.microsoft.com/office/drawing/2014/main" id="{78EF6D15-488C-D47A-111D-A20F2C3CFC6D}"/>
-              </a:ext>
-            </a:extLst>
-          </p:cNvPr>
-          <p:cNvSpPr txBox="1"/>
-          <p:nvPr/>
-        </p:nvSpPr>
-        <p:spPr>
-          <a:xfrm>
-            <a:off x="1286933" y="609600"/>
-            <a:ext cx="10197494" cy="1099457"/>
-          </a:xfrm>
-          <a:prstGeom prst="rect">
-            <a:avLst/>
-          </a:prstGeom>
-        </p:spPr>
-        <p:txBody>
-          <a:bodyPr vert="horz" lIns="91440" tIns="45720" rIns="91440" bIns="45720" rtlCol="0" anchor="t">
-            <a:normAutofit/>
-          </a:bodyPr>
-          <a:lstStyle/>
-          <a:p>
-            <a:pPr>
-              <a:spcBef>
-                <a:spcPct val="0"/>
-              </a:spcBef>
-              <a:spcAft>
-                <a:spcPts val="600"/>
-              </a:spcAft>
-            </a:pPr>
-            <a:r>
-              <a:rPr lang="en-US" sz="3600" b="1">
-                <a:solidFill>
-                  <a:schemeClr val="accent1"/>
-                </a:solidFill>
-                <a:latin typeface="+mj-lt"/>
-                <a:ea typeface="+mj-ea"/>
-                <a:cs typeface="+mj-cs"/>
-              </a:rPr>
-              <a:t>ANALISIS DE DATOS</a:t>
-            </a:r>
-          </a:p>
-        </p:txBody>
-      </p:sp>
-      <p:sp>
-        <p:nvSpPr>
-          <p:cNvPr id="24" name="Isosceles Triangle 23">
-            <a:extLst>
-              <a:ext uri="{FF2B5EF4-FFF2-40B4-BE49-F238E27FC236}">
-                <a16:creationId xmlns:a16="http://schemas.microsoft.com/office/drawing/2014/main" id="{7209C9DA-6E0D-46D9-8275-C52222D8CCAC}"/>
-              </a:ext>
-              <a:ext uri="{C183D7F6-B498-43B3-948B-1728B52AA6E4}">
-                <adec:decorative xmlns:adec="http://schemas.microsoft.com/office/drawing/2017/decorative" val="1"/>
-              </a:ext>
-            </a:extLst>
-          </p:cNvPr>
-          <p:cNvSpPr>
-            <a:spLocks noGrp="1" noRot="1" noChangeAspect="1" noMove="1" noResize="1" noEditPoints="1" noAdjustHandles="1" noChangeArrowheads="1" noChangeShapeType="1" noTextEdit="1"/>
-          </p:cNvSpPr>
-          <p:nvPr>
-            <p:extLst>
-              <p:ext uri="{386F3935-93C4-4BCD-93E2-E3B085C9AB24}">
-                <p16:designElem xmlns:p16="http://schemas.microsoft.com/office/powerpoint/2015/main" val="1"/>
-              </p:ext>
-            </p:extLst>
-          </p:nvPr>
-        </p:nvSpPr>
-        <p:spPr>
-          <a:xfrm rot="10800000">
-            <a:off x="0" y="0"/>
-            <a:ext cx="842596" cy="5666154"/>
-          </a:xfrm>
-          <a:prstGeom prst="triangle">
-            <a:avLst>
-              <a:gd name="adj" fmla="val 100000"/>
-            </a:avLst>
-          </a:prstGeom>
-          <a:solidFill>
-            <a:schemeClr val="accent1">
-              <a:alpha val="85000"/>
-            </a:schemeClr>
-          </a:solidFill>
-          <a:ln>
-            <a:noFill/>
-          </a:ln>
-          <a:effectLst/>
-        </p:spPr>
-        <p:style>
-          <a:lnRef idx="1">
-            <a:schemeClr val="accent1"/>
-          </a:lnRef>
-          <a:fillRef idx="3">
-            <a:schemeClr val="accent1"/>
-          </a:fillRef>
-          <a:effectRef idx="2">
-            <a:schemeClr val="accent1"/>
-          </a:effectRef>
-          <a:fontRef idx="minor">
-            <a:schemeClr val="lt1"/>
-          </a:fontRef>
-        </p:style>
-        <p:txBody>
-          <a:bodyPr/>
-          <a:lstStyle/>
-          <a:p>
-            <a:endParaRPr lang="es-CO"/>
-          </a:p>
-        </p:txBody>
-      </p:sp>
-      <p:sp>
-        <p:nvSpPr>
-          <p:cNvPr id="26" name="Isosceles Triangle 25">
-            <a:extLst>
-              <a:ext uri="{FF2B5EF4-FFF2-40B4-BE49-F238E27FC236}">
-                <a16:creationId xmlns:a16="http://schemas.microsoft.com/office/drawing/2014/main" id="{3EB57A4D-E0D0-46DA-B339-F24CA46FA70B}"/>
-              </a:ext>
-              <a:ext uri="{C183D7F6-B498-43B3-948B-1728B52AA6E4}">
-                <adec:decorative xmlns:adec="http://schemas.microsoft.com/office/drawing/2017/decorative" val="1"/>
-              </a:ext>
-            </a:extLst>
-          </p:cNvPr>
-          <p:cNvSpPr>
-            <a:spLocks noGrp="1" noRot="1" noChangeAspect="1" noMove="1" noResize="1" noEditPoints="1" noAdjustHandles="1" noChangeArrowheads="1" noChangeShapeType="1" noTextEdit="1"/>
-          </p:cNvSpPr>
-          <p:nvPr>
-            <p:extLst>
-              <p:ext uri="{386F3935-93C4-4BCD-93E2-E3B085C9AB24}">
-                <p16:designElem xmlns:p16="http://schemas.microsoft.com/office/powerpoint/2015/main" val="1"/>
-              </p:ext>
-            </p:extLst>
-          </p:nvPr>
-        </p:nvSpPr>
-        <p:spPr>
-          <a:xfrm flipH="1">
-            <a:off x="11743267" y="4013200"/>
-            <a:ext cx="448733" cy="2844800"/>
-          </a:xfrm>
-          <a:prstGeom prst="triangle">
-            <a:avLst>
-              <a:gd name="adj" fmla="val 0"/>
-            </a:avLst>
-          </a:prstGeom>
-          <a:solidFill>
-            <a:schemeClr val="accent1">
-              <a:alpha val="85000"/>
-            </a:schemeClr>
-          </a:solidFill>
-          <a:ln>
-            <a:noFill/>
-          </a:ln>
-          <a:effectLst/>
-        </p:spPr>
-        <p:style>
-          <a:lnRef idx="1">
-            <a:schemeClr val="accent1"/>
-          </a:lnRef>
-          <a:fillRef idx="3">
-            <a:schemeClr val="accent1"/>
-          </a:fillRef>
-          <a:effectRef idx="2">
-            <a:schemeClr val="accent1"/>
-          </a:effectRef>
-          <a:fontRef idx="minor">
-            <a:schemeClr val="lt1"/>
-          </a:fontRef>
-        </p:style>
-        <p:txBody>
-          <a:bodyPr/>
-          <a:lstStyle/>
-          <a:p>
-            <a:endParaRPr lang="es-CO"/>
-          </a:p>
-        </p:txBody>
-      </p:sp>
-      <p:graphicFrame>
-        <p:nvGraphicFramePr>
-          <p:cNvPr id="6" name="CuadroTexto 1">
-            <a:extLst>
-              <a:ext uri="{FF2B5EF4-FFF2-40B4-BE49-F238E27FC236}">
-                <a16:creationId xmlns:a16="http://schemas.microsoft.com/office/drawing/2014/main" id="{E798A376-E006-6CCE-95C3-082B450A1BAA}"/>
-              </a:ext>
-            </a:extLst>
-          </p:cNvPr>
-          <p:cNvGraphicFramePr/>
-          <p:nvPr>
-            <p:extLst>
-              <p:ext uri="{D42A27DB-BD31-4B8C-83A1-F6EECF244321}">
-                <p14:modId xmlns:p14="http://schemas.microsoft.com/office/powerpoint/2010/main" val="461819909"/>
-              </p:ext>
-            </p:extLst>
-          </p:nvPr>
-        </p:nvGraphicFramePr>
-        <p:xfrm>
-          <a:off x="995621" y="1272193"/>
-          <a:ext cx="9618133" cy="4093482"/>
-        </p:xfrm>
-        <a:graphic>
-          <a:graphicData uri="http://schemas.openxmlformats.org/drawingml/2006/diagram">
-            <dgm:relIds xmlns:dgm="http://schemas.openxmlformats.org/drawingml/2006/diagram" xmlns:r="http://schemas.openxmlformats.org/officeDocument/2006/relationships" r:dm="rId2" r:lo="rId3" r:qs="rId4" r:cs="rId5"/>
-          </a:graphicData>
-        </a:graphic>
-      </p:graphicFrame>
-    </p:spTree>
-    <p:extLst>
-      <p:ext uri="{BB962C8B-B14F-4D97-AF65-F5344CB8AC3E}">
-        <p14:creationId xmlns:p14="http://schemas.microsoft.com/office/powerpoint/2010/main" val="3868533323"/>
-      </p:ext>
-    </p:extLst>
-  </p:cSld>
-  <p:clrMapOvr>
-    <a:masterClrMapping/>
-  </p:clrMapOvr>
-</p:sld>
-</file>
-
-<file path=ppt/slides/slide4.xml><?xml version="1.0" encoding="utf-8"?>
-<p:sld xmlns:a="http://schemas.openxmlformats.org/drawingml/2006/main" xmlns:r="http://schemas.openxmlformats.org/officeDocument/2006/relationships" xmlns:p="http://schemas.openxmlformats.org/presentationml/2006/main">
-  <p:cSld>
-    <p:spTree>
-      <p:nvGrpSpPr>
-        <p:cNvPr id="1" name="">
-          <a:extLst>
-            <a:ext uri="{FF2B5EF4-FFF2-40B4-BE49-F238E27FC236}">
-              <a16:creationId xmlns:a16="http://schemas.microsoft.com/office/drawing/2014/main" id="{3AAA7163-00DB-1AAE-1D22-685F7038E0D2}"/>
-            </a:ext>
-          </a:extLst>
-        </p:cNvPr>
-        <p:cNvGrpSpPr/>
-        <p:nvPr/>
-      </p:nvGrpSpPr>
-      <p:grpSpPr>
-        <a:xfrm>
-          <a:off x="0" y="0"/>
-          <a:ext cx="0" cy="0"/>
-          <a:chOff x="0" y="0"/>
-          <a:chExt cx="0" cy="0"/>
-        </a:xfrm>
-      </p:grpSpPr>
-      <p:sp>
-        <p:nvSpPr>
-          <p:cNvPr id="4" name="CuadroTexto 3">
-            <a:extLst>
-              <a:ext uri="{FF2B5EF4-FFF2-40B4-BE49-F238E27FC236}">
-                <a16:creationId xmlns:a16="http://schemas.microsoft.com/office/drawing/2014/main" id="{91863C63-550E-9EDA-2BDE-68D590AFECEA}"/>
-              </a:ext>
-            </a:extLst>
-          </p:cNvPr>
-          <p:cNvSpPr txBox="1"/>
-          <p:nvPr/>
-        </p:nvSpPr>
-        <p:spPr>
-          <a:xfrm>
-            <a:off x="914401" y="524869"/>
-            <a:ext cx="8357936" cy="707886"/>
-          </a:xfrm>
-          <a:prstGeom prst="rect">
-            <a:avLst/>
-          </a:prstGeom>
-          <a:noFill/>
-        </p:spPr>
-        <p:txBody>
-          <a:bodyPr wrap="square" rtlCol="0">
-            <a:spAutoFit/>
-          </a:bodyPr>
-          <a:lstStyle/>
-          <a:p>
-            <a:pPr algn="ctr"/>
-            <a:r>
-              <a:rPr lang="es-ES" sz="4000" b="1" dirty="0">
-                <a:solidFill>
-                  <a:schemeClr val="accent1">
-                    <a:lumMod val="50000"/>
-                  </a:schemeClr>
-                </a:solidFill>
-              </a:rPr>
-              <a:t>MODELO PREDICTIVO</a:t>
-            </a:r>
-          </a:p>
-        </p:txBody>
-      </p:sp>
-      <p:sp>
-        <p:nvSpPr>
-          <p:cNvPr id="2" name="CuadroTexto 1">
-            <a:extLst>
-              <a:ext uri="{FF2B5EF4-FFF2-40B4-BE49-F238E27FC236}">
-                <a16:creationId xmlns:a16="http://schemas.microsoft.com/office/drawing/2014/main" id="{450E4CD4-5BC0-B34B-FE52-E5150A1EDB8D}"/>
-              </a:ext>
-            </a:extLst>
-          </p:cNvPr>
-          <p:cNvSpPr txBox="1"/>
-          <p:nvPr/>
-        </p:nvSpPr>
-        <p:spPr>
-          <a:xfrm>
-            <a:off x="1187117" y="1232755"/>
-            <a:ext cx="8357936" cy="3539430"/>
-          </a:xfrm>
-          <a:prstGeom prst="rect">
-            <a:avLst/>
-          </a:prstGeom>
-          <a:noFill/>
-        </p:spPr>
-        <p:txBody>
-          <a:bodyPr wrap="square" rtlCol="0">
-            <a:spAutoFit/>
-          </a:bodyPr>
-          <a:lstStyle/>
-          <a:p>
-            <a:pPr algn="just"/>
-            <a:endParaRPr lang="es-ES" sz="2400" dirty="0"/>
-          </a:p>
-          <a:p>
-            <a:pPr algn="just"/>
-            <a:r>
-              <a:rPr lang="es-ES" sz="2000" dirty="0">
-                <a:latin typeface="Arial" panose="020B0604020202020204" pitchFamily="34" charset="0"/>
-                <a:cs typeface="Arial" panose="020B0604020202020204" pitchFamily="34" charset="0"/>
-              </a:rPr>
-              <a:t>Se implementan las siguientes métricas de evaluación:</a:t>
-            </a:r>
-          </a:p>
-          <a:p>
-            <a:pPr algn="just"/>
-            <a:endParaRPr lang="es-ES" sz="2000" dirty="0">
-              <a:latin typeface="Arial" panose="020B0604020202020204" pitchFamily="34" charset="0"/>
-              <a:cs typeface="Arial" panose="020B0604020202020204" pitchFamily="34" charset="0"/>
-            </a:endParaRPr>
-          </a:p>
-          <a:p>
-            <a:pPr algn="just"/>
-            <a:r>
-              <a:rPr lang="es-ES" sz="2000" dirty="0">
-                <a:latin typeface="Arial" panose="020B0604020202020204" pitchFamily="34" charset="0"/>
-                <a:cs typeface="Arial" panose="020B0604020202020204" pitchFamily="34" charset="0"/>
-              </a:rPr>
-              <a:t>*MAE, Mide, el promedio de las diferencias absolutas entre los valores predichos y los valores reales.</a:t>
-            </a:r>
-          </a:p>
-          <a:p>
-            <a:pPr algn="just"/>
-            <a:r>
-              <a:rPr lang="es-ES" sz="2000" dirty="0">
-                <a:latin typeface="Arial" panose="020B0604020202020204" pitchFamily="34" charset="0"/>
-                <a:cs typeface="Arial" panose="020B0604020202020204" pitchFamily="34" charset="0"/>
-              </a:rPr>
-              <a:t>*RMSE, el error cuadrático medio, para determinar la calidad de las predicciones. </a:t>
-            </a:r>
-          </a:p>
-          <a:p>
-            <a:pPr algn="just"/>
-            <a:r>
-              <a:rPr lang="es-ES" sz="2000" dirty="0">
-                <a:latin typeface="Arial" panose="020B0604020202020204" pitchFamily="34" charset="0"/>
-                <a:cs typeface="Arial" panose="020B0604020202020204" pitchFamily="34" charset="0"/>
-              </a:rPr>
-              <a:t>*R2, coeficiente de determinación, mide el ajuste del modelo a los datos.</a:t>
-            </a:r>
-          </a:p>
-          <a:p>
-            <a:pPr algn="just"/>
-            <a:endParaRPr lang="es-ES" sz="2000" dirty="0">
-              <a:latin typeface="Arial" panose="020B0604020202020204" pitchFamily="34" charset="0"/>
-              <a:cs typeface="Arial" panose="020B0604020202020204" pitchFamily="34" charset="0"/>
-            </a:endParaRPr>
-          </a:p>
-          <a:p>
-            <a:pPr algn="just"/>
-            <a:endParaRPr lang="es-CO" sz="2000" dirty="0">
-              <a:latin typeface="Arial" panose="020B0604020202020204" pitchFamily="34" charset="0"/>
-              <a:cs typeface="Arial" panose="020B0604020202020204" pitchFamily="34" charset="0"/>
-            </a:endParaRPr>
-          </a:p>
-        </p:txBody>
-      </p:sp>
-    </p:spTree>
-    <p:extLst>
-      <p:ext uri="{BB962C8B-B14F-4D97-AF65-F5344CB8AC3E}">
-        <p14:creationId xmlns:p14="http://schemas.microsoft.com/office/powerpoint/2010/main" val="776705871"/>
-      </p:ext>
-    </p:extLst>
-  </p:cSld>
-  <p:clrMapOvr>
-    <a:masterClrMapping/>
-  </p:clrMapOvr>
-</p:sld>
-</file>
-
-<file path=ppt/slides/slide5.xml><?xml version="1.0" encoding="utf-8"?>
-<p:sld xmlns:a="http://schemas.openxmlformats.org/drawingml/2006/main" xmlns:r="http://schemas.openxmlformats.org/officeDocument/2006/relationships" xmlns:p="http://schemas.openxmlformats.org/presentationml/2006/main">
-  <p:cSld>
-    <p:bg>
-      <p:bgPr>
-        <a:solidFill>
-          <a:schemeClr val="bg1"/>
-        </a:solidFill>
-        <a:effectLst/>
-      </p:bgPr>
-    </p:bg>
-    <p:spTree>
-      <p:nvGrpSpPr>
-        <p:cNvPr id="1" name="">
-          <a:extLst>
-            <a:ext uri="{FF2B5EF4-FFF2-40B4-BE49-F238E27FC236}">
-              <a16:creationId xmlns:a16="http://schemas.microsoft.com/office/drawing/2014/main" id="{4F85356B-AC77-1FDE-B792-DA781F9CC9C1}"/>
-            </a:ext>
-          </a:extLst>
-        </p:cNvPr>
-        <p:cNvGrpSpPr/>
-        <p:nvPr/>
-      </p:nvGrpSpPr>
-      <p:grpSpPr>
-        <a:xfrm>
-          <a:off x="0" y="0"/>
-          <a:ext cx="0" cy="0"/>
-          <a:chOff x="0" y="0"/>
-          <a:chExt cx="0" cy="0"/>
-        </a:xfrm>
-      </p:grpSpPr>
-      <p:grpSp>
-        <p:nvGrpSpPr>
-          <p:cNvPr id="10" name="Group 9">
-            <a:extLst>
-              <a:ext uri="{FF2B5EF4-FFF2-40B4-BE49-F238E27FC236}">
-                <a16:creationId xmlns:a16="http://schemas.microsoft.com/office/drawing/2014/main" id="{947CDE17-06F4-4FCE-8BFE-AD89EACB7094}"/>
-              </a:ext>
-              <a:ext uri="{C183D7F6-B498-43B3-948B-1728B52AA6E4}">
-                <adec:decorative xmlns:adec="http://schemas.microsoft.com/office/drawing/2017/decorative" val="1"/>
-              </a:ext>
-            </a:extLst>
-          </p:cNvPr>
-          <p:cNvGrpSpPr>
-            <a:grpSpLocks noGrp="1" noUngrp="1" noRot="1" noChangeAspect="1" noMove="1" noResize="1"/>
-          </p:cNvGrpSpPr>
-          <p:nvPr>
-            <p:extLst>
-              <p:ext uri="{386F3935-93C4-4BCD-93E2-E3B085C9AB24}">
-                <p16:designElem xmlns:p16="http://schemas.microsoft.com/office/powerpoint/2015/main" val="1"/>
-              </p:ext>
-            </p:extLst>
-          </p:nvPr>
-        </p:nvGrpSpPr>
-        <p:grpSpPr>
-          <a:xfrm>
-            <a:off x="0" y="-8467"/>
-            <a:ext cx="12192000" cy="6866467"/>
-            <a:chOff x="0" y="-8467"/>
-            <a:chExt cx="12192000" cy="6866467"/>
-          </a:xfrm>
-        </p:grpSpPr>
-        <p:cxnSp>
-          <p:nvCxnSpPr>
-            <p:cNvPr id="11" name="Straight Connector 10">
-              <a:extLst>
-                <a:ext uri="{FF2B5EF4-FFF2-40B4-BE49-F238E27FC236}">
-                  <a16:creationId xmlns:a16="http://schemas.microsoft.com/office/drawing/2014/main" id="{4A64534B-C7D9-476B-876D-0A9259D5027E}"/>
-                </a:ext>
-                <a:ext uri="{C183D7F6-B498-43B3-948B-1728B52AA6E4}">
-                  <adec:decorative xmlns:adec="http://schemas.microsoft.com/office/drawing/2017/decorative" val="1"/>
-                </a:ext>
-              </a:extLst>
-            </p:cNvPr>
-            <p:cNvCxnSpPr/>
-            <p:nvPr>
-              <p:extLst>
-                <p:ext uri="{386F3935-93C4-4BCD-93E2-E3B085C9AB24}">
-                  <p16:designElem xmlns:p16="http://schemas.microsoft.com/office/powerpoint/2015/main" val="1"/>
-                </p:ext>
-              </p:extLst>
-            </p:nvPr>
-          </p:nvCxnSpPr>
-          <p:spPr>
-            <a:xfrm>
-              <a:off x="9371012" y="0"/>
-              <a:ext cx="1219200" cy="6858000"/>
-            </a:xfrm>
-            <a:prstGeom prst="line">
-              <a:avLst/>
-            </a:prstGeom>
-            <a:ln w="9525">
-              <a:solidFill>
-                <a:schemeClr val="accent1">
-                  <a:alpha val="70000"/>
-                </a:schemeClr>
-              </a:solidFill>
-            </a:ln>
-          </p:spPr>
-          <p:style>
-            <a:lnRef idx="2">
-              <a:schemeClr val="accent1"/>
-            </a:lnRef>
-            <a:fillRef idx="0">
-              <a:schemeClr val="accent1"/>
-            </a:fillRef>
-            <a:effectRef idx="1">
-              <a:schemeClr val="accent1"/>
-            </a:effectRef>
-            <a:fontRef idx="minor">
-              <a:schemeClr val="tx1"/>
-            </a:fontRef>
-          </p:style>
-        </p:cxnSp>
-        <p:cxnSp>
-          <p:nvCxnSpPr>
-            <p:cNvPr id="12" name="Straight Connector 11">
-              <a:extLst>
-                <a:ext uri="{FF2B5EF4-FFF2-40B4-BE49-F238E27FC236}">
-                  <a16:creationId xmlns:a16="http://schemas.microsoft.com/office/drawing/2014/main" id="{C527E124-CDC8-4D04-848D-E43E18F42545}"/>
-                </a:ext>
-                <a:ext uri="{C183D7F6-B498-43B3-948B-1728B52AA6E4}">
-                  <adec:decorative xmlns:adec="http://schemas.microsoft.com/office/drawing/2017/decorative" val="1"/>
-                </a:ext>
-              </a:extLst>
-            </p:cNvPr>
-            <p:cNvCxnSpPr/>
-            <p:nvPr>
-              <p:extLst>
-                <p:ext uri="{386F3935-93C4-4BCD-93E2-E3B085C9AB24}">
-                  <p16:designElem xmlns:p16="http://schemas.microsoft.com/office/powerpoint/2015/main" val="1"/>
-                </p:ext>
-              </p:extLst>
-            </p:nvPr>
-          </p:nvCxnSpPr>
-          <p:spPr>
-            <a:xfrm flipH="1">
-              <a:off x="7425267" y="3681413"/>
-              <a:ext cx="4763558" cy="3176587"/>
-            </a:xfrm>
-            <a:prstGeom prst="line">
-              <a:avLst/>
-            </a:prstGeom>
-            <a:ln w="9525">
-              <a:solidFill>
-                <a:schemeClr val="accent1">
-                  <a:alpha val="70000"/>
-                </a:schemeClr>
-              </a:solidFill>
-            </a:ln>
-          </p:spPr>
-          <p:style>
-            <a:lnRef idx="2">
-              <a:schemeClr val="accent1"/>
-            </a:lnRef>
-            <a:fillRef idx="0">
-              <a:schemeClr val="accent1"/>
-            </a:fillRef>
-            <a:effectRef idx="1">
-              <a:schemeClr val="accent1"/>
-            </a:effectRef>
-            <a:fontRef idx="minor">
-              <a:schemeClr val="tx1"/>
-            </a:fontRef>
-          </p:style>
-        </p:cxnSp>
-        <p:sp>
-          <p:nvSpPr>
-            <p:cNvPr id="13" name="Rectangle 23">
-              <a:extLst>
-                <a:ext uri="{FF2B5EF4-FFF2-40B4-BE49-F238E27FC236}">
-                  <a16:creationId xmlns:a16="http://schemas.microsoft.com/office/drawing/2014/main" id="{A768FF94-39B1-44FB-9670-D6F5007FB81F}"/>
-                </a:ext>
-                <a:ext uri="{C183D7F6-B498-43B3-948B-1728B52AA6E4}">
-                  <adec:decorative xmlns:adec="http://schemas.microsoft.com/office/drawing/2017/decorative" val="1"/>
-                </a:ext>
-              </a:extLst>
-            </p:cNvPr>
-            <p:cNvSpPr/>
-            <p:nvPr>
-              <p:extLst>
-                <p:ext uri="{386F3935-93C4-4BCD-93E2-E3B085C9AB24}">
-                  <p16:designElem xmlns:p16="http://schemas.microsoft.com/office/powerpoint/2015/main" val="1"/>
-                </p:ext>
-              </p:extLst>
-            </p:nvPr>
-          </p:nvSpPr>
-          <p:spPr>
-            <a:xfrm>
-              <a:off x="9181476" y="-8467"/>
-              <a:ext cx="3007349" cy="6866467"/>
-            </a:xfrm>
-            <a:custGeom>
-              <a:avLst/>
-              <a:gdLst/>
-              <a:ahLst/>
-              <a:cxnLst/>
-              <a:rect l="l" t="t" r="r" b="b"/>
-              <a:pathLst>
-                <a:path w="3007349" h="6866467">
-                  <a:moveTo>
-                    <a:pt x="2045532" y="0"/>
-                  </a:moveTo>
-                  <a:lnTo>
-                    <a:pt x="3007349" y="0"/>
-                  </a:lnTo>
-                  <a:lnTo>
-                    <a:pt x="3007349" y="6866467"/>
-                  </a:lnTo>
-                  <a:lnTo>
-                    <a:pt x="0" y="6866467"/>
-                  </a:lnTo>
-                  <a:lnTo>
-                    <a:pt x="2045532" y="0"/>
-                  </a:lnTo>
-                  <a:close/>
-                </a:path>
-              </a:pathLst>
-            </a:custGeom>
-            <a:solidFill>
-              <a:schemeClr val="accent1">
-                <a:alpha val="36000"/>
-              </a:schemeClr>
-            </a:solidFill>
-            <a:ln>
-              <a:noFill/>
-            </a:ln>
-            <a:effectLst/>
-          </p:spPr>
-          <p:style>
-            <a:lnRef idx="1">
-              <a:schemeClr val="accent1"/>
-            </a:lnRef>
-            <a:fillRef idx="3">
-              <a:schemeClr val="accent1"/>
-            </a:fillRef>
-            <a:effectRef idx="2">
-              <a:schemeClr val="accent1"/>
-            </a:effectRef>
-            <a:fontRef idx="minor">
-              <a:schemeClr val="lt1"/>
-            </a:fontRef>
-          </p:style>
-          <p:txBody>
-            <a:bodyPr/>
-            <a:lstStyle/>
-            <a:p>
-              <a:endParaRPr lang="es-CO"/>
-            </a:p>
-          </p:txBody>
-        </p:sp>
-        <p:sp>
-          <p:nvSpPr>
-            <p:cNvPr id="14" name="Rectangle 25">
-              <a:extLst>
-                <a:ext uri="{FF2B5EF4-FFF2-40B4-BE49-F238E27FC236}">
-                  <a16:creationId xmlns:a16="http://schemas.microsoft.com/office/drawing/2014/main" id="{FCE6337A-0F72-4D0B-81DA-748DC80AB66F}"/>
-                </a:ext>
-                <a:ext uri="{C183D7F6-B498-43B3-948B-1728B52AA6E4}">
-                  <adec:decorative xmlns:adec="http://schemas.microsoft.com/office/drawing/2017/decorative" val="1"/>
-                </a:ext>
-              </a:extLst>
-            </p:cNvPr>
-            <p:cNvSpPr/>
-            <p:nvPr>
-              <p:extLst>
-                <p:ext uri="{386F3935-93C4-4BCD-93E2-E3B085C9AB24}">
-                  <p16:designElem xmlns:p16="http://schemas.microsoft.com/office/powerpoint/2015/main" val="1"/>
-                </p:ext>
-              </p:extLst>
-            </p:nvPr>
-          </p:nvSpPr>
-          <p:spPr>
-            <a:xfrm>
-              <a:off x="9603442" y="-8467"/>
-              <a:ext cx="2588558" cy="6866467"/>
-            </a:xfrm>
-            <a:custGeom>
-              <a:avLst/>
-              <a:gdLst/>
-              <a:ahLst/>
-              <a:cxnLst/>
-              <a:rect l="l" t="t" r="r" b="b"/>
-              <a:pathLst>
-                <a:path w="2573311" h="6866467">
-                  <a:moveTo>
-                    <a:pt x="0" y="0"/>
-                  </a:moveTo>
-                  <a:lnTo>
-                    <a:pt x="2573311" y="0"/>
-                  </a:lnTo>
-                  <a:lnTo>
-                    <a:pt x="2573311" y="6866467"/>
-                  </a:lnTo>
-                  <a:lnTo>
-                    <a:pt x="1202336" y="6866467"/>
-                  </a:lnTo>
-                  <a:lnTo>
-                    <a:pt x="0" y="0"/>
-                  </a:lnTo>
-                  <a:close/>
-                </a:path>
-              </a:pathLst>
-            </a:custGeom>
-            <a:solidFill>
-              <a:schemeClr val="accent1">
-                <a:alpha val="20000"/>
-              </a:schemeClr>
-            </a:solidFill>
-            <a:ln>
-              <a:noFill/>
-            </a:ln>
-            <a:effectLst/>
-          </p:spPr>
-          <p:style>
-            <a:lnRef idx="1">
-              <a:schemeClr val="accent1"/>
-            </a:lnRef>
-            <a:fillRef idx="3">
-              <a:schemeClr val="accent1"/>
-            </a:fillRef>
-            <a:effectRef idx="2">
-              <a:schemeClr val="accent1"/>
-            </a:effectRef>
-            <a:fontRef idx="minor">
-              <a:schemeClr val="lt1"/>
-            </a:fontRef>
-          </p:style>
-          <p:txBody>
-            <a:bodyPr/>
-            <a:lstStyle/>
-            <a:p>
-              <a:endParaRPr lang="es-CO"/>
-            </a:p>
-          </p:txBody>
-        </p:sp>
-        <p:sp>
-          <p:nvSpPr>
-            <p:cNvPr id="15" name="Isosceles Triangle 14">
-              <a:extLst>
-                <a:ext uri="{FF2B5EF4-FFF2-40B4-BE49-F238E27FC236}">
-                  <a16:creationId xmlns:a16="http://schemas.microsoft.com/office/drawing/2014/main" id="{2972CF86-A510-4E29-8CED-C0612D080F1F}"/>
-                </a:ext>
-                <a:ext uri="{C183D7F6-B498-43B3-948B-1728B52AA6E4}">
-                  <adec:decorative xmlns:adec="http://schemas.microsoft.com/office/drawing/2017/decorative" val="1"/>
-                </a:ext>
-              </a:extLst>
-            </p:cNvPr>
-            <p:cNvSpPr/>
-            <p:nvPr>
-              <p:extLst>
-                <p:ext uri="{386F3935-93C4-4BCD-93E2-E3B085C9AB24}">
-                  <p16:designElem xmlns:p16="http://schemas.microsoft.com/office/powerpoint/2015/main" val="1"/>
-                </p:ext>
-              </p:extLst>
-            </p:nvPr>
-          </p:nvSpPr>
-          <p:spPr>
-            <a:xfrm>
-              <a:off x="8932333" y="3048000"/>
-              <a:ext cx="3259667" cy="3810000"/>
-            </a:xfrm>
-            <a:prstGeom prst="triangle">
-              <a:avLst>
-                <a:gd name="adj" fmla="val 100000"/>
-              </a:avLst>
-            </a:prstGeom>
-            <a:solidFill>
-              <a:schemeClr val="accent1">
-                <a:lumMod val="75000"/>
-                <a:alpha val="66000"/>
-              </a:schemeClr>
-            </a:solidFill>
-            <a:ln>
-              <a:noFill/>
-            </a:ln>
-            <a:effectLst/>
-          </p:spPr>
-          <p:style>
-            <a:lnRef idx="1">
-              <a:schemeClr val="accent1"/>
-            </a:lnRef>
-            <a:fillRef idx="3">
-              <a:schemeClr val="accent1"/>
-            </a:fillRef>
-            <a:effectRef idx="2">
-              <a:schemeClr val="accent1"/>
-            </a:effectRef>
-            <a:fontRef idx="minor">
-              <a:schemeClr val="lt1"/>
-            </a:fontRef>
-          </p:style>
-          <p:txBody>
-            <a:bodyPr/>
-            <a:lstStyle/>
-            <a:p>
-              <a:endParaRPr lang="es-CO"/>
-            </a:p>
-          </p:txBody>
-        </p:sp>
-        <p:sp>
-          <p:nvSpPr>
-            <p:cNvPr id="16" name="Rectangle 27">
-              <a:extLst>
-                <a:ext uri="{FF2B5EF4-FFF2-40B4-BE49-F238E27FC236}">
-                  <a16:creationId xmlns:a16="http://schemas.microsoft.com/office/drawing/2014/main" id="{51B0A8D9-B28B-4CE3-8AB6-6633ADD997AD}"/>
-                </a:ext>
-                <a:ext uri="{C183D7F6-B498-43B3-948B-1728B52AA6E4}">
-                  <adec:decorative xmlns:adec="http://schemas.microsoft.com/office/drawing/2017/decorative" val="1"/>
-                </a:ext>
-              </a:extLst>
-            </p:cNvPr>
-            <p:cNvSpPr/>
-            <p:nvPr>
-              <p:extLst>
-                <p:ext uri="{386F3935-93C4-4BCD-93E2-E3B085C9AB24}">
-                  <p16:designElem xmlns:p16="http://schemas.microsoft.com/office/powerpoint/2015/main" val="1"/>
-                </p:ext>
-              </p:extLst>
-            </p:nvPr>
-          </p:nvSpPr>
-          <p:spPr>
-            <a:xfrm>
-              <a:off x="9334500" y="-8467"/>
-              <a:ext cx="2854326" cy="6866467"/>
-            </a:xfrm>
-            <a:custGeom>
-              <a:avLst/>
-              <a:gdLst/>
-              <a:ahLst/>
-              <a:cxnLst/>
-              <a:rect l="l" t="t" r="r" b="b"/>
-              <a:pathLst>
-                <a:path w="2858013" h="6866467">
-                  <a:moveTo>
-                    <a:pt x="0" y="0"/>
-                  </a:moveTo>
-                  <a:lnTo>
-                    <a:pt x="2858013" y="0"/>
-                  </a:lnTo>
-                  <a:lnTo>
-                    <a:pt x="2858013" y="6866467"/>
-                  </a:lnTo>
-                  <a:lnTo>
-                    <a:pt x="2473942" y="6866467"/>
-                  </a:lnTo>
-                  <a:lnTo>
-                    <a:pt x="0" y="0"/>
-                  </a:lnTo>
-                  <a:close/>
-                </a:path>
-              </a:pathLst>
-            </a:custGeom>
-            <a:solidFill>
-              <a:schemeClr val="accent1">
-                <a:lumMod val="75000"/>
-                <a:alpha val="50000"/>
-              </a:schemeClr>
-            </a:solidFill>
-            <a:ln>
-              <a:noFill/>
-            </a:ln>
-            <a:effectLst/>
-          </p:spPr>
-          <p:style>
-            <a:lnRef idx="1">
-              <a:schemeClr val="accent1"/>
-            </a:lnRef>
-            <a:fillRef idx="3">
-              <a:schemeClr val="accent1"/>
-            </a:fillRef>
-            <a:effectRef idx="2">
-              <a:schemeClr val="accent1"/>
-            </a:effectRef>
-            <a:fontRef idx="minor">
-              <a:schemeClr val="lt1"/>
-            </a:fontRef>
-          </p:style>
-          <p:txBody>
-            <a:bodyPr/>
-            <a:lstStyle/>
-            <a:p>
-              <a:endParaRPr lang="es-CO"/>
-            </a:p>
-          </p:txBody>
-        </p:sp>
-        <p:sp>
-          <p:nvSpPr>
-            <p:cNvPr id="17" name="Rectangle 28">
-              <a:extLst>
-                <a:ext uri="{FF2B5EF4-FFF2-40B4-BE49-F238E27FC236}">
-                  <a16:creationId xmlns:a16="http://schemas.microsoft.com/office/drawing/2014/main" id="{525DA9CC-B1B1-4F33-9ED2-89012EA5B495}"/>
-                </a:ext>
-                <a:ext uri="{C183D7F6-B498-43B3-948B-1728B52AA6E4}">
-                  <adec:decorative xmlns:adec="http://schemas.microsoft.com/office/drawing/2017/decorative" val="1"/>
-                </a:ext>
-              </a:extLst>
-            </p:cNvPr>
-            <p:cNvSpPr/>
-            <p:nvPr>
-              <p:extLst>
-                <p:ext uri="{386F3935-93C4-4BCD-93E2-E3B085C9AB24}">
-                  <p16:designElem xmlns:p16="http://schemas.microsoft.com/office/powerpoint/2015/main" val="1"/>
-                </p:ext>
-              </p:extLst>
-            </p:nvPr>
-          </p:nvSpPr>
-          <p:spPr>
-            <a:xfrm>
-              <a:off x="10898730" y="-8467"/>
-              <a:ext cx="1290094" cy="6866467"/>
-            </a:xfrm>
-            <a:custGeom>
-              <a:avLst/>
-              <a:gdLst/>
-              <a:ahLst/>
-              <a:cxnLst/>
-              <a:rect l="l" t="t" r="r" b="b"/>
-              <a:pathLst>
-                <a:path w="1290094" h="6858000">
-                  <a:moveTo>
-                    <a:pt x="1019735" y="0"/>
-                  </a:moveTo>
-                  <a:lnTo>
-                    <a:pt x="1290094" y="0"/>
-                  </a:lnTo>
-                  <a:lnTo>
-                    <a:pt x="1290094" y="6858000"/>
-                  </a:lnTo>
-                  <a:lnTo>
-                    <a:pt x="0" y="6858000"/>
-                  </a:lnTo>
-                  <a:lnTo>
-                    <a:pt x="1019735" y="0"/>
-                  </a:lnTo>
-                  <a:close/>
-                </a:path>
-              </a:pathLst>
-            </a:custGeom>
-            <a:solidFill>
-              <a:schemeClr val="accent2">
-                <a:alpha val="70000"/>
-              </a:schemeClr>
-            </a:solidFill>
-            <a:ln>
-              <a:noFill/>
-            </a:ln>
-            <a:effectLst/>
-          </p:spPr>
-          <p:style>
-            <a:lnRef idx="1">
-              <a:schemeClr val="accent1"/>
-            </a:lnRef>
-            <a:fillRef idx="3">
-              <a:schemeClr val="accent1"/>
-            </a:fillRef>
-            <a:effectRef idx="2">
-              <a:schemeClr val="accent1"/>
-            </a:effectRef>
-            <a:fontRef idx="minor">
-              <a:schemeClr val="lt1"/>
-            </a:fontRef>
-          </p:style>
-          <p:txBody>
-            <a:bodyPr/>
-            <a:lstStyle/>
-            <a:p>
-              <a:endParaRPr lang="es-CO"/>
-            </a:p>
-          </p:txBody>
-        </p:sp>
-        <p:sp>
-          <p:nvSpPr>
-            <p:cNvPr id="18" name="Rectangle 29">
-              <a:extLst>
-                <a:ext uri="{FF2B5EF4-FFF2-40B4-BE49-F238E27FC236}">
-                  <a16:creationId xmlns:a16="http://schemas.microsoft.com/office/drawing/2014/main" id="{6AE546F2-92C0-4C9C-BF28-052A7D0A3B73}"/>
-                </a:ext>
-                <a:ext uri="{C183D7F6-B498-43B3-948B-1728B52AA6E4}">
-                  <adec:decorative xmlns:adec="http://schemas.microsoft.com/office/drawing/2017/decorative" val="1"/>
-                </a:ext>
-              </a:extLst>
-            </p:cNvPr>
-            <p:cNvSpPr/>
-            <p:nvPr>
-              <p:extLst>
-                <p:ext uri="{386F3935-93C4-4BCD-93E2-E3B085C9AB24}">
-                  <p16:designElem xmlns:p16="http://schemas.microsoft.com/office/powerpoint/2015/main" val="1"/>
-                </p:ext>
-              </p:extLst>
-            </p:nvPr>
-          </p:nvSpPr>
-          <p:spPr>
-            <a:xfrm>
-              <a:off x="10938999" y="-8467"/>
-              <a:ext cx="1249825" cy="6866467"/>
-            </a:xfrm>
-            <a:custGeom>
-              <a:avLst/>
-              <a:gdLst/>
-              <a:ahLst/>
-              <a:cxnLst/>
-              <a:rect l="l" t="t" r="r" b="b"/>
-              <a:pathLst>
-                <a:path w="1249825" h="6858000">
-                  <a:moveTo>
-                    <a:pt x="0" y="0"/>
-                  </a:moveTo>
-                  <a:lnTo>
-                    <a:pt x="1249825" y="0"/>
-                  </a:lnTo>
-                  <a:lnTo>
-                    <a:pt x="1249825" y="6858000"/>
-                  </a:lnTo>
-                  <a:lnTo>
-                    <a:pt x="1109382" y="6858000"/>
-                  </a:lnTo>
-                  <a:lnTo>
-                    <a:pt x="0" y="0"/>
-                  </a:lnTo>
-                  <a:close/>
-                </a:path>
-              </a:pathLst>
-            </a:custGeom>
-            <a:solidFill>
-              <a:schemeClr val="accent2">
-                <a:lumMod val="75000"/>
-                <a:alpha val="80000"/>
-              </a:schemeClr>
-            </a:solidFill>
-            <a:ln>
-              <a:noFill/>
-            </a:ln>
-            <a:effectLst/>
-          </p:spPr>
-          <p:style>
-            <a:lnRef idx="1">
-              <a:schemeClr val="accent1"/>
-            </a:lnRef>
-            <a:fillRef idx="3">
-              <a:schemeClr val="accent1"/>
-            </a:fillRef>
-            <a:effectRef idx="2">
-              <a:schemeClr val="accent1"/>
-            </a:effectRef>
-            <a:fontRef idx="minor">
-              <a:schemeClr val="lt1"/>
-            </a:fontRef>
-          </p:style>
-          <p:txBody>
-            <a:bodyPr/>
-            <a:lstStyle/>
-            <a:p>
-              <a:endParaRPr lang="es-CO"/>
-            </a:p>
-          </p:txBody>
-        </p:sp>
-        <p:sp>
-          <p:nvSpPr>
-            <p:cNvPr id="19" name="Isosceles Triangle 18">
-              <a:extLst>
-                <a:ext uri="{FF2B5EF4-FFF2-40B4-BE49-F238E27FC236}">
-                  <a16:creationId xmlns:a16="http://schemas.microsoft.com/office/drawing/2014/main" id="{1111385C-91E7-44E8-AAE5-019E48D76FF1}"/>
-                </a:ext>
-                <a:ext uri="{C183D7F6-B498-43B3-948B-1728B52AA6E4}">
-                  <adec:decorative xmlns:adec="http://schemas.microsoft.com/office/drawing/2017/decorative" val="1"/>
-                </a:ext>
-              </a:extLst>
-            </p:cNvPr>
-            <p:cNvSpPr/>
-            <p:nvPr>
-              <p:extLst>
-                <p:ext uri="{386F3935-93C4-4BCD-93E2-E3B085C9AB24}">
-                  <p16:designElem xmlns:p16="http://schemas.microsoft.com/office/powerpoint/2015/main" val="1"/>
-                </p:ext>
-              </p:extLst>
-            </p:nvPr>
-          </p:nvSpPr>
-          <p:spPr>
-            <a:xfrm>
-              <a:off x="10371666" y="3589867"/>
-              <a:ext cx="1817159" cy="3268133"/>
-            </a:xfrm>
-            <a:prstGeom prst="triangle">
-              <a:avLst>
-                <a:gd name="adj" fmla="val 100000"/>
-              </a:avLst>
-            </a:prstGeom>
-            <a:solidFill>
-              <a:schemeClr val="accent1">
-                <a:lumMod val="75000"/>
-                <a:alpha val="66000"/>
-              </a:schemeClr>
-            </a:solidFill>
-            <a:ln>
-              <a:noFill/>
-            </a:ln>
-            <a:effectLst/>
-          </p:spPr>
-          <p:style>
-            <a:lnRef idx="1">
-              <a:schemeClr val="accent1"/>
-            </a:lnRef>
-            <a:fillRef idx="3">
-              <a:schemeClr val="accent1"/>
-            </a:fillRef>
-            <a:effectRef idx="2">
-              <a:schemeClr val="accent1"/>
-            </a:effectRef>
-            <a:fontRef idx="minor">
-              <a:schemeClr val="lt1"/>
-            </a:fontRef>
-          </p:style>
-          <p:txBody>
-            <a:bodyPr/>
-            <a:lstStyle/>
-            <a:p>
-              <a:endParaRPr lang="es-CO"/>
-            </a:p>
-          </p:txBody>
-        </p:sp>
-        <p:sp>
-          <p:nvSpPr>
-            <p:cNvPr id="20" name="Isosceles Triangle 19">
-              <a:extLst>
-                <a:ext uri="{FF2B5EF4-FFF2-40B4-BE49-F238E27FC236}">
-                  <a16:creationId xmlns:a16="http://schemas.microsoft.com/office/drawing/2014/main" id="{54455A30-C651-4002-BE70-2A0F05BA38B9}"/>
-                </a:ext>
-                <a:ext uri="{C183D7F6-B498-43B3-948B-1728B52AA6E4}">
-                  <adec:decorative xmlns:adec="http://schemas.microsoft.com/office/drawing/2017/decorative" val="1"/>
-                </a:ext>
-              </a:extLst>
-            </p:cNvPr>
-            <p:cNvSpPr/>
-            <p:nvPr>
-              <p:extLst>
-                <p:ext uri="{386F3935-93C4-4BCD-93E2-E3B085C9AB24}">
-                  <p16:designElem xmlns:p16="http://schemas.microsoft.com/office/powerpoint/2015/main" val="1"/>
-                </p:ext>
-              </p:extLst>
-            </p:nvPr>
-          </p:nvSpPr>
-          <p:spPr>
-            <a:xfrm>
-              <a:off x="0" y="4013200"/>
-              <a:ext cx="448733" cy="2844800"/>
-            </a:xfrm>
-            <a:prstGeom prst="triangle">
-              <a:avLst>
-                <a:gd name="adj" fmla="val 0"/>
-              </a:avLst>
-            </a:prstGeom>
-            <a:solidFill>
-              <a:schemeClr val="accent1">
-                <a:alpha val="70000"/>
-              </a:schemeClr>
-            </a:solidFill>
-            <a:ln>
-              <a:noFill/>
-            </a:ln>
-            <a:effectLst/>
-          </p:spPr>
-          <p:style>
-            <a:lnRef idx="1">
-              <a:schemeClr val="accent1"/>
-            </a:lnRef>
-            <a:fillRef idx="3">
-              <a:schemeClr val="accent1"/>
-            </a:fillRef>
-            <a:effectRef idx="2">
-              <a:schemeClr val="accent1"/>
-            </a:effectRef>
-            <a:fontRef idx="minor">
-              <a:schemeClr val="lt1"/>
-            </a:fontRef>
-          </p:style>
-          <p:txBody>
-            <a:bodyPr/>
-            <a:lstStyle/>
-            <a:p>
-              <a:endParaRPr lang="es-CO"/>
-            </a:p>
-          </p:txBody>
-        </p:sp>
-      </p:grpSp>
-      <p:sp useBgFill="1">
-        <p:nvSpPr>
-          <p:cNvPr id="22" name="Rectangle 21">
-            <a:extLst>
-              <a:ext uri="{FF2B5EF4-FFF2-40B4-BE49-F238E27FC236}">
-                <a16:creationId xmlns:a16="http://schemas.microsoft.com/office/drawing/2014/main" id="{45B71F80-1F92-4074-84D9-16A062B215B3}"/>
-              </a:ext>
-              <a:ext uri="{C183D7F6-B498-43B3-948B-1728B52AA6E4}">
-                <adec:decorative xmlns:adec="http://schemas.microsoft.com/office/drawing/2017/decorative" val="1"/>
-              </a:ext>
-            </a:extLst>
-          </p:cNvPr>
-          <p:cNvSpPr>
-            <a:spLocks noGrp="1" noRot="1" noChangeAspect="1" noMove="1" noResize="1" noEditPoints="1" noAdjustHandles="1" noChangeArrowheads="1" noChangeShapeType="1" noTextEdit="1"/>
-          </p:cNvSpPr>
-          <p:nvPr>
-            <p:extLst>
-              <p:ext uri="{386F3935-93C4-4BCD-93E2-E3B085C9AB24}">
-                <p16:designElem xmlns:p16="http://schemas.microsoft.com/office/powerpoint/2015/main" val="1"/>
-              </p:ext>
-            </p:extLst>
-          </p:nvPr>
-        </p:nvSpPr>
-        <p:spPr>
-          <a:xfrm>
-            <a:off x="0" y="0"/>
-            <a:ext cx="12192000" cy="6858000"/>
-          </a:xfrm>
-          <a:prstGeom prst="rect">
-            <a:avLst/>
-          </a:prstGeom>
-          <a:ln>
-            <a:noFill/>
-          </a:ln>
-        </p:spPr>
-        <p:style>
-          <a:lnRef idx="2">
-            <a:schemeClr val="accent1">
-              <a:shade val="50000"/>
-            </a:schemeClr>
-          </a:lnRef>
-          <a:fillRef idx="1">
-            <a:schemeClr val="accent1"/>
-          </a:fillRef>
-          <a:effectRef idx="0">
-            <a:schemeClr val="accent1"/>
-          </a:effectRef>
-          <a:fontRef idx="minor">
-            <a:schemeClr val="lt1"/>
-          </a:fontRef>
-        </p:style>
-        <p:txBody>
-          <a:bodyPr rtlCol="0" anchor="ctr"/>
-          <a:lstStyle/>
-          <a:p>
-            <a:pPr algn="ctr"/>
-            <a:endParaRPr lang="en-US"/>
-          </a:p>
-        </p:txBody>
-      </p:sp>
-      <p:sp>
-        <p:nvSpPr>
-          <p:cNvPr id="4" name="CuadroTexto 3">
-            <a:extLst>
-              <a:ext uri="{FF2B5EF4-FFF2-40B4-BE49-F238E27FC236}">
-                <a16:creationId xmlns:a16="http://schemas.microsoft.com/office/drawing/2014/main" id="{75BC9E7D-774A-42C8-7787-0051069B22BD}"/>
-              </a:ext>
-            </a:extLst>
-          </p:cNvPr>
-          <p:cNvSpPr txBox="1"/>
-          <p:nvPr/>
-        </p:nvSpPr>
-        <p:spPr>
-          <a:xfrm>
-            <a:off x="1286933" y="609600"/>
-            <a:ext cx="10197494" cy="1099457"/>
-          </a:xfrm>
-          <a:prstGeom prst="rect">
-            <a:avLst/>
-          </a:prstGeom>
-        </p:spPr>
-        <p:txBody>
-          <a:bodyPr vert="horz" lIns="91440" tIns="45720" rIns="91440" bIns="45720" rtlCol="0" anchor="t">
-            <a:normAutofit/>
-          </a:bodyPr>
-          <a:lstStyle/>
-          <a:p>
-            <a:pPr>
-              <a:spcBef>
-                <a:spcPct val="0"/>
-              </a:spcBef>
-              <a:spcAft>
-                <a:spcPts val="600"/>
-              </a:spcAft>
-            </a:pPr>
-            <a:r>
-              <a:rPr lang="en-US" sz="3600" b="1" dirty="0">
-                <a:solidFill>
-                  <a:schemeClr val="accent1"/>
-                </a:solidFill>
-                <a:latin typeface="+mj-lt"/>
-                <a:ea typeface="+mj-ea"/>
-                <a:cs typeface="+mj-cs"/>
-              </a:rPr>
-              <a:t>RESULTADOS MODELO PREDICTIVO</a:t>
-            </a:r>
-          </a:p>
-        </p:txBody>
-      </p:sp>
-      <p:sp>
-        <p:nvSpPr>
-          <p:cNvPr id="24" name="Isosceles Triangle 23">
-            <a:extLst>
-              <a:ext uri="{FF2B5EF4-FFF2-40B4-BE49-F238E27FC236}">
-                <a16:creationId xmlns:a16="http://schemas.microsoft.com/office/drawing/2014/main" id="{7209C9DA-6E0D-46D9-8275-C52222D8CCAC}"/>
-              </a:ext>
-              <a:ext uri="{C183D7F6-B498-43B3-948B-1728B52AA6E4}">
-                <adec:decorative xmlns:adec="http://schemas.microsoft.com/office/drawing/2017/decorative" val="1"/>
-              </a:ext>
-            </a:extLst>
-          </p:cNvPr>
-          <p:cNvSpPr>
-            <a:spLocks noGrp="1" noRot="1" noChangeAspect="1" noMove="1" noResize="1" noEditPoints="1" noAdjustHandles="1" noChangeArrowheads="1" noChangeShapeType="1" noTextEdit="1"/>
-          </p:cNvSpPr>
-          <p:nvPr>
-            <p:extLst>
-              <p:ext uri="{386F3935-93C4-4BCD-93E2-E3B085C9AB24}">
-                <p16:designElem xmlns:p16="http://schemas.microsoft.com/office/powerpoint/2015/main" val="1"/>
-              </p:ext>
-            </p:extLst>
-          </p:nvPr>
-        </p:nvSpPr>
-        <p:spPr>
-          <a:xfrm rot="10800000">
-            <a:off x="0" y="0"/>
-            <a:ext cx="842596" cy="5666154"/>
-          </a:xfrm>
-          <a:prstGeom prst="triangle">
-            <a:avLst>
-              <a:gd name="adj" fmla="val 100000"/>
-            </a:avLst>
-          </a:prstGeom>
-          <a:solidFill>
-            <a:schemeClr val="accent1">
-              <a:alpha val="85000"/>
-            </a:schemeClr>
-          </a:solidFill>
-          <a:ln>
-            <a:noFill/>
-          </a:ln>
-          <a:effectLst/>
-        </p:spPr>
-        <p:style>
-          <a:lnRef idx="1">
-            <a:schemeClr val="accent1"/>
-          </a:lnRef>
-          <a:fillRef idx="3">
-            <a:schemeClr val="accent1"/>
-          </a:fillRef>
-          <a:effectRef idx="2">
-            <a:schemeClr val="accent1"/>
-          </a:effectRef>
-          <a:fontRef idx="minor">
-            <a:schemeClr val="lt1"/>
-          </a:fontRef>
-        </p:style>
-        <p:txBody>
-          <a:bodyPr/>
-          <a:lstStyle/>
-          <a:p>
-            <a:endParaRPr lang="es-CO"/>
-          </a:p>
-        </p:txBody>
-      </p:sp>
-      <p:sp>
-        <p:nvSpPr>
-          <p:cNvPr id="26" name="Isosceles Triangle 25">
-            <a:extLst>
-              <a:ext uri="{FF2B5EF4-FFF2-40B4-BE49-F238E27FC236}">
-                <a16:creationId xmlns:a16="http://schemas.microsoft.com/office/drawing/2014/main" id="{3EB57A4D-E0D0-46DA-B339-F24CA46FA70B}"/>
-              </a:ext>
-              <a:ext uri="{C183D7F6-B498-43B3-948B-1728B52AA6E4}">
-                <adec:decorative xmlns:adec="http://schemas.microsoft.com/office/drawing/2017/decorative" val="1"/>
-              </a:ext>
-            </a:extLst>
-          </p:cNvPr>
-          <p:cNvSpPr>
-            <a:spLocks noGrp="1" noRot="1" noChangeAspect="1" noMove="1" noResize="1" noEditPoints="1" noAdjustHandles="1" noChangeArrowheads="1" noChangeShapeType="1" noTextEdit="1"/>
-          </p:cNvSpPr>
-          <p:nvPr>
-            <p:extLst>
-              <p:ext uri="{386F3935-93C4-4BCD-93E2-E3B085C9AB24}">
-                <p16:designElem xmlns:p16="http://schemas.microsoft.com/office/powerpoint/2015/main" val="1"/>
-              </p:ext>
-            </p:extLst>
-          </p:nvPr>
-        </p:nvSpPr>
-        <p:spPr>
-          <a:xfrm flipH="1">
-            <a:off x="11743267" y="4013200"/>
-            <a:ext cx="448733" cy="2844800"/>
-          </a:xfrm>
-          <a:prstGeom prst="triangle">
-            <a:avLst>
-              <a:gd name="adj" fmla="val 0"/>
-            </a:avLst>
-          </a:prstGeom>
-          <a:solidFill>
-            <a:schemeClr val="accent1">
-              <a:alpha val="85000"/>
-            </a:schemeClr>
-          </a:solidFill>
-          <a:ln>
-            <a:noFill/>
-          </a:ln>
-          <a:effectLst/>
-        </p:spPr>
-        <p:style>
-          <a:lnRef idx="1">
-            <a:schemeClr val="accent1"/>
-          </a:lnRef>
-          <a:fillRef idx="3">
-            <a:schemeClr val="accent1"/>
-          </a:fillRef>
-          <a:effectRef idx="2">
-            <a:schemeClr val="accent1"/>
-          </a:effectRef>
-          <a:fontRef idx="minor">
-            <a:schemeClr val="lt1"/>
-          </a:fontRef>
-        </p:style>
-        <p:txBody>
-          <a:bodyPr/>
-          <a:lstStyle/>
-          <a:p>
-            <a:endParaRPr lang="es-CO"/>
-          </a:p>
-        </p:txBody>
-      </p:sp>
-      <p:graphicFrame>
-        <p:nvGraphicFramePr>
-          <p:cNvPr id="7" name="Tabla 6">
-            <a:extLst>
-              <a:ext uri="{FF2B5EF4-FFF2-40B4-BE49-F238E27FC236}">
-                <a16:creationId xmlns:a16="http://schemas.microsoft.com/office/drawing/2014/main" id="{9DDB934C-C0D0-66FD-4D35-67F78E72E7B8}"/>
-              </a:ext>
-            </a:extLst>
-          </p:cNvPr>
-          <p:cNvGraphicFramePr>
-            <a:graphicFrameLocks noGrp="1"/>
-          </p:cNvGraphicFramePr>
-          <p:nvPr>
-            <p:extLst>
-              <p:ext uri="{D42A27DB-BD31-4B8C-83A1-F6EECF244321}">
-                <p14:modId xmlns:p14="http://schemas.microsoft.com/office/powerpoint/2010/main" val="1356907803"/>
-              </p:ext>
-            </p:extLst>
-          </p:nvPr>
-        </p:nvGraphicFramePr>
-        <p:xfrm>
-          <a:off x="1111539" y="1772234"/>
-          <a:ext cx="8596312" cy="1554480"/>
-        </p:xfrm>
-        <a:graphic>
-          <a:graphicData uri="http://schemas.openxmlformats.org/drawingml/2006/table">
-            <a:tbl>
-              <a:tblPr>
-                <a:tableStyleId>{5C22544A-7EE6-4342-B048-85BDC9FD1C3A}</a:tableStyleId>
-              </a:tblPr>
-              <a:tblGrid>
-                <a:gridCol w="4298156">
-                  <a:extLst>
-                    <a:ext uri="{9D8B030D-6E8A-4147-A177-3AD203B41FA5}">
-                      <a16:colId xmlns:a16="http://schemas.microsoft.com/office/drawing/2014/main" val="914380509"/>
-                    </a:ext>
-                  </a:extLst>
-                </a:gridCol>
-                <a:gridCol w="4298156">
-                  <a:extLst>
-                    <a:ext uri="{9D8B030D-6E8A-4147-A177-3AD203B41FA5}">
-                      <a16:colId xmlns:a16="http://schemas.microsoft.com/office/drawing/2014/main" val="3947254877"/>
-                    </a:ext>
-                  </a:extLst>
-                </a:gridCol>
-              </a:tblGrid>
-              <a:tr h="0">
-                <a:tc>
-                  <a:txBody>
-                    <a:bodyPr/>
-                    <a:lstStyle/>
-                    <a:p>
-                      <a:pPr>
-                        <a:spcAft>
-                          <a:spcPts val="1200"/>
-                        </a:spcAft>
-                        <a:buNone/>
-                      </a:pPr>
-                      <a:r>
-                        <a:rPr lang="es-CO">
-                          <a:effectLst/>
-                        </a:rPr>
-                        <a:t>Métrica</a:t>
-                      </a:r>
-                      <a:endParaRPr lang="es-CO" b="1">
-                        <a:effectLst/>
-                      </a:endParaRPr>
-                    </a:p>
-                  </a:txBody>
-                  <a:tcPr marL="123825" marR="123825" marT="57150" marB="57150" anchor="ctr"/>
-                </a:tc>
-                <a:tc>
-                  <a:txBody>
-                    <a:bodyPr/>
-                    <a:lstStyle/>
-                    <a:p>
-                      <a:pPr algn="r">
-                        <a:spcAft>
-                          <a:spcPts val="1200"/>
-                        </a:spcAft>
-                        <a:buNone/>
-                      </a:pPr>
-                      <a:r>
-                        <a:rPr lang="es-CO">
-                          <a:effectLst/>
-                        </a:rPr>
-                        <a:t>Resultado</a:t>
-                      </a:r>
-                      <a:endParaRPr lang="es-CO" b="1">
-                        <a:effectLst/>
-                      </a:endParaRPr>
-                    </a:p>
-                  </a:txBody>
-                  <a:tcPr marL="123825" marR="123825" marT="57150" marB="57150" anchor="ctr"/>
-                </a:tc>
-                <a:extLst>
-                  <a:ext uri="{0D108BD9-81ED-4DB2-BD59-A6C34878D82A}">
-                    <a16:rowId xmlns:a16="http://schemas.microsoft.com/office/drawing/2014/main" val="3028498142"/>
-                  </a:ext>
-                </a:extLst>
-              </a:tr>
-              <a:tr h="0">
-                <a:tc>
-                  <a:txBody>
-                    <a:bodyPr/>
-                    <a:lstStyle/>
-                    <a:p>
-                      <a:pPr>
-                        <a:spcAft>
-                          <a:spcPts val="1200"/>
-                        </a:spcAft>
-                        <a:buNone/>
-                      </a:pPr>
-                      <a:r>
-                        <a:rPr lang="es-CO">
-                          <a:effectLst/>
-                        </a:rPr>
-                        <a:t>MAE</a:t>
-                      </a:r>
-                    </a:p>
-                  </a:txBody>
-                  <a:tcPr marL="123825" marR="123825" marT="57150" marB="57150" anchor="ctr"/>
-                </a:tc>
-                <a:tc>
-                  <a:txBody>
-                    <a:bodyPr/>
-                    <a:lstStyle/>
-                    <a:p>
-                      <a:pPr algn="r">
-                        <a:spcAft>
-                          <a:spcPts val="1200"/>
-                        </a:spcAft>
-                        <a:buNone/>
-                      </a:pPr>
-                      <a:r>
-                        <a:rPr lang="es-CO">
-                          <a:effectLst/>
-                        </a:rPr>
-                        <a:t>1.71</a:t>
-                      </a:r>
-                    </a:p>
-                  </a:txBody>
-                  <a:tcPr marL="123825" marR="123825" marT="57150" marB="57150" anchor="ctr"/>
-                </a:tc>
-                <a:extLst>
-                  <a:ext uri="{0D108BD9-81ED-4DB2-BD59-A6C34878D82A}">
-                    <a16:rowId xmlns:a16="http://schemas.microsoft.com/office/drawing/2014/main" val="1252697640"/>
-                  </a:ext>
-                </a:extLst>
-              </a:tr>
-              <a:tr h="0">
-                <a:tc>
-                  <a:txBody>
-                    <a:bodyPr/>
-                    <a:lstStyle/>
-                    <a:p>
-                      <a:pPr>
-                        <a:spcAft>
-                          <a:spcPts val="1200"/>
-                        </a:spcAft>
-                        <a:buNone/>
-                      </a:pPr>
-                      <a:r>
-                        <a:rPr lang="es-CO">
-                          <a:effectLst/>
-                        </a:rPr>
-                        <a:t>RMSE</a:t>
-                      </a:r>
-                    </a:p>
-                  </a:txBody>
-                  <a:tcPr marL="123825" marR="123825" marT="57150" marB="57150" anchor="ctr"/>
-                </a:tc>
-                <a:tc>
-                  <a:txBody>
-                    <a:bodyPr/>
-                    <a:lstStyle/>
-                    <a:p>
-                      <a:pPr algn="r">
-                        <a:spcAft>
-                          <a:spcPts val="1200"/>
-                        </a:spcAft>
-                        <a:buNone/>
-                      </a:pPr>
-                      <a:r>
-                        <a:rPr lang="es-CO">
-                          <a:effectLst/>
-                        </a:rPr>
-                        <a:t>2.56</a:t>
-                      </a:r>
-                    </a:p>
-                  </a:txBody>
-                  <a:tcPr marL="123825" marR="123825" marT="57150" marB="57150" anchor="ctr"/>
-                </a:tc>
-                <a:extLst>
-                  <a:ext uri="{0D108BD9-81ED-4DB2-BD59-A6C34878D82A}">
-                    <a16:rowId xmlns:a16="http://schemas.microsoft.com/office/drawing/2014/main" val="380399745"/>
-                  </a:ext>
-                </a:extLst>
-              </a:tr>
-              <a:tr h="0">
-                <a:tc>
-                  <a:txBody>
-                    <a:bodyPr/>
-                    <a:lstStyle/>
-                    <a:p>
-                      <a:pPr>
-                        <a:spcAft>
-                          <a:spcPts val="1200"/>
-                        </a:spcAft>
-                        <a:buNone/>
-                      </a:pPr>
-                      <a:r>
-                        <a:rPr lang="es-CO">
-                          <a:effectLst/>
-                        </a:rPr>
-                        <a:t>R²</a:t>
-                      </a:r>
-                    </a:p>
-                  </a:txBody>
-                  <a:tcPr marL="123825" marR="123825" marT="57150" marB="57150" anchor="ctr"/>
-                </a:tc>
-                <a:tc>
-                  <a:txBody>
-                    <a:bodyPr/>
-                    <a:lstStyle/>
-                    <a:p>
-                      <a:pPr algn="r">
-                        <a:spcAft>
-                          <a:spcPts val="1200"/>
-                        </a:spcAft>
-                        <a:buNone/>
-                      </a:pPr>
-                      <a:r>
-                        <a:rPr lang="es-CO" dirty="0">
-                          <a:effectLst/>
-                        </a:rPr>
-                        <a:t>0.116</a:t>
-                      </a:r>
-                    </a:p>
-                  </a:txBody>
-                  <a:tcPr marL="123825" marR="123825" marT="57150" marB="57150" anchor="ctr"/>
-                </a:tc>
-                <a:extLst>
-                  <a:ext uri="{0D108BD9-81ED-4DB2-BD59-A6C34878D82A}">
-                    <a16:rowId xmlns:a16="http://schemas.microsoft.com/office/drawing/2014/main" val="2243382993"/>
-                  </a:ext>
-                </a:extLst>
-              </a:tr>
-            </a:tbl>
-          </a:graphicData>
-        </a:graphic>
-      </p:graphicFrame>
-      <p:sp>
-        <p:nvSpPr>
-          <p:cNvPr id="23" name="CuadroTexto 22">
-            <a:extLst>
-              <a:ext uri="{FF2B5EF4-FFF2-40B4-BE49-F238E27FC236}">
-                <a16:creationId xmlns:a16="http://schemas.microsoft.com/office/drawing/2014/main" id="{021A8C64-BEBB-47EF-558A-41DEAC2CD973}"/>
-              </a:ext>
-            </a:extLst>
-          </p:cNvPr>
-          <p:cNvSpPr txBox="1"/>
-          <p:nvPr/>
-        </p:nvSpPr>
-        <p:spPr>
-          <a:xfrm>
-            <a:off x="1075027" y="3681413"/>
-            <a:ext cx="8949046" cy="1754326"/>
-          </a:xfrm>
-          <a:prstGeom prst="rect">
-            <a:avLst/>
-          </a:prstGeom>
-          <a:noFill/>
-        </p:spPr>
-        <p:txBody>
-          <a:bodyPr wrap="square">
-            <a:spAutoFit/>
-          </a:bodyPr>
-          <a:lstStyle/>
-          <a:p>
-            <a:r>
-              <a:rPr lang="es-ES" dirty="0"/>
-              <a:t>El modelo presenta un error absoluto medio (MAE) de aproximadamente 1.71 puntos y explica cerca del 11.6 % de la variabilidad (R2) del puntaje en los datos de prueba.</a:t>
-            </a:r>
-          </a:p>
-          <a:p>
-            <a:endParaRPr lang="es-ES" dirty="0"/>
-          </a:p>
-          <a:p>
-            <a:r>
-              <a:rPr lang="es-ES" dirty="0"/>
-              <a:t>Los resultados indican que las características analizadas aportan información sobre la calidad, pero no son suficientes por sí solas para predecir con alta precisión el puntaje sensorial.</a:t>
-            </a:r>
-            <a:endParaRPr lang="es-CO" dirty="0"/>
-          </a:p>
-        </p:txBody>
-      </p:sp>
-    </p:spTree>
-    <p:extLst>
-      <p:ext uri="{BB962C8B-B14F-4D97-AF65-F5344CB8AC3E}">
-        <p14:creationId xmlns:p14="http://schemas.microsoft.com/office/powerpoint/2010/main" val="899003741"/>
-      </p:ext>
-    </p:extLst>
-  </p:cSld>
-  <p:clrMapOvr>
-    <a:masterClrMapping/>
-  </p:clrMapOvr>
-</p:sld>
-</file>
-
-<file path=ppt/slides/slide6.xml><?xml version="1.0" encoding="utf-8"?>
-<p:sld xmlns:a="http://schemas.openxmlformats.org/drawingml/2006/main" xmlns:r="http://schemas.openxmlformats.org/officeDocument/2006/relationships" xmlns:p="http://schemas.openxmlformats.org/presentationml/2006/main">
-  <p:cSld>
-    <p:spTree>
-      <p:nvGrpSpPr>
-        <p:cNvPr id="1" name="">
-          <a:extLst>
-            <a:ext uri="{FF2B5EF4-FFF2-40B4-BE49-F238E27FC236}">
-              <a16:creationId xmlns:a16="http://schemas.microsoft.com/office/drawing/2014/main" id="{F7CFFBD4-5D9C-6293-3897-323064F828E6}"/>
-            </a:ext>
-          </a:extLst>
-        </p:cNvPr>
-        <p:cNvGrpSpPr/>
-        <p:nvPr/>
-      </p:nvGrpSpPr>
-      <p:grpSpPr>
-        <a:xfrm>
-          <a:off x="0" y="0"/>
-          <a:ext cx="0" cy="0"/>
-          <a:chOff x="0" y="0"/>
-          <a:chExt cx="0" cy="0"/>
-        </a:xfrm>
-      </p:grpSpPr>
-      <p:sp>
-        <p:nvSpPr>
-          <p:cNvPr id="4" name="CuadroTexto 3">
-            <a:extLst>
-              <a:ext uri="{FF2B5EF4-FFF2-40B4-BE49-F238E27FC236}">
-                <a16:creationId xmlns:a16="http://schemas.microsoft.com/office/drawing/2014/main" id="{82D21C77-7835-D012-9A34-0ABB3166C1CC}"/>
-              </a:ext>
-            </a:extLst>
-          </p:cNvPr>
-          <p:cNvSpPr txBox="1"/>
-          <p:nvPr/>
-        </p:nvSpPr>
-        <p:spPr>
-          <a:xfrm>
-            <a:off x="914401" y="524869"/>
-            <a:ext cx="8357936" cy="707886"/>
-          </a:xfrm>
-          <a:prstGeom prst="rect">
-            <a:avLst/>
-          </a:prstGeom>
-          <a:noFill/>
-        </p:spPr>
-        <p:txBody>
-          <a:bodyPr wrap="square" rtlCol="0">
-            <a:spAutoFit/>
-          </a:bodyPr>
-          <a:lstStyle/>
-          <a:p>
-            <a:pPr algn="ctr"/>
-            <a:r>
-              <a:rPr lang="es-ES" sz="4000" b="1" dirty="0">
-                <a:solidFill>
-                  <a:schemeClr val="accent1">
-                    <a:lumMod val="50000"/>
-                  </a:schemeClr>
-                </a:solidFill>
-              </a:rPr>
-              <a:t>Evaluación Visual del Modelo</a:t>
-            </a:r>
-          </a:p>
-        </p:txBody>
-      </p:sp>
-      <p:pic>
-        <p:nvPicPr>
-          <p:cNvPr id="3" name="Imagen 2">
-            <a:extLst>
-              <a:ext uri="{FF2B5EF4-FFF2-40B4-BE49-F238E27FC236}">
-                <a16:creationId xmlns:a16="http://schemas.microsoft.com/office/drawing/2014/main" id="{C505B5C6-2755-6E97-8032-E75D3995AD10}"/>
-              </a:ext>
-            </a:extLst>
-          </p:cNvPr>
-          <p:cNvPicPr>
-            <a:picLocks noChangeAspect="1"/>
-          </p:cNvPicPr>
-          <p:nvPr/>
-        </p:nvPicPr>
-        <p:blipFill>
-          <a:blip r:embed="rId2"/>
-          <a:stretch>
-            <a:fillRect/>
-          </a:stretch>
-        </p:blipFill>
-        <p:spPr>
-          <a:xfrm>
-            <a:off x="3819524" y="1232755"/>
-            <a:ext cx="6233228" cy="5148263"/>
-          </a:xfrm>
-          <a:prstGeom prst="rect">
-            <a:avLst/>
-          </a:prstGeom>
-        </p:spPr>
-      </p:pic>
-      <p:sp>
-        <p:nvSpPr>
-          <p:cNvPr id="7" name="CuadroTexto 6">
-            <a:extLst>
-              <a:ext uri="{FF2B5EF4-FFF2-40B4-BE49-F238E27FC236}">
-                <a16:creationId xmlns:a16="http://schemas.microsoft.com/office/drawing/2014/main" id="{B95AD77C-B389-D8F9-380A-0F07343161BE}"/>
-              </a:ext>
-            </a:extLst>
-          </p:cNvPr>
-          <p:cNvSpPr txBox="1"/>
-          <p:nvPr/>
-        </p:nvSpPr>
-        <p:spPr>
-          <a:xfrm>
-            <a:off x="538414" y="1903827"/>
-            <a:ext cx="2962024" cy="3416320"/>
-          </a:xfrm>
-          <a:prstGeom prst="rect">
-            <a:avLst/>
-          </a:prstGeom>
-          <a:noFill/>
-        </p:spPr>
-        <p:txBody>
-          <a:bodyPr wrap="square" rtlCol="0">
-            <a:spAutoFit/>
-          </a:bodyPr>
-          <a:lstStyle/>
-          <a:p>
-            <a:r>
-              <a:rPr lang="es-ES" sz="2400" dirty="0"/>
-              <a:t>La mayor parte de las evaluaciones se concentra alrededor de los 80–85 puntos, aunque se observa una mayor extensión hacia los puntajes bajos.</a:t>
-            </a:r>
-            <a:endParaRPr lang="es-CO" dirty="0"/>
-          </a:p>
-        </p:txBody>
-      </p:sp>
-    </p:spTree>
-    <p:extLst>
-      <p:ext uri="{BB962C8B-B14F-4D97-AF65-F5344CB8AC3E}">
-        <p14:creationId xmlns:p14="http://schemas.microsoft.com/office/powerpoint/2010/main" val="617261825"/>
-      </p:ext>
-    </p:extLst>
-  </p:cSld>
-  <p:clrMapOvr>
-    <a:masterClrMapping/>
-  </p:clrMapOvr>
-</p:sld>
-</file>
-
-<file path=ppt/slides/slide7.xml><?xml version="1.0" encoding="utf-8"?>
-<p:sld xmlns:a="http://schemas.openxmlformats.org/drawingml/2006/main" xmlns:r="http://schemas.openxmlformats.org/officeDocument/2006/relationships" xmlns:p="http://schemas.openxmlformats.org/presentationml/2006/main">
-  <p:cSld>
-    <p:spTree>
-      <p:nvGrpSpPr>
-        <p:cNvPr id="1" name=""/>
-        <p:cNvGrpSpPr/>
-        <p:nvPr/>
-      </p:nvGrpSpPr>
-      <p:grpSpPr>
-        <a:xfrm>
-          <a:off x="0" y="0"/>
-          <a:ext cx="0" cy="0"/>
-          <a:chOff x="0" y="0"/>
-          <a:chExt cx="0" cy="0"/>
-        </a:xfrm>
-      </p:grpSpPr>
-      <p:pic>
-        <p:nvPicPr>
-          <p:cNvPr id="3" name="Imagen 2">
-            <a:extLst>
-              <a:ext uri="{FF2B5EF4-FFF2-40B4-BE49-F238E27FC236}">
-                <a16:creationId xmlns:a16="http://schemas.microsoft.com/office/drawing/2014/main" id="{4A18BB7F-B688-B39B-4532-20C5322DA3B2}"/>
-              </a:ext>
-            </a:extLst>
-          </p:cNvPr>
-          <p:cNvPicPr>
-            <a:picLocks noChangeAspect="1"/>
-          </p:cNvPicPr>
-          <p:nvPr/>
-        </p:nvPicPr>
-        <p:blipFill>
-          <a:blip r:embed="rId2"/>
-          <a:stretch>
-            <a:fillRect/>
-          </a:stretch>
-        </p:blipFill>
-        <p:spPr>
-          <a:xfrm>
-            <a:off x="2381250" y="1690938"/>
-            <a:ext cx="5600700" cy="3514725"/>
-          </a:xfrm>
-          <a:prstGeom prst="rect">
-            <a:avLst/>
-          </a:prstGeom>
-        </p:spPr>
-      </p:pic>
-      <p:sp>
-        <p:nvSpPr>
-          <p:cNvPr id="5" name="CuadroTexto 4">
-            <a:extLst>
-              <a:ext uri="{FF2B5EF4-FFF2-40B4-BE49-F238E27FC236}">
-                <a16:creationId xmlns:a16="http://schemas.microsoft.com/office/drawing/2014/main" id="{48AB47C4-8A6F-CEC3-FEF6-AABB92B5BC2E}"/>
-              </a:ext>
-            </a:extLst>
-          </p:cNvPr>
-          <p:cNvSpPr txBox="1"/>
-          <p:nvPr/>
-        </p:nvSpPr>
-        <p:spPr>
-          <a:xfrm>
-            <a:off x="914401" y="524869"/>
-            <a:ext cx="9458324" cy="707886"/>
-          </a:xfrm>
-          <a:prstGeom prst="rect">
-            <a:avLst/>
-          </a:prstGeom>
-          <a:noFill/>
-        </p:spPr>
-        <p:txBody>
-          <a:bodyPr wrap="square" rtlCol="0">
-            <a:spAutoFit/>
-          </a:bodyPr>
-          <a:lstStyle/>
-          <a:p>
-            <a:pPr algn="ctr"/>
-            <a:r>
-              <a:rPr lang="es-ES" sz="4000" b="1" dirty="0">
-                <a:solidFill>
-                  <a:schemeClr val="accent1">
-                    <a:lumMod val="50000"/>
-                  </a:schemeClr>
-                </a:solidFill>
-              </a:rPr>
-              <a:t>Distribución del puntaje de Calidad</a:t>
-            </a:r>
-          </a:p>
-        </p:txBody>
-      </p:sp>
-      <p:sp>
-        <p:nvSpPr>
-          <p:cNvPr id="7" name="CuadroTexto 6">
-            <a:extLst>
-              <a:ext uri="{FF2B5EF4-FFF2-40B4-BE49-F238E27FC236}">
-                <a16:creationId xmlns:a16="http://schemas.microsoft.com/office/drawing/2014/main" id="{67AC9CC1-4F05-9652-A6CB-75793E0C95C7}"/>
-              </a:ext>
-            </a:extLst>
-          </p:cNvPr>
-          <p:cNvSpPr txBox="1"/>
-          <p:nvPr/>
-        </p:nvSpPr>
-        <p:spPr>
-          <a:xfrm>
-            <a:off x="1452814" y="5132802"/>
-            <a:ext cx="8357936" cy="1200329"/>
-          </a:xfrm>
-          <a:prstGeom prst="rect">
-            <a:avLst/>
-          </a:prstGeom>
-          <a:noFill/>
-        </p:spPr>
-        <p:txBody>
-          <a:bodyPr wrap="square" rtlCol="0">
-            <a:spAutoFit/>
-          </a:bodyPr>
-          <a:lstStyle/>
-          <a:p>
-            <a:r>
-              <a:rPr lang="es-ES" sz="2400" dirty="0"/>
-              <a:t>La mayor parte de las evaluaciones se concentra alrededor de los 80–85 puntos, aunque se observa una mayor extensión hacia los puntajes bajos.</a:t>
-            </a:r>
-            <a:endParaRPr lang="es-CO" dirty="0"/>
-          </a:p>
-        </p:txBody>
-      </p:sp>
-    </p:spTree>
-    <p:extLst>
-      <p:ext uri="{BB962C8B-B14F-4D97-AF65-F5344CB8AC3E}">
-        <p14:creationId xmlns:p14="http://schemas.microsoft.com/office/powerpoint/2010/main" val="441664500"/>
-      </p:ext>
-    </p:extLst>
-  </p:cSld>
-  <p:clrMapOvr>
-    <a:masterClrMapping/>
-  </p:clrMapOvr>
-</p:sld>
-</file>
-
-<file path=ppt/slides/slide8.xml><?xml version="1.0" encoding="utf-8"?>
 <p:sld xmlns:a="http://schemas.openxmlformats.org/drawingml/2006/main" xmlns:r="http://schemas.openxmlformats.org/officeDocument/2006/relationships" xmlns:p="http://schemas.openxmlformats.org/presentationml/2006/main">
   <p:cSld>
     <p:spTree>
@@ -12108,7 +9526,7 @@
 </p:sld>
 </file>
 
-<file path=ppt/slides/slide9.xml><?xml version="1.0" encoding="utf-8"?>
+<file path=ppt/slides/slide11.xml><?xml version="1.0" encoding="utf-8"?>
 <p:sld xmlns:a="http://schemas.openxmlformats.org/drawingml/2006/main" xmlns:r="http://schemas.openxmlformats.org/officeDocument/2006/relationships" xmlns:p="http://schemas.openxmlformats.org/presentationml/2006/main">
   <p:cSld>
     <p:bg>
@@ -13003,8 +10421,8 @@
         </p:nvSpPr>
         <p:spPr>
           <a:xfrm>
-            <a:off x="526163" y="1400838"/>
-            <a:ext cx="9988455" cy="5224724"/>
+            <a:off x="601757" y="637279"/>
+            <a:ext cx="9766735" cy="5363310"/>
           </a:xfrm>
           <a:prstGeom prst="rect">
             <a:avLst/>
@@ -13015,6 +10433,31 @@
             <a:noAutofit/>
           </a:bodyPr>
           <a:lstStyle/>
+          <a:p>
+            <a:pPr>
+              <a:lnSpc>
+                <a:spcPct val="90000"/>
+              </a:lnSpc>
+              <a:spcBef>
+                <a:spcPts val="1000"/>
+              </a:spcBef>
+              <a:buClr>
+                <a:schemeClr val="accent1"/>
+              </a:buClr>
+              <a:buSzPct val="80000"/>
+            </a:pPr>
+            <a:r>
+              <a:rPr lang="es-ES" sz="1400" dirty="0">
+                <a:solidFill>
+                  <a:schemeClr val="tx1">
+                    <a:lumMod val="75000"/>
+                    <a:lumOff val="25000"/>
+                  </a:schemeClr>
+                </a:solidFill>
+              </a:rPr>
+              <a:t>En el campo donde el clima dicta el ritmo de las cosechas, miles de productores entregan meses de trabajo confiando en que sus granos alcancen la taza perfecta. Sin embargo, en el mundo del café de especialidad, determinar la calidad de un lote ha sido históricamente un proceso envuelto en la subjetividad de los evaluadores y en la intuición del mercado. ¿Qué transforma realmente a un grano común en una experiencia sensorial extraordinaria?</a:t>
+            </a:r>
+          </a:p>
           <a:p>
             <a:pPr>
               <a:lnSpc>
@@ -13039,34 +10482,7 @@
                   </a:schemeClr>
                 </a:solidFill>
               </a:rPr>
-              <a:t>En el campo donde el clima dicta el ritmo de las cosechas, miles de productores entregan meses de trabajo confiando en que sus granos alcancen la taza perfecta. Sin embargo, en el mundo del café de especialidad, determinar la calidad de un lote ha sido históricamente un proceso envuelto en la subjetividad de los evaluadores y en la intuición del mercado. ¿Qué transforma realmente a un grano común en una experiencia sensorial extraordinaria?</a:t>
-            </a:r>
-          </a:p>
-          <a:p>
-            <a:pPr>
-              <a:lnSpc>
-                <a:spcPct val="90000"/>
-              </a:lnSpc>
-              <a:spcBef>
-                <a:spcPts val="1000"/>
-              </a:spcBef>
-              <a:buClr>
-                <a:schemeClr val="accent1"/>
-              </a:buClr>
-              <a:buSzPct val="80000"/>
-              <a:buFont typeface="Wingdings 3" charset="2"/>
-              <a:buChar char=""/>
-            </a:pPr>
-            <a:r>
-              <a:rPr lang="es-ES" sz="1400" dirty="0">
-                <a:solidFill>
-                  <a:schemeClr val="tx1">
-                    <a:lumMod val="75000"/>
-                    <a:lumOff val="25000"/>
-                  </a:schemeClr>
-                </a:solidFill>
-              </a:rPr>
-              <a:t>Para responder a esta interrogante, nos adentramos en los datos de la evaluación oficial del Coffee </a:t>
+              <a:t>Para abordar este tema tomamos los datos de la evaluación oficial del Coffee </a:t>
             </a:r>
             <a:r>
               <a:rPr lang="es-ES" sz="1400" dirty="0" err="1">
@@ -13132,7 +10548,7 @@
                   </a:schemeClr>
                 </a:solidFill>
               </a:rPr>
-              <a:t> en un análisis estadístico y analítico capaz de descifrar la anatomía de la calidad.</a:t>
+              <a:t> en un análisis estadístico y analítico capaz de descifrar cómo llegar a la calidad esperada (puntaje Total Cup Points).</a:t>
             </a:r>
           </a:p>
           <a:p>
@@ -13159,7 +10575,7 @@
                   </a:schemeClr>
                 </a:solidFill>
               </a:rPr>
-              <a:t>La anatomía del puntaje perfecto:</a:t>
+              <a:t>Cómo interactúan los distintos factores del grano?</a:t>
             </a:r>
           </a:p>
           <a:p>
@@ -13186,34 +10602,7 @@
                   </a:schemeClr>
                 </a:solidFill>
               </a:rPr>
-              <a:t>Al desglosar el puntaje total de taza (Total Cup Points), identificamos cómo interactúan los distintos factores del grano:</a:t>
-            </a:r>
-          </a:p>
-          <a:p>
-            <a:pPr>
-              <a:lnSpc>
-                <a:spcPct val="90000"/>
-              </a:lnSpc>
-              <a:spcBef>
-                <a:spcPts val="1000"/>
-              </a:spcBef>
-              <a:buClr>
-                <a:schemeClr val="accent1"/>
-              </a:buClr>
-              <a:buSzPct val="80000"/>
-              <a:buFont typeface="Wingdings 3" charset="2"/>
-              <a:buChar char=""/>
-            </a:pPr>
-            <a:r>
-              <a:rPr lang="es-ES" sz="1400" dirty="0">
-                <a:solidFill>
-                  <a:schemeClr val="tx1">
-                    <a:lumMod val="75000"/>
-                    <a:lumOff val="25000"/>
-                  </a:schemeClr>
-                </a:solidFill>
-              </a:rPr>
-              <a:t>El peso del perfil sensorial: Atributos como el sabor, el balance y la acidez mostraron la correlación directa más alta con la calificación final. Un perfil bien balanceado actúa como el pilar fundamental para superar la barrera de los 80 puntos de especialidad.</a:t>
+              <a:t>El peso del perfil sensorial: Atributos como el sabor, el balance y la acidez mostraron la correlación directa más alta con la calificación final. Un perfil bien balanceado es fundamental para superar la barrera de los 80 puntos de especialidad.</a:t>
             </a:r>
           </a:p>
           <a:p>
@@ -13267,7 +10656,7 @@
                   </a:schemeClr>
                 </a:solidFill>
               </a:rPr>
-              <a:t>El impacto de los defectos: La presencia de defectos físicos y niveles inadecuados de humedad no solo castigan el puntaje total, sino que introducen inconsistencias que arruinan la experiencia limpia del café.</a:t>
+              <a:t>El impacto de los defectos: La presencia de defectos físicos y niveles inadecuados de humedad reducen el puntaje total, e introducen inconsistencias que arruinan la experiencia limpia del café.</a:t>
             </a:r>
           </a:p>
           <a:p>
@@ -13297,63 +10686,4632 @@
               <a:t>Con estos hallazgos, construimos un modelo predictivo capaz de estimar la calidad sensorial a partir de las características físicas y de origen de la muestra. Este modelo demuestra que la calidad del café no es cuestión de suerte: es un patrón medible, predecible y optimizable.</a:t>
             </a:r>
           </a:p>
-          <a:p>
-            <a:pPr>
-              <a:lnSpc>
-                <a:spcPct val="90000"/>
-              </a:lnSpc>
-              <a:spcBef>
-                <a:spcPts val="1000"/>
-              </a:spcBef>
-              <a:buClr>
-                <a:schemeClr val="accent1"/>
-              </a:buClr>
-              <a:buSzPct val="80000"/>
-              <a:buFont typeface="Wingdings 3" charset="2"/>
-              <a:buChar char=""/>
-            </a:pPr>
-            <a:r>
-              <a:rPr lang="es-ES" sz="1400" dirty="0">
-                <a:solidFill>
-                  <a:schemeClr val="tx1">
-                    <a:lumMod val="75000"/>
-                    <a:lumOff val="25000"/>
-                  </a:schemeClr>
-                </a:solidFill>
-              </a:rPr>
-              <a:t>Hoy, estos datos no solo responden a una pregunta académica; se convierten en una herramienta práctica. Permiten a los productores ajustar sus métodos de beneficio y procesamiento según la altitud de sus fincas, y ayudan a los tostadores a identificar lotes de alto valor con mayor precisión, conectando el trabajo del campo con la excelencia en la taza.</a:t>
-            </a:r>
-          </a:p>
-          <a:p>
-            <a:pPr>
-              <a:lnSpc>
-                <a:spcPct val="90000"/>
-              </a:lnSpc>
-              <a:spcBef>
-                <a:spcPts val="1000"/>
-              </a:spcBef>
-              <a:buClr>
-                <a:schemeClr val="accent1"/>
-              </a:buClr>
-              <a:buSzPct val="80000"/>
-              <a:buFont typeface="Wingdings 3" charset="2"/>
-              <a:buChar char=""/>
-            </a:pPr>
-            <a:endParaRPr lang="en-US" sz="1400" dirty="0">
-              <a:solidFill>
-                <a:schemeClr val="tx1">
-                  <a:lumMod val="75000"/>
-                  <a:lumOff val="25000"/>
-                </a:schemeClr>
-              </a:solidFill>
-            </a:endParaRPr>
-          </a:p>
         </p:txBody>
       </p:sp>
     </p:spTree>
     <p:extLst>
       <p:ext uri="{BB962C8B-B14F-4D97-AF65-F5344CB8AC3E}">
         <p14:creationId xmlns:p14="http://schemas.microsoft.com/office/powerpoint/2010/main" val="3715923492"/>
+      </p:ext>
+    </p:extLst>
+  </p:cSld>
+  <p:clrMapOvr>
+    <a:masterClrMapping/>
+  </p:clrMapOvr>
+</p:sld>
+</file>
+
+<file path=ppt/slides/slide12.xml><?xml version="1.0" encoding="utf-8"?>
+<p:sld xmlns:a="http://schemas.openxmlformats.org/drawingml/2006/main" xmlns:r="http://schemas.openxmlformats.org/officeDocument/2006/relationships" xmlns:p="http://schemas.openxmlformats.org/presentationml/2006/main">
+  <p:cSld>
+    <p:spTree>
+      <p:nvGrpSpPr>
+        <p:cNvPr id="1" name="">
+          <a:extLst>
+            <a:ext uri="{FF2B5EF4-FFF2-40B4-BE49-F238E27FC236}">
+              <a16:creationId xmlns:a16="http://schemas.microsoft.com/office/drawing/2014/main" id="{E0A69F28-A69C-66B9-AA46-5304C775B0A3}"/>
+            </a:ext>
+          </a:extLst>
+        </p:cNvPr>
+        <p:cNvGrpSpPr/>
+        <p:nvPr/>
+      </p:nvGrpSpPr>
+      <p:grpSpPr>
+        <a:xfrm>
+          <a:off x="0" y="0"/>
+          <a:ext cx="0" cy="0"/>
+          <a:chOff x="0" y="0"/>
+          <a:chExt cx="0" cy="0"/>
+        </a:xfrm>
+      </p:grpSpPr>
+      <p:sp>
+        <p:nvSpPr>
+          <p:cNvPr id="4" name="CuadroTexto 3">
+            <a:extLst>
+              <a:ext uri="{FF2B5EF4-FFF2-40B4-BE49-F238E27FC236}">
+                <a16:creationId xmlns:a16="http://schemas.microsoft.com/office/drawing/2014/main" id="{0A8AE81C-E1A8-E00B-F0D8-A3532CC5C1A2}"/>
+              </a:ext>
+            </a:extLst>
+          </p:cNvPr>
+          <p:cNvSpPr txBox="1"/>
+          <p:nvPr/>
+        </p:nvSpPr>
+        <p:spPr>
+          <a:xfrm>
+            <a:off x="3416969" y="2331133"/>
+            <a:ext cx="3320715" cy="1938992"/>
+          </a:xfrm>
+          <a:prstGeom prst="rect">
+            <a:avLst/>
+          </a:prstGeom>
+          <a:noFill/>
+        </p:spPr>
+        <p:txBody>
+          <a:bodyPr wrap="square" rtlCol="0">
+            <a:spAutoFit/>
+          </a:bodyPr>
+          <a:lstStyle/>
+          <a:p>
+            <a:pPr algn="ctr"/>
+            <a:r>
+              <a:rPr lang="es-ES" sz="6000" b="1" dirty="0">
+                <a:solidFill>
+                  <a:schemeClr val="accent1">
+                    <a:lumMod val="50000"/>
+                  </a:schemeClr>
+                </a:solidFill>
+              </a:rPr>
+              <a:t>Muchas Gracias</a:t>
+            </a:r>
+          </a:p>
+        </p:txBody>
+      </p:sp>
+    </p:spTree>
+    <p:extLst>
+      <p:ext uri="{BB962C8B-B14F-4D97-AF65-F5344CB8AC3E}">
+        <p14:creationId xmlns:p14="http://schemas.microsoft.com/office/powerpoint/2010/main" val="2438160481"/>
+      </p:ext>
+    </p:extLst>
+  </p:cSld>
+  <p:clrMapOvr>
+    <a:masterClrMapping/>
+  </p:clrMapOvr>
+</p:sld>
+</file>
+
+<file path=ppt/slides/slide2.xml><?xml version="1.0" encoding="utf-8"?>
+<p:sld xmlns:a="http://schemas.openxmlformats.org/drawingml/2006/main" xmlns:r="http://schemas.openxmlformats.org/officeDocument/2006/relationships" xmlns:p="http://schemas.openxmlformats.org/presentationml/2006/main">
+  <p:cSld>
+    <p:spTree>
+      <p:nvGrpSpPr>
+        <p:cNvPr id="1" name="">
+          <a:extLst>
+            <a:ext uri="{FF2B5EF4-FFF2-40B4-BE49-F238E27FC236}">
+              <a16:creationId xmlns:a16="http://schemas.microsoft.com/office/drawing/2014/main" id="{28490D83-D0F5-806F-30B9-211BCE8C9CF1}"/>
+            </a:ext>
+          </a:extLst>
+        </p:cNvPr>
+        <p:cNvGrpSpPr/>
+        <p:nvPr/>
+      </p:nvGrpSpPr>
+      <p:grpSpPr>
+        <a:xfrm>
+          <a:off x="0" y="0"/>
+          <a:ext cx="0" cy="0"/>
+          <a:chOff x="0" y="0"/>
+          <a:chExt cx="0" cy="0"/>
+        </a:xfrm>
+      </p:grpSpPr>
+      <p:sp>
+        <p:nvSpPr>
+          <p:cNvPr id="4" name="CuadroTexto 3">
+            <a:extLst>
+              <a:ext uri="{FF2B5EF4-FFF2-40B4-BE49-F238E27FC236}">
+                <a16:creationId xmlns:a16="http://schemas.microsoft.com/office/drawing/2014/main" id="{F7ECAA00-8B35-BD42-19CB-1BF2C307254D}"/>
+              </a:ext>
+            </a:extLst>
+          </p:cNvPr>
+          <p:cNvSpPr txBox="1"/>
+          <p:nvPr/>
+        </p:nvSpPr>
+        <p:spPr>
+          <a:xfrm>
+            <a:off x="914401" y="524869"/>
+            <a:ext cx="8357936" cy="707886"/>
+          </a:xfrm>
+          <a:prstGeom prst="rect">
+            <a:avLst/>
+          </a:prstGeom>
+          <a:noFill/>
+        </p:spPr>
+        <p:txBody>
+          <a:bodyPr wrap="square" rtlCol="0">
+            <a:spAutoFit/>
+          </a:bodyPr>
+          <a:lstStyle/>
+          <a:p>
+            <a:pPr algn="ctr"/>
+            <a:r>
+              <a:rPr lang="es-ES" sz="4000" b="1" dirty="0">
+                <a:solidFill>
+                  <a:schemeClr val="accent1">
+                    <a:lumMod val="50000"/>
+                  </a:schemeClr>
+                </a:solidFill>
+              </a:rPr>
+              <a:t>Descripción del Proyecto</a:t>
+            </a:r>
+          </a:p>
+        </p:txBody>
+      </p:sp>
+      <p:sp>
+        <p:nvSpPr>
+          <p:cNvPr id="2" name="CuadroTexto 1">
+            <a:extLst>
+              <a:ext uri="{FF2B5EF4-FFF2-40B4-BE49-F238E27FC236}">
+                <a16:creationId xmlns:a16="http://schemas.microsoft.com/office/drawing/2014/main" id="{08FF49B1-68AB-75EC-BB22-7FDA30C12181}"/>
+              </a:ext>
+            </a:extLst>
+          </p:cNvPr>
+          <p:cNvSpPr txBox="1"/>
+          <p:nvPr/>
+        </p:nvSpPr>
+        <p:spPr>
+          <a:xfrm>
+            <a:off x="1155032" y="1652337"/>
+            <a:ext cx="8357936" cy="2400657"/>
+          </a:xfrm>
+          <a:prstGeom prst="rect">
+            <a:avLst/>
+          </a:prstGeom>
+          <a:noFill/>
+        </p:spPr>
+        <p:txBody>
+          <a:bodyPr wrap="square" rtlCol="0">
+            <a:spAutoFit/>
+          </a:bodyPr>
+          <a:lstStyle/>
+          <a:p>
+            <a:endParaRPr lang="es-ES" dirty="0"/>
+          </a:p>
+          <a:p>
+            <a:r>
+              <a:rPr lang="es-ES" sz="2400" dirty="0"/>
+              <a:t>Este proyecto fue desarrollado como parte del curso de Ciencia de Datos y tiene como objetivo analizar qué características del café están relacionadas con su </a:t>
+            </a:r>
+            <a:r>
+              <a:rPr lang="es-ES" sz="2400" b="1" dirty="0">
+                <a:solidFill>
+                  <a:srgbClr val="0070C0"/>
+                </a:solidFill>
+              </a:rPr>
+              <a:t>calidad y puntaje sensorial</a:t>
+            </a:r>
+            <a:r>
+              <a:rPr lang="es-ES" sz="2400" dirty="0"/>
+              <a:t>.  </a:t>
+            </a:r>
+          </a:p>
+          <a:p>
+            <a:endParaRPr lang="es-ES" dirty="0"/>
+          </a:p>
+          <a:p>
+            <a:endParaRPr lang="es-CO" dirty="0"/>
+          </a:p>
+        </p:txBody>
+      </p:sp>
+    </p:spTree>
+    <p:extLst>
+      <p:ext uri="{BB962C8B-B14F-4D97-AF65-F5344CB8AC3E}">
+        <p14:creationId xmlns:p14="http://schemas.microsoft.com/office/powerpoint/2010/main" val="362647730"/>
+      </p:ext>
+    </p:extLst>
+  </p:cSld>
+  <p:clrMapOvr>
+    <a:masterClrMapping/>
+  </p:clrMapOvr>
+</p:sld>
+</file>
+
+<file path=ppt/slides/slide3.xml><?xml version="1.0" encoding="utf-8"?>
+<p:sld xmlns:a="http://schemas.openxmlformats.org/drawingml/2006/main" xmlns:r="http://schemas.openxmlformats.org/officeDocument/2006/relationships" xmlns:p="http://schemas.openxmlformats.org/presentationml/2006/main">
+  <p:cSld>
+    <p:bg>
+      <p:bgPr>
+        <a:solidFill>
+          <a:schemeClr val="bg1"/>
+        </a:solidFill>
+        <a:effectLst/>
+      </p:bgPr>
+    </p:bg>
+    <p:spTree>
+      <p:nvGrpSpPr>
+        <p:cNvPr id="1" name="">
+          <a:extLst>
+            <a:ext uri="{FF2B5EF4-FFF2-40B4-BE49-F238E27FC236}">
+              <a16:creationId xmlns:a16="http://schemas.microsoft.com/office/drawing/2014/main" id="{4340F5AF-5ED2-EA30-9952-46847BEBA143}"/>
+            </a:ext>
+          </a:extLst>
+        </p:cNvPr>
+        <p:cNvGrpSpPr/>
+        <p:nvPr/>
+      </p:nvGrpSpPr>
+      <p:grpSpPr>
+        <a:xfrm>
+          <a:off x="0" y="0"/>
+          <a:ext cx="0" cy="0"/>
+          <a:chOff x="0" y="0"/>
+          <a:chExt cx="0" cy="0"/>
+        </a:xfrm>
+      </p:grpSpPr>
+      <p:grpSp>
+        <p:nvGrpSpPr>
+          <p:cNvPr id="10" name="Group 9">
+            <a:extLst>
+              <a:ext uri="{FF2B5EF4-FFF2-40B4-BE49-F238E27FC236}">
+                <a16:creationId xmlns:a16="http://schemas.microsoft.com/office/drawing/2014/main" id="{947CDE17-06F4-4FCE-8BFE-AD89EACB7094}"/>
+              </a:ext>
+              <a:ext uri="{C183D7F6-B498-43B3-948B-1728B52AA6E4}">
+                <adec:decorative xmlns:adec="http://schemas.microsoft.com/office/drawing/2017/decorative" val="1"/>
+              </a:ext>
+            </a:extLst>
+          </p:cNvPr>
+          <p:cNvGrpSpPr>
+            <a:grpSpLocks noGrp="1" noUngrp="1" noRot="1" noChangeAspect="1" noMove="1" noResize="1"/>
+          </p:cNvGrpSpPr>
+          <p:nvPr>
+            <p:extLst>
+              <p:ext uri="{386F3935-93C4-4BCD-93E2-E3B085C9AB24}">
+                <p16:designElem xmlns:p16="http://schemas.microsoft.com/office/powerpoint/2015/main" val="1"/>
+              </p:ext>
+            </p:extLst>
+          </p:nvPr>
+        </p:nvGrpSpPr>
+        <p:grpSpPr>
+          <a:xfrm>
+            <a:off x="0" y="-8467"/>
+            <a:ext cx="12192000" cy="6866467"/>
+            <a:chOff x="0" y="-8467"/>
+            <a:chExt cx="12192000" cy="6866467"/>
+          </a:xfrm>
+        </p:grpSpPr>
+        <p:cxnSp>
+          <p:nvCxnSpPr>
+            <p:cNvPr id="11" name="Straight Connector 10">
+              <a:extLst>
+                <a:ext uri="{FF2B5EF4-FFF2-40B4-BE49-F238E27FC236}">
+                  <a16:creationId xmlns:a16="http://schemas.microsoft.com/office/drawing/2014/main" id="{4A64534B-C7D9-476B-876D-0A9259D5027E}"/>
+                </a:ext>
+                <a:ext uri="{C183D7F6-B498-43B3-948B-1728B52AA6E4}">
+                  <adec:decorative xmlns:adec="http://schemas.microsoft.com/office/drawing/2017/decorative" val="1"/>
+                </a:ext>
+              </a:extLst>
+            </p:cNvPr>
+            <p:cNvCxnSpPr/>
+            <p:nvPr>
+              <p:extLst>
+                <p:ext uri="{386F3935-93C4-4BCD-93E2-E3B085C9AB24}">
+                  <p16:designElem xmlns:p16="http://schemas.microsoft.com/office/powerpoint/2015/main" val="1"/>
+                </p:ext>
+              </p:extLst>
+            </p:nvPr>
+          </p:nvCxnSpPr>
+          <p:spPr>
+            <a:xfrm>
+              <a:off x="9371012" y="0"/>
+              <a:ext cx="1219200" cy="6858000"/>
+            </a:xfrm>
+            <a:prstGeom prst="line">
+              <a:avLst/>
+            </a:prstGeom>
+            <a:ln w="9525">
+              <a:solidFill>
+                <a:schemeClr val="accent1">
+                  <a:alpha val="70000"/>
+                </a:schemeClr>
+              </a:solidFill>
+            </a:ln>
+          </p:spPr>
+          <p:style>
+            <a:lnRef idx="2">
+              <a:schemeClr val="accent1"/>
+            </a:lnRef>
+            <a:fillRef idx="0">
+              <a:schemeClr val="accent1"/>
+            </a:fillRef>
+            <a:effectRef idx="1">
+              <a:schemeClr val="accent1"/>
+            </a:effectRef>
+            <a:fontRef idx="minor">
+              <a:schemeClr val="tx1"/>
+            </a:fontRef>
+          </p:style>
+        </p:cxnSp>
+        <p:cxnSp>
+          <p:nvCxnSpPr>
+            <p:cNvPr id="12" name="Straight Connector 11">
+              <a:extLst>
+                <a:ext uri="{FF2B5EF4-FFF2-40B4-BE49-F238E27FC236}">
+                  <a16:creationId xmlns:a16="http://schemas.microsoft.com/office/drawing/2014/main" id="{C527E124-CDC8-4D04-848D-E43E18F42545}"/>
+                </a:ext>
+                <a:ext uri="{C183D7F6-B498-43B3-948B-1728B52AA6E4}">
+                  <adec:decorative xmlns:adec="http://schemas.microsoft.com/office/drawing/2017/decorative" val="1"/>
+                </a:ext>
+              </a:extLst>
+            </p:cNvPr>
+            <p:cNvCxnSpPr/>
+            <p:nvPr>
+              <p:extLst>
+                <p:ext uri="{386F3935-93C4-4BCD-93E2-E3B085C9AB24}">
+                  <p16:designElem xmlns:p16="http://schemas.microsoft.com/office/powerpoint/2015/main" val="1"/>
+                </p:ext>
+              </p:extLst>
+            </p:nvPr>
+          </p:nvCxnSpPr>
+          <p:spPr>
+            <a:xfrm flipH="1">
+              <a:off x="7425267" y="3681413"/>
+              <a:ext cx="4763558" cy="3176587"/>
+            </a:xfrm>
+            <a:prstGeom prst="line">
+              <a:avLst/>
+            </a:prstGeom>
+            <a:ln w="9525">
+              <a:solidFill>
+                <a:schemeClr val="accent1">
+                  <a:alpha val="70000"/>
+                </a:schemeClr>
+              </a:solidFill>
+            </a:ln>
+          </p:spPr>
+          <p:style>
+            <a:lnRef idx="2">
+              <a:schemeClr val="accent1"/>
+            </a:lnRef>
+            <a:fillRef idx="0">
+              <a:schemeClr val="accent1"/>
+            </a:fillRef>
+            <a:effectRef idx="1">
+              <a:schemeClr val="accent1"/>
+            </a:effectRef>
+            <a:fontRef idx="minor">
+              <a:schemeClr val="tx1"/>
+            </a:fontRef>
+          </p:style>
+        </p:cxnSp>
+        <p:sp>
+          <p:nvSpPr>
+            <p:cNvPr id="13" name="Rectangle 23">
+              <a:extLst>
+                <a:ext uri="{FF2B5EF4-FFF2-40B4-BE49-F238E27FC236}">
+                  <a16:creationId xmlns:a16="http://schemas.microsoft.com/office/drawing/2014/main" id="{A768FF94-39B1-44FB-9670-D6F5007FB81F}"/>
+                </a:ext>
+                <a:ext uri="{C183D7F6-B498-43B3-948B-1728B52AA6E4}">
+                  <adec:decorative xmlns:adec="http://schemas.microsoft.com/office/drawing/2017/decorative" val="1"/>
+                </a:ext>
+              </a:extLst>
+            </p:cNvPr>
+            <p:cNvSpPr/>
+            <p:nvPr>
+              <p:extLst>
+                <p:ext uri="{386F3935-93C4-4BCD-93E2-E3B085C9AB24}">
+                  <p16:designElem xmlns:p16="http://schemas.microsoft.com/office/powerpoint/2015/main" val="1"/>
+                </p:ext>
+              </p:extLst>
+            </p:nvPr>
+          </p:nvSpPr>
+          <p:spPr>
+            <a:xfrm>
+              <a:off x="9181476" y="-8467"/>
+              <a:ext cx="3007349" cy="6866467"/>
+            </a:xfrm>
+            <a:custGeom>
+              <a:avLst/>
+              <a:gdLst/>
+              <a:ahLst/>
+              <a:cxnLst/>
+              <a:rect l="l" t="t" r="r" b="b"/>
+              <a:pathLst>
+                <a:path w="3007349" h="6866467">
+                  <a:moveTo>
+                    <a:pt x="2045532" y="0"/>
+                  </a:moveTo>
+                  <a:lnTo>
+                    <a:pt x="3007349" y="0"/>
+                  </a:lnTo>
+                  <a:lnTo>
+                    <a:pt x="3007349" y="6866467"/>
+                  </a:lnTo>
+                  <a:lnTo>
+                    <a:pt x="0" y="6866467"/>
+                  </a:lnTo>
+                  <a:lnTo>
+                    <a:pt x="2045532" y="0"/>
+                  </a:lnTo>
+                  <a:close/>
+                </a:path>
+              </a:pathLst>
+            </a:custGeom>
+            <a:solidFill>
+              <a:schemeClr val="accent1">
+                <a:alpha val="36000"/>
+              </a:schemeClr>
+            </a:solidFill>
+            <a:ln>
+              <a:noFill/>
+            </a:ln>
+            <a:effectLst/>
+          </p:spPr>
+          <p:style>
+            <a:lnRef idx="1">
+              <a:schemeClr val="accent1"/>
+            </a:lnRef>
+            <a:fillRef idx="3">
+              <a:schemeClr val="accent1"/>
+            </a:fillRef>
+            <a:effectRef idx="2">
+              <a:schemeClr val="accent1"/>
+            </a:effectRef>
+            <a:fontRef idx="minor">
+              <a:schemeClr val="lt1"/>
+            </a:fontRef>
+          </p:style>
+          <p:txBody>
+            <a:bodyPr/>
+            <a:lstStyle/>
+            <a:p>
+              <a:endParaRPr lang="es-CO"/>
+            </a:p>
+          </p:txBody>
+        </p:sp>
+        <p:sp>
+          <p:nvSpPr>
+            <p:cNvPr id="14" name="Rectangle 25">
+              <a:extLst>
+                <a:ext uri="{FF2B5EF4-FFF2-40B4-BE49-F238E27FC236}">
+                  <a16:creationId xmlns:a16="http://schemas.microsoft.com/office/drawing/2014/main" id="{FCE6337A-0F72-4D0B-81DA-748DC80AB66F}"/>
+                </a:ext>
+                <a:ext uri="{C183D7F6-B498-43B3-948B-1728B52AA6E4}">
+                  <adec:decorative xmlns:adec="http://schemas.microsoft.com/office/drawing/2017/decorative" val="1"/>
+                </a:ext>
+              </a:extLst>
+            </p:cNvPr>
+            <p:cNvSpPr/>
+            <p:nvPr>
+              <p:extLst>
+                <p:ext uri="{386F3935-93C4-4BCD-93E2-E3B085C9AB24}">
+                  <p16:designElem xmlns:p16="http://schemas.microsoft.com/office/powerpoint/2015/main" val="1"/>
+                </p:ext>
+              </p:extLst>
+            </p:nvPr>
+          </p:nvSpPr>
+          <p:spPr>
+            <a:xfrm>
+              <a:off x="9603442" y="-8467"/>
+              <a:ext cx="2588558" cy="6866467"/>
+            </a:xfrm>
+            <a:custGeom>
+              <a:avLst/>
+              <a:gdLst/>
+              <a:ahLst/>
+              <a:cxnLst/>
+              <a:rect l="l" t="t" r="r" b="b"/>
+              <a:pathLst>
+                <a:path w="2573311" h="6866467">
+                  <a:moveTo>
+                    <a:pt x="0" y="0"/>
+                  </a:moveTo>
+                  <a:lnTo>
+                    <a:pt x="2573311" y="0"/>
+                  </a:lnTo>
+                  <a:lnTo>
+                    <a:pt x="2573311" y="6866467"/>
+                  </a:lnTo>
+                  <a:lnTo>
+                    <a:pt x="1202336" y="6866467"/>
+                  </a:lnTo>
+                  <a:lnTo>
+                    <a:pt x="0" y="0"/>
+                  </a:lnTo>
+                  <a:close/>
+                </a:path>
+              </a:pathLst>
+            </a:custGeom>
+            <a:solidFill>
+              <a:schemeClr val="accent1">
+                <a:alpha val="20000"/>
+              </a:schemeClr>
+            </a:solidFill>
+            <a:ln>
+              <a:noFill/>
+            </a:ln>
+            <a:effectLst/>
+          </p:spPr>
+          <p:style>
+            <a:lnRef idx="1">
+              <a:schemeClr val="accent1"/>
+            </a:lnRef>
+            <a:fillRef idx="3">
+              <a:schemeClr val="accent1"/>
+            </a:fillRef>
+            <a:effectRef idx="2">
+              <a:schemeClr val="accent1"/>
+            </a:effectRef>
+            <a:fontRef idx="minor">
+              <a:schemeClr val="lt1"/>
+            </a:fontRef>
+          </p:style>
+          <p:txBody>
+            <a:bodyPr/>
+            <a:lstStyle/>
+            <a:p>
+              <a:endParaRPr lang="es-CO"/>
+            </a:p>
+          </p:txBody>
+        </p:sp>
+        <p:sp>
+          <p:nvSpPr>
+            <p:cNvPr id="15" name="Isosceles Triangle 14">
+              <a:extLst>
+                <a:ext uri="{FF2B5EF4-FFF2-40B4-BE49-F238E27FC236}">
+                  <a16:creationId xmlns:a16="http://schemas.microsoft.com/office/drawing/2014/main" id="{2972CF86-A510-4E29-8CED-C0612D080F1F}"/>
+                </a:ext>
+                <a:ext uri="{C183D7F6-B498-43B3-948B-1728B52AA6E4}">
+                  <adec:decorative xmlns:adec="http://schemas.microsoft.com/office/drawing/2017/decorative" val="1"/>
+                </a:ext>
+              </a:extLst>
+            </p:cNvPr>
+            <p:cNvSpPr/>
+            <p:nvPr>
+              <p:extLst>
+                <p:ext uri="{386F3935-93C4-4BCD-93E2-E3B085C9AB24}">
+                  <p16:designElem xmlns:p16="http://schemas.microsoft.com/office/powerpoint/2015/main" val="1"/>
+                </p:ext>
+              </p:extLst>
+            </p:nvPr>
+          </p:nvSpPr>
+          <p:spPr>
+            <a:xfrm>
+              <a:off x="8932333" y="3048000"/>
+              <a:ext cx="3259667" cy="3810000"/>
+            </a:xfrm>
+            <a:prstGeom prst="triangle">
+              <a:avLst>
+                <a:gd name="adj" fmla="val 100000"/>
+              </a:avLst>
+            </a:prstGeom>
+            <a:solidFill>
+              <a:schemeClr val="accent1">
+                <a:lumMod val="75000"/>
+                <a:alpha val="66000"/>
+              </a:schemeClr>
+            </a:solidFill>
+            <a:ln>
+              <a:noFill/>
+            </a:ln>
+            <a:effectLst/>
+          </p:spPr>
+          <p:style>
+            <a:lnRef idx="1">
+              <a:schemeClr val="accent1"/>
+            </a:lnRef>
+            <a:fillRef idx="3">
+              <a:schemeClr val="accent1"/>
+            </a:fillRef>
+            <a:effectRef idx="2">
+              <a:schemeClr val="accent1"/>
+            </a:effectRef>
+            <a:fontRef idx="minor">
+              <a:schemeClr val="lt1"/>
+            </a:fontRef>
+          </p:style>
+          <p:txBody>
+            <a:bodyPr/>
+            <a:lstStyle/>
+            <a:p>
+              <a:endParaRPr lang="es-CO"/>
+            </a:p>
+          </p:txBody>
+        </p:sp>
+        <p:sp>
+          <p:nvSpPr>
+            <p:cNvPr id="16" name="Rectangle 27">
+              <a:extLst>
+                <a:ext uri="{FF2B5EF4-FFF2-40B4-BE49-F238E27FC236}">
+                  <a16:creationId xmlns:a16="http://schemas.microsoft.com/office/drawing/2014/main" id="{51B0A8D9-B28B-4CE3-8AB6-6633ADD997AD}"/>
+                </a:ext>
+                <a:ext uri="{C183D7F6-B498-43B3-948B-1728B52AA6E4}">
+                  <adec:decorative xmlns:adec="http://schemas.microsoft.com/office/drawing/2017/decorative" val="1"/>
+                </a:ext>
+              </a:extLst>
+            </p:cNvPr>
+            <p:cNvSpPr/>
+            <p:nvPr>
+              <p:extLst>
+                <p:ext uri="{386F3935-93C4-4BCD-93E2-E3B085C9AB24}">
+                  <p16:designElem xmlns:p16="http://schemas.microsoft.com/office/powerpoint/2015/main" val="1"/>
+                </p:ext>
+              </p:extLst>
+            </p:nvPr>
+          </p:nvSpPr>
+          <p:spPr>
+            <a:xfrm>
+              <a:off x="9334500" y="-8467"/>
+              <a:ext cx="2854326" cy="6866467"/>
+            </a:xfrm>
+            <a:custGeom>
+              <a:avLst/>
+              <a:gdLst/>
+              <a:ahLst/>
+              <a:cxnLst/>
+              <a:rect l="l" t="t" r="r" b="b"/>
+              <a:pathLst>
+                <a:path w="2858013" h="6866467">
+                  <a:moveTo>
+                    <a:pt x="0" y="0"/>
+                  </a:moveTo>
+                  <a:lnTo>
+                    <a:pt x="2858013" y="0"/>
+                  </a:lnTo>
+                  <a:lnTo>
+                    <a:pt x="2858013" y="6866467"/>
+                  </a:lnTo>
+                  <a:lnTo>
+                    <a:pt x="2473942" y="6866467"/>
+                  </a:lnTo>
+                  <a:lnTo>
+                    <a:pt x="0" y="0"/>
+                  </a:lnTo>
+                  <a:close/>
+                </a:path>
+              </a:pathLst>
+            </a:custGeom>
+            <a:solidFill>
+              <a:schemeClr val="accent1">
+                <a:lumMod val="75000"/>
+                <a:alpha val="50000"/>
+              </a:schemeClr>
+            </a:solidFill>
+            <a:ln>
+              <a:noFill/>
+            </a:ln>
+            <a:effectLst/>
+          </p:spPr>
+          <p:style>
+            <a:lnRef idx="1">
+              <a:schemeClr val="accent1"/>
+            </a:lnRef>
+            <a:fillRef idx="3">
+              <a:schemeClr val="accent1"/>
+            </a:fillRef>
+            <a:effectRef idx="2">
+              <a:schemeClr val="accent1"/>
+            </a:effectRef>
+            <a:fontRef idx="minor">
+              <a:schemeClr val="lt1"/>
+            </a:fontRef>
+          </p:style>
+          <p:txBody>
+            <a:bodyPr/>
+            <a:lstStyle/>
+            <a:p>
+              <a:endParaRPr lang="es-CO"/>
+            </a:p>
+          </p:txBody>
+        </p:sp>
+        <p:sp>
+          <p:nvSpPr>
+            <p:cNvPr id="17" name="Rectangle 28">
+              <a:extLst>
+                <a:ext uri="{FF2B5EF4-FFF2-40B4-BE49-F238E27FC236}">
+                  <a16:creationId xmlns:a16="http://schemas.microsoft.com/office/drawing/2014/main" id="{525DA9CC-B1B1-4F33-9ED2-89012EA5B495}"/>
+                </a:ext>
+                <a:ext uri="{C183D7F6-B498-43B3-948B-1728B52AA6E4}">
+                  <adec:decorative xmlns:adec="http://schemas.microsoft.com/office/drawing/2017/decorative" val="1"/>
+                </a:ext>
+              </a:extLst>
+            </p:cNvPr>
+            <p:cNvSpPr/>
+            <p:nvPr>
+              <p:extLst>
+                <p:ext uri="{386F3935-93C4-4BCD-93E2-E3B085C9AB24}">
+                  <p16:designElem xmlns:p16="http://schemas.microsoft.com/office/powerpoint/2015/main" val="1"/>
+                </p:ext>
+              </p:extLst>
+            </p:nvPr>
+          </p:nvSpPr>
+          <p:spPr>
+            <a:xfrm>
+              <a:off x="10898730" y="-8467"/>
+              <a:ext cx="1290094" cy="6866467"/>
+            </a:xfrm>
+            <a:custGeom>
+              <a:avLst/>
+              <a:gdLst/>
+              <a:ahLst/>
+              <a:cxnLst/>
+              <a:rect l="l" t="t" r="r" b="b"/>
+              <a:pathLst>
+                <a:path w="1290094" h="6858000">
+                  <a:moveTo>
+                    <a:pt x="1019735" y="0"/>
+                  </a:moveTo>
+                  <a:lnTo>
+                    <a:pt x="1290094" y="0"/>
+                  </a:lnTo>
+                  <a:lnTo>
+                    <a:pt x="1290094" y="6858000"/>
+                  </a:lnTo>
+                  <a:lnTo>
+                    <a:pt x="0" y="6858000"/>
+                  </a:lnTo>
+                  <a:lnTo>
+                    <a:pt x="1019735" y="0"/>
+                  </a:lnTo>
+                  <a:close/>
+                </a:path>
+              </a:pathLst>
+            </a:custGeom>
+            <a:solidFill>
+              <a:schemeClr val="accent2">
+                <a:alpha val="70000"/>
+              </a:schemeClr>
+            </a:solidFill>
+            <a:ln>
+              <a:noFill/>
+            </a:ln>
+            <a:effectLst/>
+          </p:spPr>
+          <p:style>
+            <a:lnRef idx="1">
+              <a:schemeClr val="accent1"/>
+            </a:lnRef>
+            <a:fillRef idx="3">
+              <a:schemeClr val="accent1"/>
+            </a:fillRef>
+            <a:effectRef idx="2">
+              <a:schemeClr val="accent1"/>
+            </a:effectRef>
+            <a:fontRef idx="minor">
+              <a:schemeClr val="lt1"/>
+            </a:fontRef>
+          </p:style>
+          <p:txBody>
+            <a:bodyPr/>
+            <a:lstStyle/>
+            <a:p>
+              <a:endParaRPr lang="es-CO"/>
+            </a:p>
+          </p:txBody>
+        </p:sp>
+        <p:sp>
+          <p:nvSpPr>
+            <p:cNvPr id="18" name="Rectangle 29">
+              <a:extLst>
+                <a:ext uri="{FF2B5EF4-FFF2-40B4-BE49-F238E27FC236}">
+                  <a16:creationId xmlns:a16="http://schemas.microsoft.com/office/drawing/2014/main" id="{6AE546F2-92C0-4C9C-BF28-052A7D0A3B73}"/>
+                </a:ext>
+                <a:ext uri="{C183D7F6-B498-43B3-948B-1728B52AA6E4}">
+                  <adec:decorative xmlns:adec="http://schemas.microsoft.com/office/drawing/2017/decorative" val="1"/>
+                </a:ext>
+              </a:extLst>
+            </p:cNvPr>
+            <p:cNvSpPr/>
+            <p:nvPr>
+              <p:extLst>
+                <p:ext uri="{386F3935-93C4-4BCD-93E2-E3B085C9AB24}">
+                  <p16:designElem xmlns:p16="http://schemas.microsoft.com/office/powerpoint/2015/main" val="1"/>
+                </p:ext>
+              </p:extLst>
+            </p:nvPr>
+          </p:nvSpPr>
+          <p:spPr>
+            <a:xfrm>
+              <a:off x="10938999" y="-8467"/>
+              <a:ext cx="1249825" cy="6866467"/>
+            </a:xfrm>
+            <a:custGeom>
+              <a:avLst/>
+              <a:gdLst/>
+              <a:ahLst/>
+              <a:cxnLst/>
+              <a:rect l="l" t="t" r="r" b="b"/>
+              <a:pathLst>
+                <a:path w="1249825" h="6858000">
+                  <a:moveTo>
+                    <a:pt x="0" y="0"/>
+                  </a:moveTo>
+                  <a:lnTo>
+                    <a:pt x="1249825" y="0"/>
+                  </a:lnTo>
+                  <a:lnTo>
+                    <a:pt x="1249825" y="6858000"/>
+                  </a:lnTo>
+                  <a:lnTo>
+                    <a:pt x="1109382" y="6858000"/>
+                  </a:lnTo>
+                  <a:lnTo>
+                    <a:pt x="0" y="0"/>
+                  </a:lnTo>
+                  <a:close/>
+                </a:path>
+              </a:pathLst>
+            </a:custGeom>
+            <a:solidFill>
+              <a:schemeClr val="accent2">
+                <a:lumMod val="75000"/>
+                <a:alpha val="80000"/>
+              </a:schemeClr>
+            </a:solidFill>
+            <a:ln>
+              <a:noFill/>
+            </a:ln>
+            <a:effectLst/>
+          </p:spPr>
+          <p:style>
+            <a:lnRef idx="1">
+              <a:schemeClr val="accent1"/>
+            </a:lnRef>
+            <a:fillRef idx="3">
+              <a:schemeClr val="accent1"/>
+            </a:fillRef>
+            <a:effectRef idx="2">
+              <a:schemeClr val="accent1"/>
+            </a:effectRef>
+            <a:fontRef idx="minor">
+              <a:schemeClr val="lt1"/>
+            </a:fontRef>
+          </p:style>
+          <p:txBody>
+            <a:bodyPr/>
+            <a:lstStyle/>
+            <a:p>
+              <a:endParaRPr lang="es-CO"/>
+            </a:p>
+          </p:txBody>
+        </p:sp>
+        <p:sp>
+          <p:nvSpPr>
+            <p:cNvPr id="19" name="Isosceles Triangle 18">
+              <a:extLst>
+                <a:ext uri="{FF2B5EF4-FFF2-40B4-BE49-F238E27FC236}">
+                  <a16:creationId xmlns:a16="http://schemas.microsoft.com/office/drawing/2014/main" id="{1111385C-91E7-44E8-AAE5-019E48D76FF1}"/>
+                </a:ext>
+                <a:ext uri="{C183D7F6-B498-43B3-948B-1728B52AA6E4}">
+                  <adec:decorative xmlns:adec="http://schemas.microsoft.com/office/drawing/2017/decorative" val="1"/>
+                </a:ext>
+              </a:extLst>
+            </p:cNvPr>
+            <p:cNvSpPr/>
+            <p:nvPr>
+              <p:extLst>
+                <p:ext uri="{386F3935-93C4-4BCD-93E2-E3B085C9AB24}">
+                  <p16:designElem xmlns:p16="http://schemas.microsoft.com/office/powerpoint/2015/main" val="1"/>
+                </p:ext>
+              </p:extLst>
+            </p:nvPr>
+          </p:nvSpPr>
+          <p:spPr>
+            <a:xfrm>
+              <a:off x="10371666" y="3589867"/>
+              <a:ext cx="1817159" cy="3268133"/>
+            </a:xfrm>
+            <a:prstGeom prst="triangle">
+              <a:avLst>
+                <a:gd name="adj" fmla="val 100000"/>
+              </a:avLst>
+            </a:prstGeom>
+            <a:solidFill>
+              <a:schemeClr val="accent1">
+                <a:lumMod val="75000"/>
+                <a:alpha val="66000"/>
+              </a:schemeClr>
+            </a:solidFill>
+            <a:ln>
+              <a:noFill/>
+            </a:ln>
+            <a:effectLst/>
+          </p:spPr>
+          <p:style>
+            <a:lnRef idx="1">
+              <a:schemeClr val="accent1"/>
+            </a:lnRef>
+            <a:fillRef idx="3">
+              <a:schemeClr val="accent1"/>
+            </a:fillRef>
+            <a:effectRef idx="2">
+              <a:schemeClr val="accent1"/>
+            </a:effectRef>
+            <a:fontRef idx="minor">
+              <a:schemeClr val="lt1"/>
+            </a:fontRef>
+          </p:style>
+          <p:txBody>
+            <a:bodyPr/>
+            <a:lstStyle/>
+            <a:p>
+              <a:endParaRPr lang="es-CO"/>
+            </a:p>
+          </p:txBody>
+        </p:sp>
+        <p:sp>
+          <p:nvSpPr>
+            <p:cNvPr id="20" name="Isosceles Triangle 19">
+              <a:extLst>
+                <a:ext uri="{FF2B5EF4-FFF2-40B4-BE49-F238E27FC236}">
+                  <a16:creationId xmlns:a16="http://schemas.microsoft.com/office/drawing/2014/main" id="{54455A30-C651-4002-BE70-2A0F05BA38B9}"/>
+                </a:ext>
+                <a:ext uri="{C183D7F6-B498-43B3-948B-1728B52AA6E4}">
+                  <adec:decorative xmlns:adec="http://schemas.microsoft.com/office/drawing/2017/decorative" val="1"/>
+                </a:ext>
+              </a:extLst>
+            </p:cNvPr>
+            <p:cNvSpPr/>
+            <p:nvPr>
+              <p:extLst>
+                <p:ext uri="{386F3935-93C4-4BCD-93E2-E3B085C9AB24}">
+                  <p16:designElem xmlns:p16="http://schemas.microsoft.com/office/powerpoint/2015/main" val="1"/>
+                </p:ext>
+              </p:extLst>
+            </p:nvPr>
+          </p:nvSpPr>
+          <p:spPr>
+            <a:xfrm>
+              <a:off x="0" y="4013200"/>
+              <a:ext cx="448733" cy="2844800"/>
+            </a:xfrm>
+            <a:prstGeom prst="triangle">
+              <a:avLst>
+                <a:gd name="adj" fmla="val 0"/>
+              </a:avLst>
+            </a:prstGeom>
+            <a:solidFill>
+              <a:schemeClr val="accent1">
+                <a:alpha val="70000"/>
+              </a:schemeClr>
+            </a:solidFill>
+            <a:ln>
+              <a:noFill/>
+            </a:ln>
+            <a:effectLst/>
+          </p:spPr>
+          <p:style>
+            <a:lnRef idx="1">
+              <a:schemeClr val="accent1"/>
+            </a:lnRef>
+            <a:fillRef idx="3">
+              <a:schemeClr val="accent1"/>
+            </a:fillRef>
+            <a:effectRef idx="2">
+              <a:schemeClr val="accent1"/>
+            </a:effectRef>
+            <a:fontRef idx="minor">
+              <a:schemeClr val="lt1"/>
+            </a:fontRef>
+          </p:style>
+          <p:txBody>
+            <a:bodyPr/>
+            <a:lstStyle/>
+            <a:p>
+              <a:endParaRPr lang="es-CO"/>
+            </a:p>
+          </p:txBody>
+        </p:sp>
+      </p:grpSp>
+      <p:sp useBgFill="1">
+        <p:nvSpPr>
+          <p:cNvPr id="22" name="Rectangle 21">
+            <a:extLst>
+              <a:ext uri="{FF2B5EF4-FFF2-40B4-BE49-F238E27FC236}">
+                <a16:creationId xmlns:a16="http://schemas.microsoft.com/office/drawing/2014/main" id="{45B71F80-1F92-4074-84D9-16A062B215B3}"/>
+              </a:ext>
+              <a:ext uri="{C183D7F6-B498-43B3-948B-1728B52AA6E4}">
+                <adec:decorative xmlns:adec="http://schemas.microsoft.com/office/drawing/2017/decorative" val="1"/>
+              </a:ext>
+            </a:extLst>
+          </p:cNvPr>
+          <p:cNvSpPr>
+            <a:spLocks noGrp="1" noRot="1" noChangeAspect="1" noMove="1" noResize="1" noEditPoints="1" noAdjustHandles="1" noChangeArrowheads="1" noChangeShapeType="1" noTextEdit="1"/>
+          </p:cNvSpPr>
+          <p:nvPr>
+            <p:extLst>
+              <p:ext uri="{386F3935-93C4-4BCD-93E2-E3B085C9AB24}">
+                <p16:designElem xmlns:p16="http://schemas.microsoft.com/office/powerpoint/2015/main" val="1"/>
+              </p:ext>
+            </p:extLst>
+          </p:nvPr>
+        </p:nvSpPr>
+        <p:spPr>
+          <a:xfrm>
+            <a:off x="0" y="0"/>
+            <a:ext cx="12192000" cy="6858000"/>
+          </a:xfrm>
+          <a:prstGeom prst="rect">
+            <a:avLst/>
+          </a:prstGeom>
+          <a:ln>
+            <a:noFill/>
+          </a:ln>
+        </p:spPr>
+        <p:style>
+          <a:lnRef idx="2">
+            <a:schemeClr val="accent1">
+              <a:shade val="50000"/>
+            </a:schemeClr>
+          </a:lnRef>
+          <a:fillRef idx="1">
+            <a:schemeClr val="accent1"/>
+          </a:fillRef>
+          <a:effectRef idx="0">
+            <a:schemeClr val="accent1"/>
+          </a:effectRef>
+          <a:fontRef idx="minor">
+            <a:schemeClr val="lt1"/>
+          </a:fontRef>
+        </p:style>
+        <p:txBody>
+          <a:bodyPr rtlCol="0" anchor="ctr"/>
+          <a:lstStyle/>
+          <a:p>
+            <a:pPr algn="ctr"/>
+            <a:endParaRPr lang="en-US"/>
+          </a:p>
+        </p:txBody>
+      </p:sp>
+      <p:sp>
+        <p:nvSpPr>
+          <p:cNvPr id="4" name="CuadroTexto 3">
+            <a:extLst>
+              <a:ext uri="{FF2B5EF4-FFF2-40B4-BE49-F238E27FC236}">
+                <a16:creationId xmlns:a16="http://schemas.microsoft.com/office/drawing/2014/main" id="{78EF6D15-488C-D47A-111D-A20F2C3CFC6D}"/>
+              </a:ext>
+            </a:extLst>
+          </p:cNvPr>
+          <p:cNvSpPr txBox="1"/>
+          <p:nvPr/>
+        </p:nvSpPr>
+        <p:spPr>
+          <a:xfrm>
+            <a:off x="1286933" y="609600"/>
+            <a:ext cx="10197494" cy="1099457"/>
+          </a:xfrm>
+          <a:prstGeom prst="rect">
+            <a:avLst/>
+          </a:prstGeom>
+        </p:spPr>
+        <p:txBody>
+          <a:bodyPr vert="horz" lIns="91440" tIns="45720" rIns="91440" bIns="45720" rtlCol="0" anchor="t">
+            <a:normAutofit/>
+          </a:bodyPr>
+          <a:lstStyle/>
+          <a:p>
+            <a:pPr>
+              <a:spcBef>
+                <a:spcPct val="0"/>
+              </a:spcBef>
+              <a:spcAft>
+                <a:spcPts val="600"/>
+              </a:spcAft>
+            </a:pPr>
+            <a:r>
+              <a:rPr lang="en-US" sz="3600" b="1">
+                <a:solidFill>
+                  <a:schemeClr val="accent1"/>
+                </a:solidFill>
+                <a:latin typeface="+mj-lt"/>
+                <a:ea typeface="+mj-ea"/>
+                <a:cs typeface="+mj-cs"/>
+              </a:rPr>
+              <a:t>ANALISIS DE DATOS</a:t>
+            </a:r>
+          </a:p>
+        </p:txBody>
+      </p:sp>
+      <p:sp>
+        <p:nvSpPr>
+          <p:cNvPr id="24" name="Isosceles Triangle 23">
+            <a:extLst>
+              <a:ext uri="{FF2B5EF4-FFF2-40B4-BE49-F238E27FC236}">
+                <a16:creationId xmlns:a16="http://schemas.microsoft.com/office/drawing/2014/main" id="{7209C9DA-6E0D-46D9-8275-C52222D8CCAC}"/>
+              </a:ext>
+              <a:ext uri="{C183D7F6-B498-43B3-948B-1728B52AA6E4}">
+                <adec:decorative xmlns:adec="http://schemas.microsoft.com/office/drawing/2017/decorative" val="1"/>
+              </a:ext>
+            </a:extLst>
+          </p:cNvPr>
+          <p:cNvSpPr>
+            <a:spLocks noGrp="1" noRot="1" noChangeAspect="1" noMove="1" noResize="1" noEditPoints="1" noAdjustHandles="1" noChangeArrowheads="1" noChangeShapeType="1" noTextEdit="1"/>
+          </p:cNvSpPr>
+          <p:nvPr>
+            <p:extLst>
+              <p:ext uri="{386F3935-93C4-4BCD-93E2-E3B085C9AB24}">
+                <p16:designElem xmlns:p16="http://schemas.microsoft.com/office/powerpoint/2015/main" val="1"/>
+              </p:ext>
+            </p:extLst>
+          </p:nvPr>
+        </p:nvSpPr>
+        <p:spPr>
+          <a:xfrm rot="10800000">
+            <a:off x="0" y="0"/>
+            <a:ext cx="842596" cy="5666154"/>
+          </a:xfrm>
+          <a:prstGeom prst="triangle">
+            <a:avLst>
+              <a:gd name="adj" fmla="val 100000"/>
+            </a:avLst>
+          </a:prstGeom>
+          <a:solidFill>
+            <a:schemeClr val="accent1">
+              <a:alpha val="85000"/>
+            </a:schemeClr>
+          </a:solidFill>
+          <a:ln>
+            <a:noFill/>
+          </a:ln>
+          <a:effectLst/>
+        </p:spPr>
+        <p:style>
+          <a:lnRef idx="1">
+            <a:schemeClr val="accent1"/>
+          </a:lnRef>
+          <a:fillRef idx="3">
+            <a:schemeClr val="accent1"/>
+          </a:fillRef>
+          <a:effectRef idx="2">
+            <a:schemeClr val="accent1"/>
+          </a:effectRef>
+          <a:fontRef idx="minor">
+            <a:schemeClr val="lt1"/>
+          </a:fontRef>
+        </p:style>
+        <p:txBody>
+          <a:bodyPr/>
+          <a:lstStyle/>
+          <a:p>
+            <a:endParaRPr lang="es-CO"/>
+          </a:p>
+        </p:txBody>
+      </p:sp>
+      <p:sp>
+        <p:nvSpPr>
+          <p:cNvPr id="26" name="Isosceles Triangle 25">
+            <a:extLst>
+              <a:ext uri="{FF2B5EF4-FFF2-40B4-BE49-F238E27FC236}">
+                <a16:creationId xmlns:a16="http://schemas.microsoft.com/office/drawing/2014/main" id="{3EB57A4D-E0D0-46DA-B339-F24CA46FA70B}"/>
+              </a:ext>
+              <a:ext uri="{C183D7F6-B498-43B3-948B-1728B52AA6E4}">
+                <adec:decorative xmlns:adec="http://schemas.microsoft.com/office/drawing/2017/decorative" val="1"/>
+              </a:ext>
+            </a:extLst>
+          </p:cNvPr>
+          <p:cNvSpPr>
+            <a:spLocks noGrp="1" noRot="1" noChangeAspect="1" noMove="1" noResize="1" noEditPoints="1" noAdjustHandles="1" noChangeArrowheads="1" noChangeShapeType="1" noTextEdit="1"/>
+          </p:cNvSpPr>
+          <p:nvPr>
+            <p:extLst>
+              <p:ext uri="{386F3935-93C4-4BCD-93E2-E3B085C9AB24}">
+                <p16:designElem xmlns:p16="http://schemas.microsoft.com/office/powerpoint/2015/main" val="1"/>
+              </p:ext>
+            </p:extLst>
+          </p:nvPr>
+        </p:nvSpPr>
+        <p:spPr>
+          <a:xfrm flipH="1">
+            <a:off x="11743267" y="4013200"/>
+            <a:ext cx="448733" cy="2844800"/>
+          </a:xfrm>
+          <a:prstGeom prst="triangle">
+            <a:avLst>
+              <a:gd name="adj" fmla="val 0"/>
+            </a:avLst>
+          </a:prstGeom>
+          <a:solidFill>
+            <a:schemeClr val="accent1">
+              <a:alpha val="85000"/>
+            </a:schemeClr>
+          </a:solidFill>
+          <a:ln>
+            <a:noFill/>
+          </a:ln>
+          <a:effectLst/>
+        </p:spPr>
+        <p:style>
+          <a:lnRef idx="1">
+            <a:schemeClr val="accent1"/>
+          </a:lnRef>
+          <a:fillRef idx="3">
+            <a:schemeClr val="accent1"/>
+          </a:fillRef>
+          <a:effectRef idx="2">
+            <a:schemeClr val="accent1"/>
+          </a:effectRef>
+          <a:fontRef idx="minor">
+            <a:schemeClr val="lt1"/>
+          </a:fontRef>
+        </p:style>
+        <p:txBody>
+          <a:bodyPr/>
+          <a:lstStyle/>
+          <a:p>
+            <a:endParaRPr lang="es-CO"/>
+          </a:p>
+        </p:txBody>
+      </p:sp>
+      <p:graphicFrame>
+        <p:nvGraphicFramePr>
+          <p:cNvPr id="6" name="CuadroTexto 1">
+            <a:extLst>
+              <a:ext uri="{FF2B5EF4-FFF2-40B4-BE49-F238E27FC236}">
+                <a16:creationId xmlns:a16="http://schemas.microsoft.com/office/drawing/2014/main" id="{E798A376-E006-6CCE-95C3-082B450A1BAA}"/>
+              </a:ext>
+            </a:extLst>
+          </p:cNvPr>
+          <p:cNvGraphicFramePr/>
+          <p:nvPr>
+            <p:extLst>
+              <p:ext uri="{D42A27DB-BD31-4B8C-83A1-F6EECF244321}">
+                <p14:modId xmlns:p14="http://schemas.microsoft.com/office/powerpoint/2010/main" val="2397352246"/>
+              </p:ext>
+            </p:extLst>
+          </p:nvPr>
+        </p:nvGraphicFramePr>
+        <p:xfrm>
+          <a:off x="995621" y="1272193"/>
+          <a:ext cx="9618133" cy="4093482"/>
+        </p:xfrm>
+        <a:graphic>
+          <a:graphicData uri="http://schemas.openxmlformats.org/drawingml/2006/diagram">
+            <dgm:relIds xmlns:dgm="http://schemas.openxmlformats.org/drawingml/2006/diagram" xmlns:r="http://schemas.openxmlformats.org/officeDocument/2006/relationships" r:dm="rId2" r:lo="rId3" r:qs="rId4" r:cs="rId5"/>
+          </a:graphicData>
+        </a:graphic>
+      </p:graphicFrame>
+    </p:spTree>
+    <p:extLst>
+      <p:ext uri="{BB962C8B-B14F-4D97-AF65-F5344CB8AC3E}">
+        <p14:creationId xmlns:p14="http://schemas.microsoft.com/office/powerpoint/2010/main" val="3868533323"/>
+      </p:ext>
+    </p:extLst>
+  </p:cSld>
+  <p:clrMapOvr>
+    <a:masterClrMapping/>
+  </p:clrMapOvr>
+</p:sld>
+</file>
+
+<file path=ppt/slides/slide4.xml><?xml version="1.0" encoding="utf-8"?>
+<p:sld xmlns:a="http://schemas.openxmlformats.org/drawingml/2006/main" xmlns:r="http://schemas.openxmlformats.org/officeDocument/2006/relationships" xmlns:p="http://schemas.openxmlformats.org/presentationml/2006/main">
+  <p:cSld>
+    <p:spTree>
+      <p:nvGrpSpPr>
+        <p:cNvPr id="1" name=""/>
+        <p:cNvGrpSpPr/>
+        <p:nvPr/>
+      </p:nvGrpSpPr>
+      <p:grpSpPr>
+        <a:xfrm>
+          <a:off x="0" y="0"/>
+          <a:ext cx="0" cy="0"/>
+          <a:chOff x="0" y="0"/>
+          <a:chExt cx="0" cy="0"/>
+        </a:xfrm>
+      </p:grpSpPr>
+      <p:sp>
+        <p:nvSpPr>
+          <p:cNvPr id="3" name="CuadroTexto 2">
+            <a:extLst>
+              <a:ext uri="{FF2B5EF4-FFF2-40B4-BE49-F238E27FC236}">
+                <a16:creationId xmlns:a16="http://schemas.microsoft.com/office/drawing/2014/main" id="{8BED6809-6FC6-0DB1-062D-18BA4B431695}"/>
+              </a:ext>
+            </a:extLst>
+          </p:cNvPr>
+          <p:cNvSpPr txBox="1"/>
+          <p:nvPr/>
+        </p:nvSpPr>
+        <p:spPr>
+          <a:xfrm>
+            <a:off x="671764" y="184885"/>
+            <a:ext cx="8357936" cy="707886"/>
+          </a:xfrm>
+          <a:prstGeom prst="rect">
+            <a:avLst/>
+          </a:prstGeom>
+          <a:noFill/>
+        </p:spPr>
+        <p:txBody>
+          <a:bodyPr wrap="square" rtlCol="0">
+            <a:spAutoFit/>
+          </a:bodyPr>
+          <a:lstStyle/>
+          <a:p>
+            <a:pPr algn="ctr"/>
+            <a:r>
+              <a:rPr lang="es-ES" sz="4000" b="1" dirty="0">
+                <a:solidFill>
+                  <a:schemeClr val="accent1">
+                    <a:lumMod val="50000"/>
+                  </a:schemeClr>
+                </a:solidFill>
+              </a:rPr>
+              <a:t>Etapa 1: Preparación de los datos</a:t>
+            </a:r>
+          </a:p>
+        </p:txBody>
+      </p:sp>
+      <p:sp>
+        <p:nvSpPr>
+          <p:cNvPr id="7" name="CuadroTexto 6">
+            <a:extLst>
+              <a:ext uri="{FF2B5EF4-FFF2-40B4-BE49-F238E27FC236}">
+                <a16:creationId xmlns:a16="http://schemas.microsoft.com/office/drawing/2014/main" id="{D878E362-A30B-906A-1D22-C427F22649E9}"/>
+              </a:ext>
+            </a:extLst>
+          </p:cNvPr>
+          <p:cNvSpPr txBox="1"/>
+          <p:nvPr/>
+        </p:nvSpPr>
+        <p:spPr>
+          <a:xfrm>
+            <a:off x="353762" y="1069028"/>
+            <a:ext cx="9486900" cy="1200329"/>
+          </a:xfrm>
+          <a:prstGeom prst="rect">
+            <a:avLst/>
+          </a:prstGeom>
+          <a:noFill/>
+        </p:spPr>
+        <p:txBody>
+          <a:bodyPr wrap="square">
+            <a:spAutoFit/>
+          </a:bodyPr>
+          <a:lstStyle/>
+          <a:p>
+            <a:r>
+              <a:rPr lang="es-CO" sz="1800" b="0" i="0" dirty="0">
+                <a:solidFill>
+                  <a:schemeClr val="tx1"/>
+                </a:solidFill>
+                <a:effectLst/>
+                <a:latin typeface="+mn-lt"/>
+              </a:rPr>
+              <a:t>Se trabajó con datos reales de evaluaciones de café arábica provenientes del Coffee </a:t>
+            </a:r>
+            <a:r>
+              <a:rPr lang="es-CO" sz="1800" b="0" i="0" dirty="0" err="1">
+                <a:solidFill>
+                  <a:schemeClr val="tx1"/>
+                </a:solidFill>
+                <a:effectLst/>
+                <a:latin typeface="+mn-lt"/>
+              </a:rPr>
+              <a:t>Quality</a:t>
+            </a:r>
+            <a:r>
+              <a:rPr lang="es-CO" sz="1800" b="0" i="0" dirty="0">
+                <a:solidFill>
+                  <a:schemeClr val="tx1"/>
+                </a:solidFill>
+                <a:effectLst/>
+                <a:latin typeface="+mn-lt"/>
+              </a:rPr>
+              <a:t> </a:t>
+            </a:r>
+            <a:r>
+              <a:rPr lang="es-CO" sz="1800" b="0" i="0" dirty="0" err="1">
+                <a:solidFill>
+                  <a:schemeClr val="tx1"/>
+                </a:solidFill>
+                <a:effectLst/>
+                <a:latin typeface="+mn-lt"/>
+              </a:rPr>
+              <a:t>Institute</a:t>
+            </a:r>
+            <a:r>
+              <a:rPr lang="es-CO" sz="1800" b="0" i="0" dirty="0">
+                <a:solidFill>
+                  <a:schemeClr val="tx1"/>
+                </a:solidFill>
+                <a:effectLst/>
+                <a:latin typeface="+mn-lt"/>
+              </a:rPr>
+              <a:t> (CQI). </a:t>
+            </a:r>
+          </a:p>
+          <a:p>
+            <a:r>
+              <a:rPr lang="es-CO" dirty="0"/>
+              <a:t>Se realizó una exploración inicial, entre las principales acciones realizadas se encuentran:</a:t>
+            </a:r>
+          </a:p>
+          <a:p>
+            <a:endParaRPr lang="es-CO" dirty="0"/>
+          </a:p>
+        </p:txBody>
+      </p:sp>
+      <p:graphicFrame>
+        <p:nvGraphicFramePr>
+          <p:cNvPr id="9" name="Tabla 8">
+            <a:extLst>
+              <a:ext uri="{FF2B5EF4-FFF2-40B4-BE49-F238E27FC236}">
+                <a16:creationId xmlns:a16="http://schemas.microsoft.com/office/drawing/2014/main" id="{0998F644-786E-4BCF-CD21-5F89A8CBFFCD}"/>
+              </a:ext>
+            </a:extLst>
+          </p:cNvPr>
+          <p:cNvGraphicFramePr>
+            <a:graphicFrameLocks noGrp="1"/>
+          </p:cNvGraphicFramePr>
+          <p:nvPr>
+            <p:extLst>
+              <p:ext uri="{D42A27DB-BD31-4B8C-83A1-F6EECF244321}">
+                <p14:modId xmlns:p14="http://schemas.microsoft.com/office/powerpoint/2010/main" val="126639593"/>
+              </p:ext>
+            </p:extLst>
+          </p:nvPr>
+        </p:nvGraphicFramePr>
+        <p:xfrm>
+          <a:off x="787400" y="2269357"/>
+          <a:ext cx="8242300" cy="3168470"/>
+        </p:xfrm>
+        <a:graphic>
+          <a:graphicData uri="http://schemas.openxmlformats.org/drawingml/2006/table">
+            <a:tbl>
+              <a:tblPr>
+                <a:tableStyleId>{5C22544A-7EE6-4342-B048-85BDC9FD1C3A}</a:tableStyleId>
+              </a:tblPr>
+              <a:tblGrid>
+                <a:gridCol w="8242300">
+                  <a:extLst>
+                    <a:ext uri="{9D8B030D-6E8A-4147-A177-3AD203B41FA5}">
+                      <a16:colId xmlns:a16="http://schemas.microsoft.com/office/drawing/2014/main" val="3403043910"/>
+                    </a:ext>
+                  </a:extLst>
+                </a:gridCol>
+              </a:tblGrid>
+              <a:tr h="378486">
+                <a:tc>
+                  <a:txBody>
+                    <a:bodyPr/>
+                    <a:lstStyle/>
+                    <a:p>
+                      <a:pPr algn="l" fontAlgn="ctr">
+                        <a:buNone/>
+                      </a:pPr>
+                      <a:r>
+                        <a:rPr lang="es-CO" sz="1200" u="none" strike="noStrike" dirty="0">
+                          <a:effectLst/>
+                        </a:rPr>
+                        <a:t>Revisión de 1.509 registros y 42 variables originales.</a:t>
+                      </a:r>
+                      <a:endParaRPr lang="es-CO" sz="1200" b="0" i="0" u="none" strike="noStrike" dirty="0">
+                        <a:solidFill>
+                          <a:srgbClr val="1F2328"/>
+                        </a:solidFill>
+                        <a:effectLst/>
+                        <a:latin typeface="Segoe UI" panose="020B0502040204020203" pitchFamily="34" charset="0"/>
+                      </a:endParaRPr>
+                    </a:p>
+                  </a:txBody>
+                  <a:tcPr marL="85725" marR="9525" marT="9525" marB="0" anchor="ctr"/>
+                </a:tc>
+                <a:extLst>
+                  <a:ext uri="{0D108BD9-81ED-4DB2-BD59-A6C34878D82A}">
+                    <a16:rowId xmlns:a16="http://schemas.microsoft.com/office/drawing/2014/main" val="1939435779"/>
+                  </a:ext>
+                </a:extLst>
+              </a:tr>
+              <a:tr h="378486">
+                <a:tc>
+                  <a:txBody>
+                    <a:bodyPr/>
+                    <a:lstStyle/>
+                    <a:p>
+                      <a:pPr algn="l" fontAlgn="ctr">
+                        <a:buNone/>
+                      </a:pPr>
+                      <a:r>
+                        <a:rPr lang="es-CO" sz="1200" u="none" strike="noStrike" dirty="0">
+                          <a:effectLst/>
+                        </a:rPr>
+                        <a:t>Identificación de valores faltantes.</a:t>
+                      </a:r>
+                      <a:endParaRPr lang="es-CO" sz="1200" b="0" i="0" u="none" strike="noStrike" dirty="0">
+                        <a:solidFill>
+                          <a:srgbClr val="1F2328"/>
+                        </a:solidFill>
+                        <a:effectLst/>
+                        <a:latin typeface="Segoe UI" panose="020B0502040204020203" pitchFamily="34" charset="0"/>
+                      </a:endParaRPr>
+                    </a:p>
+                  </a:txBody>
+                  <a:tcPr marL="85725" marR="9525" marT="9525" marB="0" anchor="ctr"/>
+                </a:tc>
+                <a:extLst>
+                  <a:ext uri="{0D108BD9-81ED-4DB2-BD59-A6C34878D82A}">
+                    <a16:rowId xmlns:a16="http://schemas.microsoft.com/office/drawing/2014/main" val="3214771973"/>
+                  </a:ext>
+                </a:extLst>
+              </a:tr>
+              <a:tr h="378486">
+                <a:tc>
+                  <a:txBody>
+                    <a:bodyPr/>
+                    <a:lstStyle/>
+                    <a:p>
+                      <a:pPr algn="l" fontAlgn="ctr">
+                        <a:buNone/>
+                      </a:pPr>
+                      <a:r>
+                        <a:rPr lang="es-CO" sz="1200" u="none" strike="noStrike">
+                          <a:effectLst/>
+                        </a:rPr>
+                        <a:t>Verificación de registros duplicados.</a:t>
+                      </a:r>
+                      <a:endParaRPr lang="es-CO" sz="1200" b="0" i="0" u="none" strike="noStrike">
+                        <a:solidFill>
+                          <a:srgbClr val="1F2328"/>
+                        </a:solidFill>
+                        <a:effectLst/>
+                        <a:latin typeface="Segoe UI" panose="020B0502040204020203" pitchFamily="34" charset="0"/>
+                      </a:endParaRPr>
+                    </a:p>
+                  </a:txBody>
+                  <a:tcPr marL="85725" marR="9525" marT="9525" marB="0" anchor="ctr"/>
+                </a:tc>
+                <a:extLst>
+                  <a:ext uri="{0D108BD9-81ED-4DB2-BD59-A6C34878D82A}">
+                    <a16:rowId xmlns:a16="http://schemas.microsoft.com/office/drawing/2014/main" val="2470812471"/>
+                  </a:ext>
+                </a:extLst>
+              </a:tr>
+              <a:tr h="378486">
+                <a:tc>
+                  <a:txBody>
+                    <a:bodyPr/>
+                    <a:lstStyle/>
+                    <a:p>
+                      <a:pPr algn="l" fontAlgn="ctr">
+                        <a:buNone/>
+                      </a:pPr>
+                      <a:r>
+                        <a:rPr lang="es-CO" sz="1200" u="none" strike="noStrike" dirty="0">
+                          <a:effectLst/>
+                        </a:rPr>
+                        <a:t>Revisión de inconsistencias en la variable de altitud.</a:t>
+                      </a:r>
+                      <a:endParaRPr lang="es-CO" sz="1200" b="0" i="0" u="none" strike="noStrike" dirty="0">
+                        <a:solidFill>
+                          <a:srgbClr val="1F2328"/>
+                        </a:solidFill>
+                        <a:effectLst/>
+                        <a:latin typeface="Segoe UI" panose="020B0502040204020203" pitchFamily="34" charset="0"/>
+                      </a:endParaRPr>
+                    </a:p>
+                  </a:txBody>
+                  <a:tcPr marL="85725" marR="9525" marT="9525" marB="0" anchor="ctr"/>
+                </a:tc>
+                <a:extLst>
+                  <a:ext uri="{0D108BD9-81ED-4DB2-BD59-A6C34878D82A}">
+                    <a16:rowId xmlns:a16="http://schemas.microsoft.com/office/drawing/2014/main" val="3160112996"/>
+                  </a:ext>
+                </a:extLst>
+              </a:tr>
+              <a:tr h="378486">
+                <a:tc>
+                  <a:txBody>
+                    <a:bodyPr/>
+                    <a:lstStyle/>
+                    <a:p>
+                      <a:pPr algn="l" fontAlgn="ctr">
+                        <a:buNone/>
+                      </a:pPr>
+                      <a:r>
+                        <a:rPr lang="es-CO" sz="1200" u="none" strike="noStrike">
+                          <a:effectLst/>
+                        </a:rPr>
+                        <a:t>Eliminación de una evaluación sensorial inválida con puntajes registrados completamente en cero.</a:t>
+                      </a:r>
+                      <a:endParaRPr lang="es-CO" sz="1200" b="0" i="0" u="none" strike="noStrike">
+                        <a:solidFill>
+                          <a:srgbClr val="1F2328"/>
+                        </a:solidFill>
+                        <a:effectLst/>
+                        <a:latin typeface="Segoe UI" panose="020B0502040204020203" pitchFamily="34" charset="0"/>
+                      </a:endParaRPr>
+                    </a:p>
+                  </a:txBody>
+                  <a:tcPr marL="85725" marR="9525" marT="9525" marB="0" anchor="ctr"/>
+                </a:tc>
+                <a:extLst>
+                  <a:ext uri="{0D108BD9-81ED-4DB2-BD59-A6C34878D82A}">
+                    <a16:rowId xmlns:a16="http://schemas.microsoft.com/office/drawing/2014/main" val="1696953710"/>
+                  </a:ext>
+                </a:extLst>
+              </a:tr>
+              <a:tr h="378486">
+                <a:tc>
+                  <a:txBody>
+                    <a:bodyPr/>
+                    <a:lstStyle/>
+                    <a:p>
+                      <a:pPr algn="l" fontAlgn="ctr">
+                        <a:buNone/>
+                      </a:pPr>
+                      <a:r>
+                        <a:rPr lang="es-CO" sz="1200" u="none" strike="noStrike">
+                          <a:effectLst/>
+                        </a:rPr>
+                        <a:t>Selección de 22 variables relevantes.</a:t>
+                      </a:r>
+                      <a:endParaRPr lang="es-CO" sz="1200" b="0" i="0" u="none" strike="noStrike">
+                        <a:solidFill>
+                          <a:srgbClr val="1F2328"/>
+                        </a:solidFill>
+                        <a:effectLst/>
+                        <a:latin typeface="Segoe UI" panose="020B0502040204020203" pitchFamily="34" charset="0"/>
+                      </a:endParaRPr>
+                    </a:p>
+                  </a:txBody>
+                  <a:tcPr marL="85725" marR="9525" marT="9525" marB="0" anchor="ctr"/>
+                </a:tc>
+                <a:extLst>
+                  <a:ext uri="{0D108BD9-81ED-4DB2-BD59-A6C34878D82A}">
+                    <a16:rowId xmlns:a16="http://schemas.microsoft.com/office/drawing/2014/main" val="1599786521"/>
+                  </a:ext>
+                </a:extLst>
+              </a:tr>
+              <a:tr h="378486">
+                <a:tc>
+                  <a:txBody>
+                    <a:bodyPr/>
+                    <a:lstStyle/>
+                    <a:p>
+                      <a:pPr algn="l" fontAlgn="ctr">
+                        <a:buNone/>
+                      </a:pPr>
+                      <a:r>
+                        <a:rPr lang="es-CO" sz="1200" u="none" strike="noStrike">
+                          <a:effectLst/>
+                        </a:rPr>
+                        <a:t>Clasificación de valores categóricos faltantes como </a:t>
+                      </a:r>
+                      <a:r>
+                        <a:rPr lang="es-CO" sz="1000" u="none" strike="noStrike">
+                          <a:effectLst/>
+                        </a:rPr>
+                        <a:t>No informado</a:t>
+                      </a:r>
+                      <a:r>
+                        <a:rPr lang="es-CO" sz="1200" u="none" strike="noStrike">
+                          <a:effectLst/>
+                        </a:rPr>
+                        <a:t>.</a:t>
+                      </a:r>
+                      <a:endParaRPr lang="es-CO" sz="1200" b="0" i="0" u="none" strike="noStrike">
+                        <a:solidFill>
+                          <a:srgbClr val="1F2328"/>
+                        </a:solidFill>
+                        <a:effectLst/>
+                        <a:latin typeface="Segoe UI" panose="020B0502040204020203" pitchFamily="34" charset="0"/>
+                      </a:endParaRPr>
+                    </a:p>
+                  </a:txBody>
+                  <a:tcPr marL="85725" marR="9525" marT="9525" marB="0" anchor="ctr"/>
+                </a:tc>
+                <a:extLst>
+                  <a:ext uri="{0D108BD9-81ED-4DB2-BD59-A6C34878D82A}">
+                    <a16:rowId xmlns:a16="http://schemas.microsoft.com/office/drawing/2014/main" val="2905297219"/>
+                  </a:ext>
+                </a:extLst>
+              </a:tr>
+              <a:tr h="519068">
+                <a:tc>
+                  <a:txBody>
+                    <a:bodyPr/>
+                    <a:lstStyle/>
+                    <a:p>
+                      <a:pPr algn="l" fontAlgn="ctr">
+                        <a:buNone/>
+                      </a:pPr>
+                      <a:r>
+                        <a:rPr lang="es-CO" sz="1200" u="none" strike="noStrike" dirty="0">
+                          <a:effectLst/>
+                        </a:rPr>
+                        <a:t>Conservación de valores numéricos faltantes cuando no existía evidencia suficiente para realizar una imputación.</a:t>
+                      </a:r>
+                      <a:endParaRPr lang="es-CO" sz="1200" b="0" i="0" u="none" strike="noStrike" dirty="0">
+                        <a:solidFill>
+                          <a:srgbClr val="1F2328"/>
+                        </a:solidFill>
+                        <a:effectLst/>
+                        <a:latin typeface="Segoe UI" panose="020B0502040204020203" pitchFamily="34" charset="0"/>
+                      </a:endParaRPr>
+                    </a:p>
+                  </a:txBody>
+                  <a:tcPr marL="85725" marR="9525" marT="9525" marB="0" anchor="ctr"/>
+                </a:tc>
+                <a:extLst>
+                  <a:ext uri="{0D108BD9-81ED-4DB2-BD59-A6C34878D82A}">
+                    <a16:rowId xmlns:a16="http://schemas.microsoft.com/office/drawing/2014/main" val="3211635373"/>
+                  </a:ext>
+                </a:extLst>
+              </a:tr>
+            </a:tbl>
+          </a:graphicData>
+        </a:graphic>
+      </p:graphicFrame>
+      <p:sp>
+        <p:nvSpPr>
+          <p:cNvPr id="11" name="CuadroTexto 10">
+            <a:extLst>
+              <a:ext uri="{FF2B5EF4-FFF2-40B4-BE49-F238E27FC236}">
+                <a16:creationId xmlns:a16="http://schemas.microsoft.com/office/drawing/2014/main" id="{5AE73AA1-B272-4B1E-6E27-6236FAEA397F}"/>
+              </a:ext>
+            </a:extLst>
+          </p:cNvPr>
+          <p:cNvSpPr txBox="1"/>
+          <p:nvPr/>
+        </p:nvSpPr>
+        <p:spPr>
+          <a:xfrm>
+            <a:off x="850232" y="5788972"/>
+            <a:ext cx="8350250" cy="369332"/>
+          </a:xfrm>
+          <a:prstGeom prst="rect">
+            <a:avLst/>
+          </a:prstGeom>
+          <a:noFill/>
+        </p:spPr>
+        <p:txBody>
+          <a:bodyPr wrap="square">
+            <a:spAutoFit/>
+          </a:bodyPr>
+          <a:lstStyle/>
+          <a:p>
+            <a:r>
+              <a:rPr lang="es-CO" sz="1800" dirty="0"/>
+              <a:t>El </a:t>
+            </a:r>
+            <a:r>
+              <a:rPr lang="es-CO" sz="1800" dirty="0" err="1"/>
+              <a:t>dataset</a:t>
+            </a:r>
+            <a:r>
+              <a:rPr lang="es-CO" sz="1800" dirty="0"/>
+              <a:t> preparado quedó conformado por </a:t>
+            </a:r>
+            <a:r>
+              <a:rPr lang="es-CO" sz="1800" b="1" dirty="0"/>
+              <a:t>1.508 registros y 22 variables</a:t>
+            </a:r>
+            <a:r>
+              <a:rPr lang="es-CO" sz="1800" dirty="0"/>
+              <a:t>.</a:t>
+            </a:r>
+          </a:p>
+        </p:txBody>
+      </p:sp>
+    </p:spTree>
+    <p:extLst>
+      <p:ext uri="{BB962C8B-B14F-4D97-AF65-F5344CB8AC3E}">
+        <p14:creationId xmlns:p14="http://schemas.microsoft.com/office/powerpoint/2010/main" val="2144639879"/>
+      </p:ext>
+    </p:extLst>
+  </p:cSld>
+  <p:clrMapOvr>
+    <a:masterClrMapping/>
+  </p:clrMapOvr>
+</p:sld>
+</file>
+
+<file path=ppt/slides/slide5.xml><?xml version="1.0" encoding="utf-8"?>
+<p:sld xmlns:a="http://schemas.openxmlformats.org/drawingml/2006/main" xmlns:r="http://schemas.openxmlformats.org/officeDocument/2006/relationships" xmlns:p="http://schemas.openxmlformats.org/presentationml/2006/main">
+  <p:cSld>
+    <p:spTree>
+      <p:nvGrpSpPr>
+        <p:cNvPr id="1" name=""/>
+        <p:cNvGrpSpPr/>
+        <p:nvPr/>
+      </p:nvGrpSpPr>
+      <p:grpSpPr>
+        <a:xfrm>
+          <a:off x="0" y="0"/>
+          <a:ext cx="0" cy="0"/>
+          <a:chOff x="0" y="0"/>
+          <a:chExt cx="0" cy="0"/>
+        </a:xfrm>
+      </p:grpSpPr>
+      <p:sp>
+        <p:nvSpPr>
+          <p:cNvPr id="3" name="CuadroTexto 2">
+            <a:extLst>
+              <a:ext uri="{FF2B5EF4-FFF2-40B4-BE49-F238E27FC236}">
+                <a16:creationId xmlns:a16="http://schemas.microsoft.com/office/drawing/2014/main" id="{B9D28178-DDA7-6781-A696-644455AFC2F9}"/>
+              </a:ext>
+            </a:extLst>
+          </p:cNvPr>
+          <p:cNvSpPr txBox="1"/>
+          <p:nvPr/>
+        </p:nvSpPr>
+        <p:spPr>
+          <a:xfrm>
+            <a:off x="634332" y="123330"/>
+            <a:ext cx="8357936" cy="707886"/>
+          </a:xfrm>
+          <a:prstGeom prst="rect">
+            <a:avLst/>
+          </a:prstGeom>
+          <a:noFill/>
+        </p:spPr>
+        <p:txBody>
+          <a:bodyPr wrap="square" rtlCol="0">
+            <a:spAutoFit/>
+          </a:bodyPr>
+          <a:lstStyle/>
+          <a:p>
+            <a:pPr algn="ctr"/>
+            <a:r>
+              <a:rPr lang="es-ES" sz="4000" b="1" dirty="0">
+                <a:solidFill>
+                  <a:schemeClr val="accent1">
+                    <a:lumMod val="50000"/>
+                  </a:schemeClr>
+                </a:solidFill>
+              </a:rPr>
+              <a:t>Etapa 2: Análisis Estadístico</a:t>
+            </a:r>
+          </a:p>
+        </p:txBody>
+      </p:sp>
+      <p:graphicFrame>
+        <p:nvGraphicFramePr>
+          <p:cNvPr id="4" name="Tabla 3">
+            <a:extLst>
+              <a:ext uri="{FF2B5EF4-FFF2-40B4-BE49-F238E27FC236}">
+                <a16:creationId xmlns:a16="http://schemas.microsoft.com/office/drawing/2014/main" id="{19E54B27-7DD6-D46A-7DD1-F21B822924A1}"/>
+              </a:ext>
+            </a:extLst>
+          </p:cNvPr>
+          <p:cNvGraphicFramePr>
+            <a:graphicFrameLocks noGrp="1"/>
+          </p:cNvGraphicFramePr>
+          <p:nvPr>
+            <p:extLst>
+              <p:ext uri="{D42A27DB-BD31-4B8C-83A1-F6EECF244321}">
+                <p14:modId xmlns:p14="http://schemas.microsoft.com/office/powerpoint/2010/main" val="2330061507"/>
+              </p:ext>
+            </p:extLst>
+          </p:nvPr>
+        </p:nvGraphicFramePr>
+        <p:xfrm>
+          <a:off x="368300" y="1817371"/>
+          <a:ext cx="4597400" cy="2720340"/>
+        </p:xfrm>
+        <a:graphic>
+          <a:graphicData uri="http://schemas.openxmlformats.org/drawingml/2006/table">
+            <a:tbl>
+              <a:tblPr>
+                <a:tableStyleId>{5C22544A-7EE6-4342-B048-85BDC9FD1C3A}</a:tableStyleId>
+              </a:tblPr>
+              <a:tblGrid>
+                <a:gridCol w="2298700">
+                  <a:extLst>
+                    <a:ext uri="{9D8B030D-6E8A-4147-A177-3AD203B41FA5}">
+                      <a16:colId xmlns:a16="http://schemas.microsoft.com/office/drawing/2014/main" val="1186092860"/>
+                    </a:ext>
+                  </a:extLst>
+                </a:gridCol>
+                <a:gridCol w="2298700">
+                  <a:extLst>
+                    <a:ext uri="{9D8B030D-6E8A-4147-A177-3AD203B41FA5}">
+                      <a16:colId xmlns:a16="http://schemas.microsoft.com/office/drawing/2014/main" val="3262914127"/>
+                    </a:ext>
+                  </a:extLst>
+                </a:gridCol>
+              </a:tblGrid>
+              <a:tr h="0">
+                <a:tc>
+                  <a:txBody>
+                    <a:bodyPr/>
+                    <a:lstStyle/>
+                    <a:p>
+                      <a:pPr>
+                        <a:spcAft>
+                          <a:spcPts val="1200"/>
+                        </a:spcAft>
+                        <a:buNone/>
+                      </a:pPr>
+                      <a:r>
+                        <a:rPr lang="es-CO">
+                          <a:effectLst/>
+                        </a:rPr>
+                        <a:t>Medida</a:t>
+                      </a:r>
+                      <a:endParaRPr lang="es-CO" b="1">
+                        <a:effectLst/>
+                      </a:endParaRPr>
+                    </a:p>
+                  </a:txBody>
+                  <a:tcPr marL="123825" marR="123825" marT="57150" marB="57150" anchor="ctr"/>
+                </a:tc>
+                <a:tc>
+                  <a:txBody>
+                    <a:bodyPr/>
+                    <a:lstStyle/>
+                    <a:p>
+                      <a:pPr algn="r">
+                        <a:spcAft>
+                          <a:spcPts val="1200"/>
+                        </a:spcAft>
+                        <a:buNone/>
+                      </a:pPr>
+                      <a:r>
+                        <a:rPr lang="es-CO">
+                          <a:effectLst/>
+                        </a:rPr>
+                        <a:t>Resultado</a:t>
+                      </a:r>
+                      <a:endParaRPr lang="es-CO" b="1">
+                        <a:effectLst/>
+                      </a:endParaRPr>
+                    </a:p>
+                  </a:txBody>
+                  <a:tcPr marL="123825" marR="123825" marT="57150" marB="57150" anchor="ctr"/>
+                </a:tc>
+                <a:extLst>
+                  <a:ext uri="{0D108BD9-81ED-4DB2-BD59-A6C34878D82A}">
+                    <a16:rowId xmlns:a16="http://schemas.microsoft.com/office/drawing/2014/main" val="2850038458"/>
+                  </a:ext>
+                </a:extLst>
+              </a:tr>
+              <a:tr h="0">
+                <a:tc>
+                  <a:txBody>
+                    <a:bodyPr/>
+                    <a:lstStyle/>
+                    <a:p>
+                      <a:pPr>
+                        <a:spcAft>
+                          <a:spcPts val="1200"/>
+                        </a:spcAft>
+                        <a:buNone/>
+                      </a:pPr>
+                      <a:r>
+                        <a:rPr lang="es-CO">
+                          <a:effectLst/>
+                        </a:rPr>
+                        <a:t>Media</a:t>
+                      </a:r>
+                    </a:p>
+                  </a:txBody>
+                  <a:tcPr marL="123825" marR="123825" marT="57150" marB="57150" anchor="ctr"/>
+                </a:tc>
+                <a:tc>
+                  <a:txBody>
+                    <a:bodyPr/>
+                    <a:lstStyle/>
+                    <a:p>
+                      <a:pPr algn="r">
+                        <a:spcAft>
+                          <a:spcPts val="1200"/>
+                        </a:spcAft>
+                        <a:buNone/>
+                      </a:pPr>
+                      <a:r>
+                        <a:rPr lang="es-CO" dirty="0">
+                          <a:effectLst/>
+                        </a:rPr>
+                        <a:t>82.39</a:t>
+                      </a:r>
+                    </a:p>
+                  </a:txBody>
+                  <a:tcPr marL="123825" marR="123825" marT="57150" marB="57150" anchor="ctr"/>
+                </a:tc>
+                <a:extLst>
+                  <a:ext uri="{0D108BD9-81ED-4DB2-BD59-A6C34878D82A}">
+                    <a16:rowId xmlns:a16="http://schemas.microsoft.com/office/drawing/2014/main" val="550413332"/>
+                  </a:ext>
+                </a:extLst>
+              </a:tr>
+              <a:tr h="0">
+                <a:tc>
+                  <a:txBody>
+                    <a:bodyPr/>
+                    <a:lstStyle/>
+                    <a:p>
+                      <a:pPr>
+                        <a:spcAft>
+                          <a:spcPts val="1200"/>
+                        </a:spcAft>
+                        <a:buNone/>
+                      </a:pPr>
+                      <a:r>
+                        <a:rPr lang="es-CO">
+                          <a:effectLst/>
+                        </a:rPr>
+                        <a:t>Mediana</a:t>
+                      </a:r>
+                    </a:p>
+                  </a:txBody>
+                  <a:tcPr marL="123825" marR="123825" marT="57150" marB="57150" anchor="ctr"/>
+                </a:tc>
+                <a:tc>
+                  <a:txBody>
+                    <a:bodyPr/>
+                    <a:lstStyle/>
+                    <a:p>
+                      <a:pPr algn="r">
+                        <a:spcAft>
+                          <a:spcPts val="1200"/>
+                        </a:spcAft>
+                        <a:buNone/>
+                      </a:pPr>
+                      <a:r>
+                        <a:rPr lang="es-CO" dirty="0">
+                          <a:effectLst/>
+                        </a:rPr>
+                        <a:t>82.67</a:t>
+                      </a:r>
+                    </a:p>
+                  </a:txBody>
+                  <a:tcPr marL="123825" marR="123825" marT="57150" marB="57150" anchor="ctr"/>
+                </a:tc>
+                <a:extLst>
+                  <a:ext uri="{0D108BD9-81ED-4DB2-BD59-A6C34878D82A}">
+                    <a16:rowId xmlns:a16="http://schemas.microsoft.com/office/drawing/2014/main" val="519912565"/>
+                  </a:ext>
+                </a:extLst>
+              </a:tr>
+              <a:tr h="0">
+                <a:tc>
+                  <a:txBody>
+                    <a:bodyPr/>
+                    <a:lstStyle/>
+                    <a:p>
+                      <a:pPr>
+                        <a:spcAft>
+                          <a:spcPts val="1200"/>
+                        </a:spcAft>
+                        <a:buNone/>
+                      </a:pPr>
+                      <a:r>
+                        <a:rPr lang="es-CO">
+                          <a:effectLst/>
+                        </a:rPr>
+                        <a:t>Moda</a:t>
+                      </a:r>
+                    </a:p>
+                  </a:txBody>
+                  <a:tcPr marL="123825" marR="123825" marT="57150" marB="57150" anchor="ctr"/>
+                </a:tc>
+                <a:tc>
+                  <a:txBody>
+                    <a:bodyPr/>
+                    <a:lstStyle/>
+                    <a:p>
+                      <a:pPr algn="r">
+                        <a:spcAft>
+                          <a:spcPts val="1200"/>
+                        </a:spcAft>
+                        <a:buNone/>
+                      </a:pPr>
+                      <a:r>
+                        <a:rPr lang="es-CO" dirty="0">
+                          <a:effectLst/>
+                        </a:rPr>
+                        <a:t>83.17</a:t>
+                      </a:r>
+                    </a:p>
+                  </a:txBody>
+                  <a:tcPr marL="123825" marR="123825" marT="57150" marB="57150" anchor="ctr"/>
+                </a:tc>
+                <a:extLst>
+                  <a:ext uri="{0D108BD9-81ED-4DB2-BD59-A6C34878D82A}">
+                    <a16:rowId xmlns:a16="http://schemas.microsoft.com/office/drawing/2014/main" val="1004836221"/>
+                  </a:ext>
+                </a:extLst>
+              </a:tr>
+              <a:tr h="0">
+                <a:tc>
+                  <a:txBody>
+                    <a:bodyPr/>
+                    <a:lstStyle/>
+                    <a:p>
+                      <a:pPr>
+                        <a:spcAft>
+                          <a:spcPts val="1200"/>
+                        </a:spcAft>
+                        <a:buNone/>
+                      </a:pPr>
+                      <a:r>
+                        <a:rPr lang="es-CO">
+                          <a:effectLst/>
+                        </a:rPr>
+                        <a:t>Rango</a:t>
+                      </a:r>
+                    </a:p>
+                  </a:txBody>
+                  <a:tcPr marL="123825" marR="123825" marT="57150" marB="57150" anchor="ctr"/>
+                </a:tc>
+                <a:tc>
+                  <a:txBody>
+                    <a:bodyPr/>
+                    <a:lstStyle/>
+                    <a:p>
+                      <a:pPr algn="r">
+                        <a:spcAft>
+                          <a:spcPts val="1200"/>
+                        </a:spcAft>
+                        <a:buNone/>
+                      </a:pPr>
+                      <a:r>
+                        <a:rPr lang="es-CO" dirty="0">
+                          <a:effectLst/>
+                        </a:rPr>
+                        <a:t>30.75</a:t>
+                      </a:r>
+                    </a:p>
+                  </a:txBody>
+                  <a:tcPr marL="123825" marR="123825" marT="57150" marB="57150" anchor="ctr"/>
+                </a:tc>
+                <a:extLst>
+                  <a:ext uri="{0D108BD9-81ED-4DB2-BD59-A6C34878D82A}">
+                    <a16:rowId xmlns:a16="http://schemas.microsoft.com/office/drawing/2014/main" val="119541290"/>
+                  </a:ext>
+                </a:extLst>
+              </a:tr>
+              <a:tr h="0">
+                <a:tc>
+                  <a:txBody>
+                    <a:bodyPr/>
+                    <a:lstStyle/>
+                    <a:p>
+                      <a:pPr>
+                        <a:spcAft>
+                          <a:spcPts val="1200"/>
+                        </a:spcAft>
+                        <a:buNone/>
+                      </a:pPr>
+                      <a:r>
+                        <a:rPr lang="es-CO">
+                          <a:effectLst/>
+                        </a:rPr>
+                        <a:t>Varianza</a:t>
+                      </a:r>
+                    </a:p>
+                  </a:txBody>
+                  <a:tcPr marL="123825" marR="123825" marT="57150" marB="57150" anchor="ctr"/>
+                </a:tc>
+                <a:tc>
+                  <a:txBody>
+                    <a:bodyPr/>
+                    <a:lstStyle/>
+                    <a:p>
+                      <a:pPr algn="r">
+                        <a:spcAft>
+                          <a:spcPts val="1200"/>
+                        </a:spcAft>
+                        <a:buNone/>
+                      </a:pPr>
+                      <a:r>
+                        <a:rPr lang="es-CO">
+                          <a:effectLst/>
+                        </a:rPr>
+                        <a:t>6.92</a:t>
+                      </a:r>
+                    </a:p>
+                  </a:txBody>
+                  <a:tcPr marL="123825" marR="123825" marT="57150" marB="57150" anchor="ctr"/>
+                </a:tc>
+                <a:extLst>
+                  <a:ext uri="{0D108BD9-81ED-4DB2-BD59-A6C34878D82A}">
+                    <a16:rowId xmlns:a16="http://schemas.microsoft.com/office/drawing/2014/main" val="2238183649"/>
+                  </a:ext>
+                </a:extLst>
+              </a:tr>
+              <a:tr h="0">
+                <a:tc>
+                  <a:txBody>
+                    <a:bodyPr/>
+                    <a:lstStyle/>
+                    <a:p>
+                      <a:pPr>
+                        <a:spcAft>
+                          <a:spcPts val="1200"/>
+                        </a:spcAft>
+                        <a:buNone/>
+                      </a:pPr>
+                      <a:r>
+                        <a:rPr lang="es-CO">
+                          <a:effectLst/>
+                        </a:rPr>
+                        <a:t>Desviación estándar</a:t>
+                      </a:r>
+                    </a:p>
+                  </a:txBody>
+                  <a:tcPr marL="123825" marR="123825" marT="57150" marB="57150" anchor="ctr"/>
+                </a:tc>
+                <a:tc>
+                  <a:txBody>
+                    <a:bodyPr/>
+                    <a:lstStyle/>
+                    <a:p>
+                      <a:pPr algn="r">
+                        <a:spcAft>
+                          <a:spcPts val="1200"/>
+                        </a:spcAft>
+                        <a:buNone/>
+                      </a:pPr>
+                      <a:r>
+                        <a:rPr lang="es-CO" dirty="0">
+                          <a:effectLst/>
+                        </a:rPr>
+                        <a:t>2.63</a:t>
+                      </a:r>
+                    </a:p>
+                  </a:txBody>
+                  <a:tcPr marL="123825" marR="123825" marT="57150" marB="57150" anchor="ctr"/>
+                </a:tc>
+                <a:extLst>
+                  <a:ext uri="{0D108BD9-81ED-4DB2-BD59-A6C34878D82A}">
+                    <a16:rowId xmlns:a16="http://schemas.microsoft.com/office/drawing/2014/main" val="3438191895"/>
+                  </a:ext>
+                </a:extLst>
+              </a:tr>
+            </a:tbl>
+          </a:graphicData>
+        </a:graphic>
+      </p:graphicFrame>
+      <p:graphicFrame>
+        <p:nvGraphicFramePr>
+          <p:cNvPr id="5" name="Tabla 4">
+            <a:extLst>
+              <a:ext uri="{FF2B5EF4-FFF2-40B4-BE49-F238E27FC236}">
+                <a16:creationId xmlns:a16="http://schemas.microsoft.com/office/drawing/2014/main" id="{718D004A-E6B0-F34E-1ED9-B197CA777B50}"/>
+              </a:ext>
+            </a:extLst>
+          </p:cNvPr>
+          <p:cNvGraphicFramePr>
+            <a:graphicFrameLocks noGrp="1"/>
+          </p:cNvGraphicFramePr>
+          <p:nvPr>
+            <p:extLst>
+              <p:ext uri="{D42A27DB-BD31-4B8C-83A1-F6EECF244321}">
+                <p14:modId xmlns:p14="http://schemas.microsoft.com/office/powerpoint/2010/main" val="3524070585"/>
+              </p:ext>
+            </p:extLst>
+          </p:nvPr>
+        </p:nvGraphicFramePr>
+        <p:xfrm>
+          <a:off x="5269164" y="2317890"/>
+          <a:ext cx="5299868" cy="2217420"/>
+        </p:xfrm>
+        <a:graphic>
+          <a:graphicData uri="http://schemas.openxmlformats.org/drawingml/2006/table">
+            <a:tbl>
+              <a:tblPr>
+                <a:tableStyleId>{5C22544A-7EE6-4342-B048-85BDC9FD1C3A}</a:tableStyleId>
+              </a:tblPr>
+              <a:tblGrid>
+                <a:gridCol w="2649934">
+                  <a:extLst>
+                    <a:ext uri="{9D8B030D-6E8A-4147-A177-3AD203B41FA5}">
+                      <a16:colId xmlns:a16="http://schemas.microsoft.com/office/drawing/2014/main" val="3870200417"/>
+                    </a:ext>
+                  </a:extLst>
+                </a:gridCol>
+                <a:gridCol w="2649934">
+                  <a:extLst>
+                    <a:ext uri="{9D8B030D-6E8A-4147-A177-3AD203B41FA5}">
+                      <a16:colId xmlns:a16="http://schemas.microsoft.com/office/drawing/2014/main" val="604685673"/>
+                    </a:ext>
+                  </a:extLst>
+                </a:gridCol>
+              </a:tblGrid>
+              <a:tr h="0">
+                <a:tc>
+                  <a:txBody>
+                    <a:bodyPr/>
+                    <a:lstStyle/>
+                    <a:p>
+                      <a:pPr>
+                        <a:spcAft>
+                          <a:spcPts val="1200"/>
+                        </a:spcAft>
+                        <a:buNone/>
+                      </a:pPr>
+                      <a:r>
+                        <a:rPr lang="es-CO" dirty="0">
+                          <a:effectLst/>
+                        </a:rPr>
+                        <a:t>Variable</a:t>
+                      </a:r>
+                      <a:endParaRPr lang="es-CO" b="1" dirty="0">
+                        <a:effectLst/>
+                      </a:endParaRPr>
+                    </a:p>
+                  </a:txBody>
+                  <a:tcPr marL="123825" marR="123825" marT="57150" marB="57150" anchor="ctr"/>
+                </a:tc>
+                <a:tc>
+                  <a:txBody>
+                    <a:bodyPr/>
+                    <a:lstStyle/>
+                    <a:p>
+                      <a:pPr algn="r">
+                        <a:spcAft>
+                          <a:spcPts val="1200"/>
+                        </a:spcAft>
+                        <a:buNone/>
+                      </a:pPr>
+                      <a:r>
+                        <a:rPr lang="es-CO" dirty="0">
+                          <a:effectLst/>
+                        </a:rPr>
+                        <a:t>Correlación con </a:t>
+                      </a:r>
+                      <a:r>
+                        <a:rPr lang="es-CO" dirty="0" err="1">
+                          <a:effectLst/>
+                        </a:rPr>
+                        <a:t>Total_Cup_Points</a:t>
+                      </a:r>
+                      <a:endParaRPr lang="es-CO" b="1" dirty="0">
+                        <a:effectLst/>
+                      </a:endParaRPr>
+                    </a:p>
+                  </a:txBody>
+                  <a:tcPr marL="123825" marR="123825" marT="57150" marB="57150" anchor="ctr"/>
+                </a:tc>
+                <a:extLst>
+                  <a:ext uri="{0D108BD9-81ED-4DB2-BD59-A6C34878D82A}">
+                    <a16:rowId xmlns:a16="http://schemas.microsoft.com/office/drawing/2014/main" val="3888544387"/>
+                  </a:ext>
+                </a:extLst>
+              </a:tr>
+              <a:tr h="0">
+                <a:tc>
+                  <a:txBody>
+                    <a:bodyPr/>
+                    <a:lstStyle/>
+                    <a:p>
+                      <a:pPr>
+                        <a:spcAft>
+                          <a:spcPts val="1200"/>
+                        </a:spcAft>
+                        <a:buNone/>
+                      </a:pPr>
+                      <a:r>
+                        <a:rPr lang="es-CO" dirty="0" err="1">
+                          <a:effectLst/>
+                        </a:rPr>
+                        <a:t>Altitude</a:t>
+                      </a:r>
+                      <a:endParaRPr lang="es-CO" dirty="0">
+                        <a:effectLst/>
+                      </a:endParaRPr>
+                    </a:p>
+                  </a:txBody>
+                  <a:tcPr marL="123825" marR="123825" marT="57150" marB="57150" anchor="ctr"/>
+                </a:tc>
+                <a:tc>
+                  <a:txBody>
+                    <a:bodyPr/>
+                    <a:lstStyle/>
+                    <a:p>
+                      <a:pPr algn="r">
+                        <a:spcAft>
+                          <a:spcPts val="1200"/>
+                        </a:spcAft>
+                        <a:buNone/>
+                      </a:pPr>
+                      <a:r>
+                        <a:rPr lang="es-CO">
+                          <a:effectLst/>
+                        </a:rPr>
+                        <a:t>0.200</a:t>
+                      </a:r>
+                    </a:p>
+                  </a:txBody>
+                  <a:tcPr marL="123825" marR="123825" marT="57150" marB="57150" anchor="ctr"/>
+                </a:tc>
+                <a:extLst>
+                  <a:ext uri="{0D108BD9-81ED-4DB2-BD59-A6C34878D82A}">
+                    <a16:rowId xmlns:a16="http://schemas.microsoft.com/office/drawing/2014/main" val="599566197"/>
+                  </a:ext>
+                </a:extLst>
+              </a:tr>
+              <a:tr h="0">
+                <a:tc>
+                  <a:txBody>
+                    <a:bodyPr/>
+                    <a:lstStyle/>
+                    <a:p>
+                      <a:pPr>
+                        <a:spcAft>
+                          <a:spcPts val="1200"/>
+                        </a:spcAft>
+                        <a:buNone/>
+                      </a:pPr>
+                      <a:r>
+                        <a:rPr lang="es-CO">
+                          <a:effectLst/>
+                        </a:rPr>
+                        <a:t>Moisture (Humedad)</a:t>
+                      </a:r>
+                    </a:p>
+                  </a:txBody>
+                  <a:tcPr marL="123825" marR="123825" marT="57150" marB="57150" anchor="ctr"/>
+                </a:tc>
+                <a:tc>
+                  <a:txBody>
+                    <a:bodyPr/>
+                    <a:lstStyle/>
+                    <a:p>
+                      <a:pPr algn="r">
+                        <a:spcAft>
+                          <a:spcPts val="1200"/>
+                        </a:spcAft>
+                        <a:buNone/>
+                      </a:pPr>
+                      <a:r>
+                        <a:rPr lang="es-CO" dirty="0">
+                          <a:effectLst/>
+                        </a:rPr>
+                        <a:t>-0.112</a:t>
+                      </a:r>
+                    </a:p>
+                  </a:txBody>
+                  <a:tcPr marL="123825" marR="123825" marT="57150" marB="57150" anchor="ctr"/>
+                </a:tc>
+                <a:extLst>
+                  <a:ext uri="{0D108BD9-81ED-4DB2-BD59-A6C34878D82A}">
+                    <a16:rowId xmlns:a16="http://schemas.microsoft.com/office/drawing/2014/main" val="3489473520"/>
+                  </a:ext>
+                </a:extLst>
+              </a:tr>
+              <a:tr h="0">
+                <a:tc>
+                  <a:txBody>
+                    <a:bodyPr/>
+                    <a:lstStyle/>
+                    <a:p>
+                      <a:pPr>
+                        <a:spcAft>
+                          <a:spcPts val="1200"/>
+                        </a:spcAft>
+                        <a:buNone/>
+                      </a:pPr>
+                      <a:r>
+                        <a:rPr lang="es-CO">
+                          <a:effectLst/>
+                        </a:rPr>
+                        <a:t>Category One Defects</a:t>
+                      </a:r>
+                    </a:p>
+                  </a:txBody>
+                  <a:tcPr marL="123825" marR="123825" marT="57150" marB="57150" anchor="ctr"/>
+                </a:tc>
+                <a:tc>
+                  <a:txBody>
+                    <a:bodyPr/>
+                    <a:lstStyle/>
+                    <a:p>
+                      <a:pPr algn="r">
+                        <a:spcAft>
+                          <a:spcPts val="1200"/>
+                        </a:spcAft>
+                        <a:buNone/>
+                      </a:pPr>
+                      <a:r>
+                        <a:rPr lang="es-CO" dirty="0">
+                          <a:effectLst/>
+                        </a:rPr>
+                        <a:t>-0.150</a:t>
+                      </a:r>
+                    </a:p>
+                  </a:txBody>
+                  <a:tcPr marL="123825" marR="123825" marT="57150" marB="57150" anchor="ctr"/>
+                </a:tc>
+                <a:extLst>
+                  <a:ext uri="{0D108BD9-81ED-4DB2-BD59-A6C34878D82A}">
+                    <a16:rowId xmlns:a16="http://schemas.microsoft.com/office/drawing/2014/main" val="2487293712"/>
+                  </a:ext>
+                </a:extLst>
+              </a:tr>
+              <a:tr h="0">
+                <a:tc>
+                  <a:txBody>
+                    <a:bodyPr/>
+                    <a:lstStyle/>
+                    <a:p>
+                      <a:pPr>
+                        <a:spcAft>
+                          <a:spcPts val="1200"/>
+                        </a:spcAft>
+                        <a:buNone/>
+                      </a:pPr>
+                      <a:r>
+                        <a:rPr lang="es-CO">
+                          <a:effectLst/>
+                        </a:rPr>
+                        <a:t>Category Two Defects</a:t>
+                      </a:r>
+                    </a:p>
+                  </a:txBody>
+                  <a:tcPr marL="123825" marR="123825" marT="57150" marB="57150" anchor="ctr"/>
+                </a:tc>
+                <a:tc>
+                  <a:txBody>
+                    <a:bodyPr/>
+                    <a:lstStyle/>
+                    <a:p>
+                      <a:pPr algn="r">
+                        <a:spcAft>
+                          <a:spcPts val="1200"/>
+                        </a:spcAft>
+                        <a:buNone/>
+                      </a:pPr>
+                      <a:r>
+                        <a:rPr lang="es-CO" dirty="0">
+                          <a:effectLst/>
+                        </a:rPr>
+                        <a:t>-0.299</a:t>
+                      </a:r>
+                    </a:p>
+                  </a:txBody>
+                  <a:tcPr marL="123825" marR="123825" marT="57150" marB="57150" anchor="ctr"/>
+                </a:tc>
+                <a:extLst>
+                  <a:ext uri="{0D108BD9-81ED-4DB2-BD59-A6C34878D82A}">
+                    <a16:rowId xmlns:a16="http://schemas.microsoft.com/office/drawing/2014/main" val="2123660456"/>
+                  </a:ext>
+                </a:extLst>
+              </a:tr>
+            </a:tbl>
+          </a:graphicData>
+        </a:graphic>
+      </p:graphicFrame>
+      <p:sp>
+        <p:nvSpPr>
+          <p:cNvPr id="7" name="CuadroTexto 6">
+            <a:extLst>
+              <a:ext uri="{FF2B5EF4-FFF2-40B4-BE49-F238E27FC236}">
+                <a16:creationId xmlns:a16="http://schemas.microsoft.com/office/drawing/2014/main" id="{A15BF814-2EBA-AFDC-FA73-77C75A12F9AA}"/>
+              </a:ext>
+            </a:extLst>
+          </p:cNvPr>
+          <p:cNvSpPr txBox="1"/>
+          <p:nvPr/>
+        </p:nvSpPr>
+        <p:spPr>
+          <a:xfrm>
+            <a:off x="368300" y="973021"/>
+            <a:ext cx="4445000" cy="646331"/>
+          </a:xfrm>
+          <a:prstGeom prst="rect">
+            <a:avLst/>
+          </a:prstGeom>
+          <a:noFill/>
+        </p:spPr>
+        <p:txBody>
+          <a:bodyPr wrap="square">
+            <a:spAutoFit/>
+          </a:bodyPr>
+          <a:lstStyle/>
+          <a:p>
+            <a:pPr indent="0" algn="l">
+              <a:spcAft>
+                <a:spcPts val="1200"/>
+              </a:spcAft>
+              <a:buNone/>
+            </a:pPr>
+            <a:r>
+              <a:rPr lang="es-CO" sz="1800" b="0" i="0" dirty="0">
+                <a:solidFill>
+                  <a:schemeClr val="tx1"/>
+                </a:solidFill>
+                <a:effectLst/>
+                <a:latin typeface="+mn-lt"/>
+              </a:rPr>
+              <a:t>Para </a:t>
+            </a:r>
+            <a:r>
+              <a:rPr lang="es-CO" sz="1800" b="0" i="0" dirty="0" err="1">
+                <a:solidFill>
+                  <a:schemeClr val="tx1"/>
+                </a:solidFill>
+                <a:effectLst/>
+                <a:latin typeface="+mn-lt"/>
+              </a:rPr>
+              <a:t>Total_Cup_Points</a:t>
+            </a:r>
+            <a:r>
+              <a:rPr lang="es-CO" sz="1800" b="0" i="0" dirty="0">
+                <a:solidFill>
+                  <a:schemeClr val="tx1"/>
+                </a:solidFill>
+                <a:effectLst/>
+                <a:latin typeface="+mn-lt"/>
+              </a:rPr>
+              <a:t> se obtuvieron las siguientes medidas:</a:t>
+            </a:r>
+          </a:p>
+        </p:txBody>
+      </p:sp>
+      <p:sp>
+        <p:nvSpPr>
+          <p:cNvPr id="9" name="CuadroTexto 8">
+            <a:extLst>
+              <a:ext uri="{FF2B5EF4-FFF2-40B4-BE49-F238E27FC236}">
+                <a16:creationId xmlns:a16="http://schemas.microsoft.com/office/drawing/2014/main" id="{952C0511-9696-D9B1-2D95-DD025C1E8E41}"/>
+              </a:ext>
+            </a:extLst>
+          </p:cNvPr>
+          <p:cNvSpPr txBox="1"/>
+          <p:nvPr/>
+        </p:nvSpPr>
+        <p:spPr>
+          <a:xfrm>
+            <a:off x="368300" y="4764901"/>
+            <a:ext cx="10553700" cy="1631216"/>
+          </a:xfrm>
+          <a:prstGeom prst="rect">
+            <a:avLst/>
+          </a:prstGeom>
+          <a:noFill/>
+        </p:spPr>
+        <p:txBody>
+          <a:bodyPr wrap="square">
+            <a:spAutoFit/>
+          </a:bodyPr>
+          <a:lstStyle/>
+          <a:p>
+            <a:pPr indent="0" algn="l">
+              <a:spcAft>
+                <a:spcPts val="1200"/>
+              </a:spcAft>
+              <a:buNone/>
+            </a:pPr>
+            <a:r>
+              <a:rPr lang="es-CO" sz="1800" b="0" i="0" dirty="0">
+                <a:solidFill>
+                  <a:schemeClr val="tx1"/>
+                </a:solidFill>
+                <a:effectLst/>
+                <a:latin typeface="+mn-lt"/>
+              </a:rPr>
+              <a:t>Los resultados muestran asociaciones débiles entre las variables estudiadas y el puntaje. La mayor relación observada fue negativa entre los defectos de categoría 2 y la calidad.</a:t>
+            </a:r>
+          </a:p>
+          <a:p>
+            <a:pPr indent="0" algn="l">
+              <a:spcAft>
+                <a:spcPts val="1200"/>
+              </a:spcAft>
+              <a:buNone/>
+            </a:pPr>
+            <a:r>
+              <a:rPr lang="es-CO" sz="1800" b="0" i="0" dirty="0">
+                <a:solidFill>
+                  <a:schemeClr val="tx1"/>
+                </a:solidFill>
+                <a:effectLst/>
+                <a:latin typeface="+mn-lt"/>
+              </a:rPr>
+              <a:t>El análisis de valores atípicos mostró la existencia de puntajes inusuales, principalmente en el extremo inferior de la distribución. Estos registros se conservaron al no existir evidencia suficiente para considerarlos errores.</a:t>
+            </a:r>
+            <a:endParaRPr lang="es-CO" sz="1800" b="0" i="0" dirty="0">
+              <a:solidFill>
+                <a:srgbClr val="1F2328"/>
+              </a:solidFill>
+              <a:effectLst/>
+              <a:latin typeface="Mona Sans VF"/>
+            </a:endParaRPr>
+          </a:p>
+        </p:txBody>
+      </p:sp>
+      <p:sp>
+        <p:nvSpPr>
+          <p:cNvPr id="11" name="CuadroTexto 10">
+            <a:extLst>
+              <a:ext uri="{FF2B5EF4-FFF2-40B4-BE49-F238E27FC236}">
+                <a16:creationId xmlns:a16="http://schemas.microsoft.com/office/drawing/2014/main" id="{A8EE003E-09BF-25AD-1D39-90FB6923C88F}"/>
+              </a:ext>
+            </a:extLst>
+          </p:cNvPr>
+          <p:cNvSpPr txBox="1"/>
+          <p:nvPr/>
+        </p:nvSpPr>
+        <p:spPr>
+          <a:xfrm>
+            <a:off x="5269164" y="892771"/>
+            <a:ext cx="5736034" cy="1200329"/>
+          </a:xfrm>
+          <a:prstGeom prst="rect">
+            <a:avLst/>
+          </a:prstGeom>
+          <a:noFill/>
+        </p:spPr>
+        <p:txBody>
+          <a:bodyPr wrap="square">
+            <a:spAutoFit/>
+          </a:bodyPr>
+          <a:lstStyle/>
+          <a:p>
+            <a:pPr>
+              <a:spcAft>
+                <a:spcPts val="1200"/>
+              </a:spcAft>
+            </a:pPr>
+            <a:r>
+              <a:rPr lang="es-CO" sz="1800" b="0" i="0" dirty="0">
+                <a:solidFill>
+                  <a:schemeClr val="tx1"/>
+                </a:solidFill>
+                <a:effectLst/>
+                <a:latin typeface="+mn-lt"/>
+              </a:rPr>
+              <a:t>También se analizaron relaciones entre diferentes características y el puntaje de calidad. Las variables utilizadas: </a:t>
+            </a:r>
+            <a:r>
+              <a:rPr lang="en-US" dirty="0"/>
+              <a:t>Altitude, Moisture (</a:t>
+            </a:r>
+            <a:r>
+              <a:rPr lang="en-US" dirty="0" err="1"/>
+              <a:t>Humedad</a:t>
+            </a:r>
+            <a:r>
+              <a:rPr lang="en-US" dirty="0"/>
+              <a:t>), Category One Defects, Category Two Defects</a:t>
+            </a:r>
+            <a:endParaRPr lang="es-CO" sz="1800" b="0" i="0" dirty="0">
+              <a:solidFill>
+                <a:schemeClr val="tx1"/>
+              </a:solidFill>
+              <a:effectLst/>
+              <a:latin typeface="+mn-lt"/>
+            </a:endParaRPr>
+          </a:p>
+        </p:txBody>
+      </p:sp>
+    </p:spTree>
+    <p:extLst>
+      <p:ext uri="{BB962C8B-B14F-4D97-AF65-F5344CB8AC3E}">
+        <p14:creationId xmlns:p14="http://schemas.microsoft.com/office/powerpoint/2010/main" val="3126285003"/>
+      </p:ext>
+    </p:extLst>
+  </p:cSld>
+  <p:clrMapOvr>
+    <a:masterClrMapping/>
+  </p:clrMapOvr>
+</p:sld>
+</file>
+
+<file path=ppt/slides/slide6.xml><?xml version="1.0" encoding="utf-8"?>
+<p:sld xmlns:a="http://schemas.openxmlformats.org/drawingml/2006/main" xmlns:r="http://schemas.openxmlformats.org/officeDocument/2006/relationships" xmlns:p="http://schemas.openxmlformats.org/presentationml/2006/main">
+  <p:cSld>
+    <p:spTree>
+      <p:nvGrpSpPr>
+        <p:cNvPr id="1" name="">
+          <a:extLst>
+            <a:ext uri="{FF2B5EF4-FFF2-40B4-BE49-F238E27FC236}">
+              <a16:creationId xmlns:a16="http://schemas.microsoft.com/office/drawing/2014/main" id="{3AAA7163-00DB-1AAE-1D22-685F7038E0D2}"/>
+            </a:ext>
+          </a:extLst>
+        </p:cNvPr>
+        <p:cNvGrpSpPr/>
+        <p:nvPr/>
+      </p:nvGrpSpPr>
+      <p:grpSpPr>
+        <a:xfrm>
+          <a:off x="0" y="0"/>
+          <a:ext cx="0" cy="0"/>
+          <a:chOff x="0" y="0"/>
+          <a:chExt cx="0" cy="0"/>
+        </a:xfrm>
+      </p:grpSpPr>
+      <p:sp>
+        <p:nvSpPr>
+          <p:cNvPr id="4" name="CuadroTexto 3">
+            <a:extLst>
+              <a:ext uri="{FF2B5EF4-FFF2-40B4-BE49-F238E27FC236}">
+                <a16:creationId xmlns:a16="http://schemas.microsoft.com/office/drawing/2014/main" id="{91863C63-550E-9EDA-2BDE-68D590AFECEA}"/>
+              </a:ext>
+            </a:extLst>
+          </p:cNvPr>
+          <p:cNvSpPr txBox="1"/>
+          <p:nvPr/>
+        </p:nvSpPr>
+        <p:spPr>
+          <a:xfrm>
+            <a:off x="952501" y="359769"/>
+            <a:ext cx="8357936" cy="707886"/>
+          </a:xfrm>
+          <a:prstGeom prst="rect">
+            <a:avLst/>
+          </a:prstGeom>
+          <a:noFill/>
+        </p:spPr>
+        <p:txBody>
+          <a:bodyPr wrap="square" rtlCol="0">
+            <a:spAutoFit/>
+          </a:bodyPr>
+          <a:lstStyle/>
+          <a:p>
+            <a:pPr algn="ctr"/>
+            <a:r>
+              <a:rPr lang="es-ES" sz="4000" b="1" dirty="0">
+                <a:solidFill>
+                  <a:schemeClr val="accent1">
+                    <a:lumMod val="50000"/>
+                  </a:schemeClr>
+                </a:solidFill>
+              </a:rPr>
+              <a:t>Etapa 3: Modelo Predictivo</a:t>
+            </a:r>
+          </a:p>
+        </p:txBody>
+      </p:sp>
+      <p:sp>
+        <p:nvSpPr>
+          <p:cNvPr id="2" name="CuadroTexto 1">
+            <a:extLst>
+              <a:ext uri="{FF2B5EF4-FFF2-40B4-BE49-F238E27FC236}">
+                <a16:creationId xmlns:a16="http://schemas.microsoft.com/office/drawing/2014/main" id="{450E4CD4-5BC0-B34B-FE52-E5150A1EDB8D}"/>
+              </a:ext>
+            </a:extLst>
+          </p:cNvPr>
+          <p:cNvSpPr txBox="1"/>
+          <p:nvPr/>
+        </p:nvSpPr>
+        <p:spPr>
+          <a:xfrm>
+            <a:off x="1174417" y="1334355"/>
+            <a:ext cx="8357936" cy="2893100"/>
+          </a:xfrm>
+          <a:prstGeom prst="rect">
+            <a:avLst/>
+          </a:prstGeom>
+          <a:noFill/>
+        </p:spPr>
+        <p:txBody>
+          <a:bodyPr wrap="square" rtlCol="0">
+            <a:spAutoFit/>
+          </a:bodyPr>
+          <a:lstStyle/>
+          <a:p>
+            <a:pPr algn="just"/>
+            <a:r>
+              <a:rPr lang="es-CO" dirty="0"/>
+              <a:t>Se desarrolló un modelo de </a:t>
+            </a:r>
+            <a:r>
+              <a:rPr lang="es-CO" b="1" dirty="0"/>
+              <a:t>regresión lineal múltiple</a:t>
+            </a:r>
+            <a:r>
+              <a:rPr lang="es-CO" dirty="0"/>
+              <a:t> para estimar </a:t>
+            </a:r>
+            <a:r>
+              <a:rPr lang="es-CO" dirty="0" err="1"/>
+              <a:t>Total_Cup_Points</a:t>
+            </a:r>
+            <a:r>
+              <a:rPr lang="es-CO" dirty="0"/>
+              <a:t>.</a:t>
+            </a:r>
+          </a:p>
+          <a:p>
+            <a:pPr algn="just"/>
+            <a:endParaRPr lang="es-ES" sz="2000" dirty="0">
+              <a:latin typeface="Arial" panose="020B0604020202020204" pitchFamily="34" charset="0"/>
+              <a:cs typeface="Arial" panose="020B0604020202020204" pitchFamily="34" charset="0"/>
+            </a:endParaRPr>
+          </a:p>
+          <a:p>
+            <a:pPr algn="just"/>
+            <a:r>
+              <a:rPr lang="es-ES" dirty="0">
+                <a:latin typeface="Arial" panose="020B0604020202020204" pitchFamily="34" charset="0"/>
+                <a:cs typeface="Arial" panose="020B0604020202020204" pitchFamily="34" charset="0"/>
+              </a:rPr>
+              <a:t>Se implementan las siguientes métricas de evaluación:</a:t>
+            </a:r>
+          </a:p>
+          <a:p>
+            <a:pPr algn="just"/>
+            <a:endParaRPr lang="es-ES" dirty="0">
+              <a:latin typeface="Arial" panose="020B0604020202020204" pitchFamily="34" charset="0"/>
+              <a:cs typeface="Arial" panose="020B0604020202020204" pitchFamily="34" charset="0"/>
+            </a:endParaRPr>
+          </a:p>
+          <a:p>
+            <a:pPr algn="just"/>
+            <a:r>
+              <a:rPr lang="es-ES" dirty="0">
+                <a:latin typeface="Arial" panose="020B0604020202020204" pitchFamily="34" charset="0"/>
+                <a:cs typeface="Arial" panose="020B0604020202020204" pitchFamily="34" charset="0"/>
+              </a:rPr>
+              <a:t>*MAE, Mide, el promedio de las diferencias absolutas entre los valores predichos y los valores reales.</a:t>
+            </a:r>
+          </a:p>
+          <a:p>
+            <a:pPr algn="just"/>
+            <a:r>
+              <a:rPr lang="es-ES" dirty="0">
+                <a:latin typeface="Arial" panose="020B0604020202020204" pitchFamily="34" charset="0"/>
+                <a:cs typeface="Arial" panose="020B0604020202020204" pitchFamily="34" charset="0"/>
+              </a:rPr>
+              <a:t>*RMSE, el error cuadrático medio, para determinar la calidad de las predicciones. </a:t>
+            </a:r>
+          </a:p>
+          <a:p>
+            <a:pPr algn="just"/>
+            <a:r>
+              <a:rPr lang="es-ES" dirty="0">
+                <a:latin typeface="Arial" panose="020B0604020202020204" pitchFamily="34" charset="0"/>
+                <a:cs typeface="Arial" panose="020B0604020202020204" pitchFamily="34" charset="0"/>
+              </a:rPr>
+              <a:t>*R2, coeficiente de determinación, mide el ajuste del modelo a los datos.</a:t>
+            </a:r>
+            <a:endParaRPr lang="es-CO" dirty="0">
+              <a:latin typeface="Arial" panose="020B0604020202020204" pitchFamily="34" charset="0"/>
+              <a:cs typeface="Arial" panose="020B0604020202020204" pitchFamily="34" charset="0"/>
+            </a:endParaRPr>
+          </a:p>
+        </p:txBody>
+      </p:sp>
+    </p:spTree>
+    <p:extLst>
+      <p:ext uri="{BB962C8B-B14F-4D97-AF65-F5344CB8AC3E}">
+        <p14:creationId xmlns:p14="http://schemas.microsoft.com/office/powerpoint/2010/main" val="776705871"/>
+      </p:ext>
+    </p:extLst>
+  </p:cSld>
+  <p:clrMapOvr>
+    <a:masterClrMapping/>
+  </p:clrMapOvr>
+</p:sld>
+</file>
+
+<file path=ppt/slides/slide7.xml><?xml version="1.0" encoding="utf-8"?>
+<p:sld xmlns:a="http://schemas.openxmlformats.org/drawingml/2006/main" xmlns:r="http://schemas.openxmlformats.org/officeDocument/2006/relationships" xmlns:p="http://schemas.openxmlformats.org/presentationml/2006/main">
+  <p:cSld>
+    <p:bg>
+      <p:bgPr>
+        <a:solidFill>
+          <a:schemeClr val="bg1"/>
+        </a:solidFill>
+        <a:effectLst/>
+      </p:bgPr>
+    </p:bg>
+    <p:spTree>
+      <p:nvGrpSpPr>
+        <p:cNvPr id="1" name="">
+          <a:extLst>
+            <a:ext uri="{FF2B5EF4-FFF2-40B4-BE49-F238E27FC236}">
+              <a16:creationId xmlns:a16="http://schemas.microsoft.com/office/drawing/2014/main" id="{4F85356B-AC77-1FDE-B792-DA781F9CC9C1}"/>
+            </a:ext>
+          </a:extLst>
+        </p:cNvPr>
+        <p:cNvGrpSpPr/>
+        <p:nvPr/>
+      </p:nvGrpSpPr>
+      <p:grpSpPr>
+        <a:xfrm>
+          <a:off x="0" y="0"/>
+          <a:ext cx="0" cy="0"/>
+          <a:chOff x="0" y="0"/>
+          <a:chExt cx="0" cy="0"/>
+        </a:xfrm>
+      </p:grpSpPr>
+      <p:grpSp>
+        <p:nvGrpSpPr>
+          <p:cNvPr id="10" name="Group 9">
+            <a:extLst>
+              <a:ext uri="{FF2B5EF4-FFF2-40B4-BE49-F238E27FC236}">
+                <a16:creationId xmlns:a16="http://schemas.microsoft.com/office/drawing/2014/main" id="{947CDE17-06F4-4FCE-8BFE-AD89EACB7094}"/>
+              </a:ext>
+              <a:ext uri="{C183D7F6-B498-43B3-948B-1728B52AA6E4}">
+                <adec:decorative xmlns:adec="http://schemas.microsoft.com/office/drawing/2017/decorative" val="1"/>
+              </a:ext>
+            </a:extLst>
+          </p:cNvPr>
+          <p:cNvGrpSpPr>
+            <a:grpSpLocks noGrp="1" noUngrp="1" noRot="1" noChangeAspect="1" noMove="1" noResize="1"/>
+          </p:cNvGrpSpPr>
+          <p:nvPr>
+            <p:extLst>
+              <p:ext uri="{386F3935-93C4-4BCD-93E2-E3B085C9AB24}">
+                <p16:designElem xmlns:p16="http://schemas.microsoft.com/office/powerpoint/2015/main" val="1"/>
+              </p:ext>
+            </p:extLst>
+          </p:nvPr>
+        </p:nvGrpSpPr>
+        <p:grpSpPr>
+          <a:xfrm>
+            <a:off x="0" y="-8467"/>
+            <a:ext cx="12192000" cy="6866467"/>
+            <a:chOff x="0" y="-8467"/>
+            <a:chExt cx="12192000" cy="6866467"/>
+          </a:xfrm>
+        </p:grpSpPr>
+        <p:cxnSp>
+          <p:nvCxnSpPr>
+            <p:cNvPr id="11" name="Straight Connector 10">
+              <a:extLst>
+                <a:ext uri="{FF2B5EF4-FFF2-40B4-BE49-F238E27FC236}">
+                  <a16:creationId xmlns:a16="http://schemas.microsoft.com/office/drawing/2014/main" id="{4A64534B-C7D9-476B-876D-0A9259D5027E}"/>
+                </a:ext>
+                <a:ext uri="{C183D7F6-B498-43B3-948B-1728B52AA6E4}">
+                  <adec:decorative xmlns:adec="http://schemas.microsoft.com/office/drawing/2017/decorative" val="1"/>
+                </a:ext>
+              </a:extLst>
+            </p:cNvPr>
+            <p:cNvCxnSpPr/>
+            <p:nvPr>
+              <p:extLst>
+                <p:ext uri="{386F3935-93C4-4BCD-93E2-E3B085C9AB24}">
+                  <p16:designElem xmlns:p16="http://schemas.microsoft.com/office/powerpoint/2015/main" val="1"/>
+                </p:ext>
+              </p:extLst>
+            </p:nvPr>
+          </p:nvCxnSpPr>
+          <p:spPr>
+            <a:xfrm>
+              <a:off x="9371012" y="0"/>
+              <a:ext cx="1219200" cy="6858000"/>
+            </a:xfrm>
+            <a:prstGeom prst="line">
+              <a:avLst/>
+            </a:prstGeom>
+            <a:ln w="9525">
+              <a:solidFill>
+                <a:schemeClr val="accent1">
+                  <a:alpha val="70000"/>
+                </a:schemeClr>
+              </a:solidFill>
+            </a:ln>
+          </p:spPr>
+          <p:style>
+            <a:lnRef idx="2">
+              <a:schemeClr val="accent1"/>
+            </a:lnRef>
+            <a:fillRef idx="0">
+              <a:schemeClr val="accent1"/>
+            </a:fillRef>
+            <a:effectRef idx="1">
+              <a:schemeClr val="accent1"/>
+            </a:effectRef>
+            <a:fontRef idx="minor">
+              <a:schemeClr val="tx1"/>
+            </a:fontRef>
+          </p:style>
+        </p:cxnSp>
+        <p:cxnSp>
+          <p:nvCxnSpPr>
+            <p:cNvPr id="12" name="Straight Connector 11">
+              <a:extLst>
+                <a:ext uri="{FF2B5EF4-FFF2-40B4-BE49-F238E27FC236}">
+                  <a16:creationId xmlns:a16="http://schemas.microsoft.com/office/drawing/2014/main" id="{C527E124-CDC8-4D04-848D-E43E18F42545}"/>
+                </a:ext>
+                <a:ext uri="{C183D7F6-B498-43B3-948B-1728B52AA6E4}">
+                  <adec:decorative xmlns:adec="http://schemas.microsoft.com/office/drawing/2017/decorative" val="1"/>
+                </a:ext>
+              </a:extLst>
+            </p:cNvPr>
+            <p:cNvCxnSpPr/>
+            <p:nvPr>
+              <p:extLst>
+                <p:ext uri="{386F3935-93C4-4BCD-93E2-E3B085C9AB24}">
+                  <p16:designElem xmlns:p16="http://schemas.microsoft.com/office/powerpoint/2015/main" val="1"/>
+                </p:ext>
+              </p:extLst>
+            </p:nvPr>
+          </p:nvCxnSpPr>
+          <p:spPr>
+            <a:xfrm flipH="1">
+              <a:off x="7425267" y="3681413"/>
+              <a:ext cx="4763558" cy="3176587"/>
+            </a:xfrm>
+            <a:prstGeom prst="line">
+              <a:avLst/>
+            </a:prstGeom>
+            <a:ln w="9525">
+              <a:solidFill>
+                <a:schemeClr val="accent1">
+                  <a:alpha val="70000"/>
+                </a:schemeClr>
+              </a:solidFill>
+            </a:ln>
+          </p:spPr>
+          <p:style>
+            <a:lnRef idx="2">
+              <a:schemeClr val="accent1"/>
+            </a:lnRef>
+            <a:fillRef idx="0">
+              <a:schemeClr val="accent1"/>
+            </a:fillRef>
+            <a:effectRef idx="1">
+              <a:schemeClr val="accent1"/>
+            </a:effectRef>
+            <a:fontRef idx="minor">
+              <a:schemeClr val="tx1"/>
+            </a:fontRef>
+          </p:style>
+        </p:cxnSp>
+        <p:sp>
+          <p:nvSpPr>
+            <p:cNvPr id="13" name="Rectangle 23">
+              <a:extLst>
+                <a:ext uri="{FF2B5EF4-FFF2-40B4-BE49-F238E27FC236}">
+                  <a16:creationId xmlns:a16="http://schemas.microsoft.com/office/drawing/2014/main" id="{A768FF94-39B1-44FB-9670-D6F5007FB81F}"/>
+                </a:ext>
+                <a:ext uri="{C183D7F6-B498-43B3-948B-1728B52AA6E4}">
+                  <adec:decorative xmlns:adec="http://schemas.microsoft.com/office/drawing/2017/decorative" val="1"/>
+                </a:ext>
+              </a:extLst>
+            </p:cNvPr>
+            <p:cNvSpPr/>
+            <p:nvPr>
+              <p:extLst>
+                <p:ext uri="{386F3935-93C4-4BCD-93E2-E3B085C9AB24}">
+                  <p16:designElem xmlns:p16="http://schemas.microsoft.com/office/powerpoint/2015/main" val="1"/>
+                </p:ext>
+              </p:extLst>
+            </p:nvPr>
+          </p:nvSpPr>
+          <p:spPr>
+            <a:xfrm>
+              <a:off x="9181476" y="-8467"/>
+              <a:ext cx="3007349" cy="6866467"/>
+            </a:xfrm>
+            <a:custGeom>
+              <a:avLst/>
+              <a:gdLst/>
+              <a:ahLst/>
+              <a:cxnLst/>
+              <a:rect l="l" t="t" r="r" b="b"/>
+              <a:pathLst>
+                <a:path w="3007349" h="6866467">
+                  <a:moveTo>
+                    <a:pt x="2045532" y="0"/>
+                  </a:moveTo>
+                  <a:lnTo>
+                    <a:pt x="3007349" y="0"/>
+                  </a:lnTo>
+                  <a:lnTo>
+                    <a:pt x="3007349" y="6866467"/>
+                  </a:lnTo>
+                  <a:lnTo>
+                    <a:pt x="0" y="6866467"/>
+                  </a:lnTo>
+                  <a:lnTo>
+                    <a:pt x="2045532" y="0"/>
+                  </a:lnTo>
+                  <a:close/>
+                </a:path>
+              </a:pathLst>
+            </a:custGeom>
+            <a:solidFill>
+              <a:schemeClr val="accent1">
+                <a:alpha val="36000"/>
+              </a:schemeClr>
+            </a:solidFill>
+            <a:ln>
+              <a:noFill/>
+            </a:ln>
+            <a:effectLst/>
+          </p:spPr>
+          <p:style>
+            <a:lnRef idx="1">
+              <a:schemeClr val="accent1"/>
+            </a:lnRef>
+            <a:fillRef idx="3">
+              <a:schemeClr val="accent1"/>
+            </a:fillRef>
+            <a:effectRef idx="2">
+              <a:schemeClr val="accent1"/>
+            </a:effectRef>
+            <a:fontRef idx="minor">
+              <a:schemeClr val="lt1"/>
+            </a:fontRef>
+          </p:style>
+          <p:txBody>
+            <a:bodyPr/>
+            <a:lstStyle/>
+            <a:p>
+              <a:endParaRPr lang="es-CO"/>
+            </a:p>
+          </p:txBody>
+        </p:sp>
+        <p:sp>
+          <p:nvSpPr>
+            <p:cNvPr id="14" name="Rectangle 25">
+              <a:extLst>
+                <a:ext uri="{FF2B5EF4-FFF2-40B4-BE49-F238E27FC236}">
+                  <a16:creationId xmlns:a16="http://schemas.microsoft.com/office/drawing/2014/main" id="{FCE6337A-0F72-4D0B-81DA-748DC80AB66F}"/>
+                </a:ext>
+                <a:ext uri="{C183D7F6-B498-43B3-948B-1728B52AA6E4}">
+                  <adec:decorative xmlns:adec="http://schemas.microsoft.com/office/drawing/2017/decorative" val="1"/>
+                </a:ext>
+              </a:extLst>
+            </p:cNvPr>
+            <p:cNvSpPr/>
+            <p:nvPr>
+              <p:extLst>
+                <p:ext uri="{386F3935-93C4-4BCD-93E2-E3B085C9AB24}">
+                  <p16:designElem xmlns:p16="http://schemas.microsoft.com/office/powerpoint/2015/main" val="1"/>
+                </p:ext>
+              </p:extLst>
+            </p:nvPr>
+          </p:nvSpPr>
+          <p:spPr>
+            <a:xfrm>
+              <a:off x="9603442" y="-8467"/>
+              <a:ext cx="2588558" cy="6866467"/>
+            </a:xfrm>
+            <a:custGeom>
+              <a:avLst/>
+              <a:gdLst/>
+              <a:ahLst/>
+              <a:cxnLst/>
+              <a:rect l="l" t="t" r="r" b="b"/>
+              <a:pathLst>
+                <a:path w="2573311" h="6866467">
+                  <a:moveTo>
+                    <a:pt x="0" y="0"/>
+                  </a:moveTo>
+                  <a:lnTo>
+                    <a:pt x="2573311" y="0"/>
+                  </a:lnTo>
+                  <a:lnTo>
+                    <a:pt x="2573311" y="6866467"/>
+                  </a:lnTo>
+                  <a:lnTo>
+                    <a:pt x="1202336" y="6866467"/>
+                  </a:lnTo>
+                  <a:lnTo>
+                    <a:pt x="0" y="0"/>
+                  </a:lnTo>
+                  <a:close/>
+                </a:path>
+              </a:pathLst>
+            </a:custGeom>
+            <a:solidFill>
+              <a:schemeClr val="accent1">
+                <a:alpha val="20000"/>
+              </a:schemeClr>
+            </a:solidFill>
+            <a:ln>
+              <a:noFill/>
+            </a:ln>
+            <a:effectLst/>
+          </p:spPr>
+          <p:style>
+            <a:lnRef idx="1">
+              <a:schemeClr val="accent1"/>
+            </a:lnRef>
+            <a:fillRef idx="3">
+              <a:schemeClr val="accent1"/>
+            </a:fillRef>
+            <a:effectRef idx="2">
+              <a:schemeClr val="accent1"/>
+            </a:effectRef>
+            <a:fontRef idx="minor">
+              <a:schemeClr val="lt1"/>
+            </a:fontRef>
+          </p:style>
+          <p:txBody>
+            <a:bodyPr/>
+            <a:lstStyle/>
+            <a:p>
+              <a:endParaRPr lang="es-CO"/>
+            </a:p>
+          </p:txBody>
+        </p:sp>
+        <p:sp>
+          <p:nvSpPr>
+            <p:cNvPr id="15" name="Isosceles Triangle 14">
+              <a:extLst>
+                <a:ext uri="{FF2B5EF4-FFF2-40B4-BE49-F238E27FC236}">
+                  <a16:creationId xmlns:a16="http://schemas.microsoft.com/office/drawing/2014/main" id="{2972CF86-A510-4E29-8CED-C0612D080F1F}"/>
+                </a:ext>
+                <a:ext uri="{C183D7F6-B498-43B3-948B-1728B52AA6E4}">
+                  <adec:decorative xmlns:adec="http://schemas.microsoft.com/office/drawing/2017/decorative" val="1"/>
+                </a:ext>
+              </a:extLst>
+            </p:cNvPr>
+            <p:cNvSpPr/>
+            <p:nvPr>
+              <p:extLst>
+                <p:ext uri="{386F3935-93C4-4BCD-93E2-E3B085C9AB24}">
+                  <p16:designElem xmlns:p16="http://schemas.microsoft.com/office/powerpoint/2015/main" val="1"/>
+                </p:ext>
+              </p:extLst>
+            </p:nvPr>
+          </p:nvSpPr>
+          <p:spPr>
+            <a:xfrm>
+              <a:off x="8932333" y="3048000"/>
+              <a:ext cx="3259667" cy="3810000"/>
+            </a:xfrm>
+            <a:prstGeom prst="triangle">
+              <a:avLst>
+                <a:gd name="adj" fmla="val 100000"/>
+              </a:avLst>
+            </a:prstGeom>
+            <a:solidFill>
+              <a:schemeClr val="accent1">
+                <a:lumMod val="75000"/>
+                <a:alpha val="66000"/>
+              </a:schemeClr>
+            </a:solidFill>
+            <a:ln>
+              <a:noFill/>
+            </a:ln>
+            <a:effectLst/>
+          </p:spPr>
+          <p:style>
+            <a:lnRef idx="1">
+              <a:schemeClr val="accent1"/>
+            </a:lnRef>
+            <a:fillRef idx="3">
+              <a:schemeClr val="accent1"/>
+            </a:fillRef>
+            <a:effectRef idx="2">
+              <a:schemeClr val="accent1"/>
+            </a:effectRef>
+            <a:fontRef idx="minor">
+              <a:schemeClr val="lt1"/>
+            </a:fontRef>
+          </p:style>
+          <p:txBody>
+            <a:bodyPr/>
+            <a:lstStyle/>
+            <a:p>
+              <a:endParaRPr lang="es-CO"/>
+            </a:p>
+          </p:txBody>
+        </p:sp>
+        <p:sp>
+          <p:nvSpPr>
+            <p:cNvPr id="16" name="Rectangle 27">
+              <a:extLst>
+                <a:ext uri="{FF2B5EF4-FFF2-40B4-BE49-F238E27FC236}">
+                  <a16:creationId xmlns:a16="http://schemas.microsoft.com/office/drawing/2014/main" id="{51B0A8D9-B28B-4CE3-8AB6-6633ADD997AD}"/>
+                </a:ext>
+                <a:ext uri="{C183D7F6-B498-43B3-948B-1728B52AA6E4}">
+                  <adec:decorative xmlns:adec="http://schemas.microsoft.com/office/drawing/2017/decorative" val="1"/>
+                </a:ext>
+              </a:extLst>
+            </p:cNvPr>
+            <p:cNvSpPr/>
+            <p:nvPr>
+              <p:extLst>
+                <p:ext uri="{386F3935-93C4-4BCD-93E2-E3B085C9AB24}">
+                  <p16:designElem xmlns:p16="http://schemas.microsoft.com/office/powerpoint/2015/main" val="1"/>
+                </p:ext>
+              </p:extLst>
+            </p:nvPr>
+          </p:nvSpPr>
+          <p:spPr>
+            <a:xfrm>
+              <a:off x="9334500" y="-8467"/>
+              <a:ext cx="2854326" cy="6866467"/>
+            </a:xfrm>
+            <a:custGeom>
+              <a:avLst/>
+              <a:gdLst/>
+              <a:ahLst/>
+              <a:cxnLst/>
+              <a:rect l="l" t="t" r="r" b="b"/>
+              <a:pathLst>
+                <a:path w="2858013" h="6866467">
+                  <a:moveTo>
+                    <a:pt x="0" y="0"/>
+                  </a:moveTo>
+                  <a:lnTo>
+                    <a:pt x="2858013" y="0"/>
+                  </a:lnTo>
+                  <a:lnTo>
+                    <a:pt x="2858013" y="6866467"/>
+                  </a:lnTo>
+                  <a:lnTo>
+                    <a:pt x="2473942" y="6866467"/>
+                  </a:lnTo>
+                  <a:lnTo>
+                    <a:pt x="0" y="0"/>
+                  </a:lnTo>
+                  <a:close/>
+                </a:path>
+              </a:pathLst>
+            </a:custGeom>
+            <a:solidFill>
+              <a:schemeClr val="accent1">
+                <a:lumMod val="75000"/>
+                <a:alpha val="50000"/>
+              </a:schemeClr>
+            </a:solidFill>
+            <a:ln>
+              <a:noFill/>
+            </a:ln>
+            <a:effectLst/>
+          </p:spPr>
+          <p:style>
+            <a:lnRef idx="1">
+              <a:schemeClr val="accent1"/>
+            </a:lnRef>
+            <a:fillRef idx="3">
+              <a:schemeClr val="accent1"/>
+            </a:fillRef>
+            <a:effectRef idx="2">
+              <a:schemeClr val="accent1"/>
+            </a:effectRef>
+            <a:fontRef idx="minor">
+              <a:schemeClr val="lt1"/>
+            </a:fontRef>
+          </p:style>
+          <p:txBody>
+            <a:bodyPr/>
+            <a:lstStyle/>
+            <a:p>
+              <a:endParaRPr lang="es-CO"/>
+            </a:p>
+          </p:txBody>
+        </p:sp>
+        <p:sp>
+          <p:nvSpPr>
+            <p:cNvPr id="17" name="Rectangle 28">
+              <a:extLst>
+                <a:ext uri="{FF2B5EF4-FFF2-40B4-BE49-F238E27FC236}">
+                  <a16:creationId xmlns:a16="http://schemas.microsoft.com/office/drawing/2014/main" id="{525DA9CC-B1B1-4F33-9ED2-89012EA5B495}"/>
+                </a:ext>
+                <a:ext uri="{C183D7F6-B498-43B3-948B-1728B52AA6E4}">
+                  <adec:decorative xmlns:adec="http://schemas.microsoft.com/office/drawing/2017/decorative" val="1"/>
+                </a:ext>
+              </a:extLst>
+            </p:cNvPr>
+            <p:cNvSpPr/>
+            <p:nvPr>
+              <p:extLst>
+                <p:ext uri="{386F3935-93C4-4BCD-93E2-E3B085C9AB24}">
+                  <p16:designElem xmlns:p16="http://schemas.microsoft.com/office/powerpoint/2015/main" val="1"/>
+                </p:ext>
+              </p:extLst>
+            </p:nvPr>
+          </p:nvSpPr>
+          <p:spPr>
+            <a:xfrm>
+              <a:off x="10898730" y="-8467"/>
+              <a:ext cx="1290094" cy="6866467"/>
+            </a:xfrm>
+            <a:custGeom>
+              <a:avLst/>
+              <a:gdLst/>
+              <a:ahLst/>
+              <a:cxnLst/>
+              <a:rect l="l" t="t" r="r" b="b"/>
+              <a:pathLst>
+                <a:path w="1290094" h="6858000">
+                  <a:moveTo>
+                    <a:pt x="1019735" y="0"/>
+                  </a:moveTo>
+                  <a:lnTo>
+                    <a:pt x="1290094" y="0"/>
+                  </a:lnTo>
+                  <a:lnTo>
+                    <a:pt x="1290094" y="6858000"/>
+                  </a:lnTo>
+                  <a:lnTo>
+                    <a:pt x="0" y="6858000"/>
+                  </a:lnTo>
+                  <a:lnTo>
+                    <a:pt x="1019735" y="0"/>
+                  </a:lnTo>
+                  <a:close/>
+                </a:path>
+              </a:pathLst>
+            </a:custGeom>
+            <a:solidFill>
+              <a:schemeClr val="accent2">
+                <a:alpha val="70000"/>
+              </a:schemeClr>
+            </a:solidFill>
+            <a:ln>
+              <a:noFill/>
+            </a:ln>
+            <a:effectLst/>
+          </p:spPr>
+          <p:style>
+            <a:lnRef idx="1">
+              <a:schemeClr val="accent1"/>
+            </a:lnRef>
+            <a:fillRef idx="3">
+              <a:schemeClr val="accent1"/>
+            </a:fillRef>
+            <a:effectRef idx="2">
+              <a:schemeClr val="accent1"/>
+            </a:effectRef>
+            <a:fontRef idx="minor">
+              <a:schemeClr val="lt1"/>
+            </a:fontRef>
+          </p:style>
+          <p:txBody>
+            <a:bodyPr/>
+            <a:lstStyle/>
+            <a:p>
+              <a:endParaRPr lang="es-CO"/>
+            </a:p>
+          </p:txBody>
+        </p:sp>
+        <p:sp>
+          <p:nvSpPr>
+            <p:cNvPr id="18" name="Rectangle 29">
+              <a:extLst>
+                <a:ext uri="{FF2B5EF4-FFF2-40B4-BE49-F238E27FC236}">
+                  <a16:creationId xmlns:a16="http://schemas.microsoft.com/office/drawing/2014/main" id="{6AE546F2-92C0-4C9C-BF28-052A7D0A3B73}"/>
+                </a:ext>
+                <a:ext uri="{C183D7F6-B498-43B3-948B-1728B52AA6E4}">
+                  <adec:decorative xmlns:adec="http://schemas.microsoft.com/office/drawing/2017/decorative" val="1"/>
+                </a:ext>
+              </a:extLst>
+            </p:cNvPr>
+            <p:cNvSpPr/>
+            <p:nvPr>
+              <p:extLst>
+                <p:ext uri="{386F3935-93C4-4BCD-93E2-E3B085C9AB24}">
+                  <p16:designElem xmlns:p16="http://schemas.microsoft.com/office/powerpoint/2015/main" val="1"/>
+                </p:ext>
+              </p:extLst>
+            </p:nvPr>
+          </p:nvSpPr>
+          <p:spPr>
+            <a:xfrm>
+              <a:off x="10938999" y="-8467"/>
+              <a:ext cx="1249825" cy="6866467"/>
+            </a:xfrm>
+            <a:custGeom>
+              <a:avLst/>
+              <a:gdLst/>
+              <a:ahLst/>
+              <a:cxnLst/>
+              <a:rect l="l" t="t" r="r" b="b"/>
+              <a:pathLst>
+                <a:path w="1249825" h="6858000">
+                  <a:moveTo>
+                    <a:pt x="0" y="0"/>
+                  </a:moveTo>
+                  <a:lnTo>
+                    <a:pt x="1249825" y="0"/>
+                  </a:lnTo>
+                  <a:lnTo>
+                    <a:pt x="1249825" y="6858000"/>
+                  </a:lnTo>
+                  <a:lnTo>
+                    <a:pt x="1109382" y="6858000"/>
+                  </a:lnTo>
+                  <a:lnTo>
+                    <a:pt x="0" y="0"/>
+                  </a:lnTo>
+                  <a:close/>
+                </a:path>
+              </a:pathLst>
+            </a:custGeom>
+            <a:solidFill>
+              <a:schemeClr val="accent2">
+                <a:lumMod val="75000"/>
+                <a:alpha val="80000"/>
+              </a:schemeClr>
+            </a:solidFill>
+            <a:ln>
+              <a:noFill/>
+            </a:ln>
+            <a:effectLst/>
+          </p:spPr>
+          <p:style>
+            <a:lnRef idx="1">
+              <a:schemeClr val="accent1"/>
+            </a:lnRef>
+            <a:fillRef idx="3">
+              <a:schemeClr val="accent1"/>
+            </a:fillRef>
+            <a:effectRef idx="2">
+              <a:schemeClr val="accent1"/>
+            </a:effectRef>
+            <a:fontRef idx="minor">
+              <a:schemeClr val="lt1"/>
+            </a:fontRef>
+          </p:style>
+          <p:txBody>
+            <a:bodyPr/>
+            <a:lstStyle/>
+            <a:p>
+              <a:endParaRPr lang="es-CO"/>
+            </a:p>
+          </p:txBody>
+        </p:sp>
+        <p:sp>
+          <p:nvSpPr>
+            <p:cNvPr id="19" name="Isosceles Triangle 18">
+              <a:extLst>
+                <a:ext uri="{FF2B5EF4-FFF2-40B4-BE49-F238E27FC236}">
+                  <a16:creationId xmlns:a16="http://schemas.microsoft.com/office/drawing/2014/main" id="{1111385C-91E7-44E8-AAE5-019E48D76FF1}"/>
+                </a:ext>
+                <a:ext uri="{C183D7F6-B498-43B3-948B-1728B52AA6E4}">
+                  <adec:decorative xmlns:adec="http://schemas.microsoft.com/office/drawing/2017/decorative" val="1"/>
+                </a:ext>
+              </a:extLst>
+            </p:cNvPr>
+            <p:cNvSpPr/>
+            <p:nvPr>
+              <p:extLst>
+                <p:ext uri="{386F3935-93C4-4BCD-93E2-E3B085C9AB24}">
+                  <p16:designElem xmlns:p16="http://schemas.microsoft.com/office/powerpoint/2015/main" val="1"/>
+                </p:ext>
+              </p:extLst>
+            </p:nvPr>
+          </p:nvSpPr>
+          <p:spPr>
+            <a:xfrm>
+              <a:off x="10371666" y="3589867"/>
+              <a:ext cx="1817159" cy="3268133"/>
+            </a:xfrm>
+            <a:prstGeom prst="triangle">
+              <a:avLst>
+                <a:gd name="adj" fmla="val 100000"/>
+              </a:avLst>
+            </a:prstGeom>
+            <a:solidFill>
+              <a:schemeClr val="accent1">
+                <a:lumMod val="75000"/>
+                <a:alpha val="66000"/>
+              </a:schemeClr>
+            </a:solidFill>
+            <a:ln>
+              <a:noFill/>
+            </a:ln>
+            <a:effectLst/>
+          </p:spPr>
+          <p:style>
+            <a:lnRef idx="1">
+              <a:schemeClr val="accent1"/>
+            </a:lnRef>
+            <a:fillRef idx="3">
+              <a:schemeClr val="accent1"/>
+            </a:fillRef>
+            <a:effectRef idx="2">
+              <a:schemeClr val="accent1"/>
+            </a:effectRef>
+            <a:fontRef idx="minor">
+              <a:schemeClr val="lt1"/>
+            </a:fontRef>
+          </p:style>
+          <p:txBody>
+            <a:bodyPr/>
+            <a:lstStyle/>
+            <a:p>
+              <a:endParaRPr lang="es-CO"/>
+            </a:p>
+          </p:txBody>
+        </p:sp>
+        <p:sp>
+          <p:nvSpPr>
+            <p:cNvPr id="20" name="Isosceles Triangle 19">
+              <a:extLst>
+                <a:ext uri="{FF2B5EF4-FFF2-40B4-BE49-F238E27FC236}">
+                  <a16:creationId xmlns:a16="http://schemas.microsoft.com/office/drawing/2014/main" id="{54455A30-C651-4002-BE70-2A0F05BA38B9}"/>
+                </a:ext>
+                <a:ext uri="{C183D7F6-B498-43B3-948B-1728B52AA6E4}">
+                  <adec:decorative xmlns:adec="http://schemas.microsoft.com/office/drawing/2017/decorative" val="1"/>
+                </a:ext>
+              </a:extLst>
+            </p:cNvPr>
+            <p:cNvSpPr/>
+            <p:nvPr>
+              <p:extLst>
+                <p:ext uri="{386F3935-93C4-4BCD-93E2-E3B085C9AB24}">
+                  <p16:designElem xmlns:p16="http://schemas.microsoft.com/office/powerpoint/2015/main" val="1"/>
+                </p:ext>
+              </p:extLst>
+            </p:nvPr>
+          </p:nvSpPr>
+          <p:spPr>
+            <a:xfrm>
+              <a:off x="0" y="4013200"/>
+              <a:ext cx="448733" cy="2844800"/>
+            </a:xfrm>
+            <a:prstGeom prst="triangle">
+              <a:avLst>
+                <a:gd name="adj" fmla="val 0"/>
+              </a:avLst>
+            </a:prstGeom>
+            <a:solidFill>
+              <a:schemeClr val="accent1">
+                <a:alpha val="70000"/>
+              </a:schemeClr>
+            </a:solidFill>
+            <a:ln>
+              <a:noFill/>
+            </a:ln>
+            <a:effectLst/>
+          </p:spPr>
+          <p:style>
+            <a:lnRef idx="1">
+              <a:schemeClr val="accent1"/>
+            </a:lnRef>
+            <a:fillRef idx="3">
+              <a:schemeClr val="accent1"/>
+            </a:fillRef>
+            <a:effectRef idx="2">
+              <a:schemeClr val="accent1"/>
+            </a:effectRef>
+            <a:fontRef idx="minor">
+              <a:schemeClr val="lt1"/>
+            </a:fontRef>
+          </p:style>
+          <p:txBody>
+            <a:bodyPr/>
+            <a:lstStyle/>
+            <a:p>
+              <a:endParaRPr lang="es-CO"/>
+            </a:p>
+          </p:txBody>
+        </p:sp>
+      </p:grpSp>
+      <p:sp useBgFill="1">
+        <p:nvSpPr>
+          <p:cNvPr id="22" name="Rectangle 21">
+            <a:extLst>
+              <a:ext uri="{FF2B5EF4-FFF2-40B4-BE49-F238E27FC236}">
+                <a16:creationId xmlns:a16="http://schemas.microsoft.com/office/drawing/2014/main" id="{45B71F80-1F92-4074-84D9-16A062B215B3}"/>
+              </a:ext>
+              <a:ext uri="{C183D7F6-B498-43B3-948B-1728B52AA6E4}">
+                <adec:decorative xmlns:adec="http://schemas.microsoft.com/office/drawing/2017/decorative" val="1"/>
+              </a:ext>
+            </a:extLst>
+          </p:cNvPr>
+          <p:cNvSpPr>
+            <a:spLocks noGrp="1" noRot="1" noChangeAspect="1" noMove="1" noResize="1" noEditPoints="1" noAdjustHandles="1" noChangeArrowheads="1" noChangeShapeType="1" noTextEdit="1"/>
+          </p:cNvSpPr>
+          <p:nvPr>
+            <p:extLst>
+              <p:ext uri="{386F3935-93C4-4BCD-93E2-E3B085C9AB24}">
+                <p16:designElem xmlns:p16="http://schemas.microsoft.com/office/powerpoint/2015/main" val="1"/>
+              </p:ext>
+            </p:extLst>
+          </p:nvPr>
+        </p:nvSpPr>
+        <p:spPr>
+          <a:xfrm>
+            <a:off x="0" y="0"/>
+            <a:ext cx="12192000" cy="6858000"/>
+          </a:xfrm>
+          <a:prstGeom prst="rect">
+            <a:avLst/>
+          </a:prstGeom>
+          <a:ln>
+            <a:noFill/>
+          </a:ln>
+        </p:spPr>
+        <p:style>
+          <a:lnRef idx="2">
+            <a:schemeClr val="accent1">
+              <a:shade val="50000"/>
+            </a:schemeClr>
+          </a:lnRef>
+          <a:fillRef idx="1">
+            <a:schemeClr val="accent1"/>
+          </a:fillRef>
+          <a:effectRef idx="0">
+            <a:schemeClr val="accent1"/>
+          </a:effectRef>
+          <a:fontRef idx="minor">
+            <a:schemeClr val="lt1"/>
+          </a:fontRef>
+        </p:style>
+        <p:txBody>
+          <a:bodyPr rtlCol="0" anchor="ctr"/>
+          <a:lstStyle/>
+          <a:p>
+            <a:pPr algn="ctr"/>
+            <a:endParaRPr lang="en-US"/>
+          </a:p>
+        </p:txBody>
+      </p:sp>
+      <p:sp>
+        <p:nvSpPr>
+          <p:cNvPr id="4" name="CuadroTexto 3">
+            <a:extLst>
+              <a:ext uri="{FF2B5EF4-FFF2-40B4-BE49-F238E27FC236}">
+                <a16:creationId xmlns:a16="http://schemas.microsoft.com/office/drawing/2014/main" id="{75BC9E7D-774A-42C8-7787-0051069B22BD}"/>
+              </a:ext>
+            </a:extLst>
+          </p:cNvPr>
+          <p:cNvSpPr txBox="1"/>
+          <p:nvPr/>
+        </p:nvSpPr>
+        <p:spPr>
+          <a:xfrm>
+            <a:off x="1286933" y="609600"/>
+            <a:ext cx="10197494" cy="1099457"/>
+          </a:xfrm>
+          <a:prstGeom prst="rect">
+            <a:avLst/>
+          </a:prstGeom>
+        </p:spPr>
+        <p:txBody>
+          <a:bodyPr vert="horz" lIns="91440" tIns="45720" rIns="91440" bIns="45720" rtlCol="0" anchor="t">
+            <a:normAutofit/>
+          </a:bodyPr>
+          <a:lstStyle/>
+          <a:p>
+            <a:pPr>
+              <a:spcBef>
+                <a:spcPct val="0"/>
+              </a:spcBef>
+              <a:spcAft>
+                <a:spcPts val="600"/>
+              </a:spcAft>
+            </a:pPr>
+            <a:r>
+              <a:rPr lang="en-US" sz="3600" b="1" dirty="0" err="1">
+                <a:solidFill>
+                  <a:schemeClr val="accent1"/>
+                </a:solidFill>
+                <a:latin typeface="+mj-lt"/>
+                <a:ea typeface="+mj-ea"/>
+                <a:cs typeface="+mj-cs"/>
+              </a:rPr>
+              <a:t>Resultados</a:t>
+            </a:r>
+            <a:r>
+              <a:rPr lang="en-US" sz="3600" b="1" dirty="0">
+                <a:solidFill>
+                  <a:schemeClr val="accent1"/>
+                </a:solidFill>
+                <a:latin typeface="+mj-lt"/>
+                <a:ea typeface="+mj-ea"/>
+                <a:cs typeface="+mj-cs"/>
+              </a:rPr>
+              <a:t> Modelo </a:t>
+            </a:r>
+            <a:r>
+              <a:rPr lang="en-US" sz="3600" b="1" dirty="0" err="1">
+                <a:solidFill>
+                  <a:schemeClr val="accent1"/>
+                </a:solidFill>
+                <a:latin typeface="+mj-lt"/>
+                <a:ea typeface="+mj-ea"/>
+                <a:cs typeface="+mj-cs"/>
+              </a:rPr>
+              <a:t>Predictivo</a:t>
+            </a:r>
+            <a:endParaRPr lang="en-US" sz="3600" b="1" dirty="0">
+              <a:solidFill>
+                <a:schemeClr val="accent1"/>
+              </a:solidFill>
+              <a:latin typeface="+mj-lt"/>
+              <a:ea typeface="+mj-ea"/>
+              <a:cs typeface="+mj-cs"/>
+            </a:endParaRPr>
+          </a:p>
+        </p:txBody>
+      </p:sp>
+      <p:sp>
+        <p:nvSpPr>
+          <p:cNvPr id="24" name="Isosceles Triangle 23">
+            <a:extLst>
+              <a:ext uri="{FF2B5EF4-FFF2-40B4-BE49-F238E27FC236}">
+                <a16:creationId xmlns:a16="http://schemas.microsoft.com/office/drawing/2014/main" id="{7209C9DA-6E0D-46D9-8275-C52222D8CCAC}"/>
+              </a:ext>
+              <a:ext uri="{C183D7F6-B498-43B3-948B-1728B52AA6E4}">
+                <adec:decorative xmlns:adec="http://schemas.microsoft.com/office/drawing/2017/decorative" val="1"/>
+              </a:ext>
+            </a:extLst>
+          </p:cNvPr>
+          <p:cNvSpPr>
+            <a:spLocks noGrp="1" noRot="1" noChangeAspect="1" noMove="1" noResize="1" noEditPoints="1" noAdjustHandles="1" noChangeArrowheads="1" noChangeShapeType="1" noTextEdit="1"/>
+          </p:cNvSpPr>
+          <p:nvPr>
+            <p:extLst>
+              <p:ext uri="{386F3935-93C4-4BCD-93E2-E3B085C9AB24}">
+                <p16:designElem xmlns:p16="http://schemas.microsoft.com/office/powerpoint/2015/main" val="1"/>
+              </p:ext>
+            </p:extLst>
+          </p:nvPr>
+        </p:nvSpPr>
+        <p:spPr>
+          <a:xfrm rot="10800000">
+            <a:off x="0" y="0"/>
+            <a:ext cx="842596" cy="5666154"/>
+          </a:xfrm>
+          <a:prstGeom prst="triangle">
+            <a:avLst>
+              <a:gd name="adj" fmla="val 100000"/>
+            </a:avLst>
+          </a:prstGeom>
+          <a:solidFill>
+            <a:schemeClr val="accent1">
+              <a:alpha val="85000"/>
+            </a:schemeClr>
+          </a:solidFill>
+          <a:ln>
+            <a:noFill/>
+          </a:ln>
+          <a:effectLst/>
+        </p:spPr>
+        <p:style>
+          <a:lnRef idx="1">
+            <a:schemeClr val="accent1"/>
+          </a:lnRef>
+          <a:fillRef idx="3">
+            <a:schemeClr val="accent1"/>
+          </a:fillRef>
+          <a:effectRef idx="2">
+            <a:schemeClr val="accent1"/>
+          </a:effectRef>
+          <a:fontRef idx="minor">
+            <a:schemeClr val="lt1"/>
+          </a:fontRef>
+        </p:style>
+        <p:txBody>
+          <a:bodyPr/>
+          <a:lstStyle/>
+          <a:p>
+            <a:endParaRPr lang="es-CO"/>
+          </a:p>
+        </p:txBody>
+      </p:sp>
+      <p:sp>
+        <p:nvSpPr>
+          <p:cNvPr id="26" name="Isosceles Triangle 25">
+            <a:extLst>
+              <a:ext uri="{FF2B5EF4-FFF2-40B4-BE49-F238E27FC236}">
+                <a16:creationId xmlns:a16="http://schemas.microsoft.com/office/drawing/2014/main" id="{3EB57A4D-E0D0-46DA-B339-F24CA46FA70B}"/>
+              </a:ext>
+              <a:ext uri="{C183D7F6-B498-43B3-948B-1728B52AA6E4}">
+                <adec:decorative xmlns:adec="http://schemas.microsoft.com/office/drawing/2017/decorative" val="1"/>
+              </a:ext>
+            </a:extLst>
+          </p:cNvPr>
+          <p:cNvSpPr>
+            <a:spLocks noGrp="1" noRot="1" noChangeAspect="1" noMove="1" noResize="1" noEditPoints="1" noAdjustHandles="1" noChangeArrowheads="1" noChangeShapeType="1" noTextEdit="1"/>
+          </p:cNvSpPr>
+          <p:nvPr>
+            <p:extLst>
+              <p:ext uri="{386F3935-93C4-4BCD-93E2-E3B085C9AB24}">
+                <p16:designElem xmlns:p16="http://schemas.microsoft.com/office/powerpoint/2015/main" val="1"/>
+              </p:ext>
+            </p:extLst>
+          </p:nvPr>
+        </p:nvSpPr>
+        <p:spPr>
+          <a:xfrm flipH="1">
+            <a:off x="11743267" y="4013200"/>
+            <a:ext cx="448733" cy="2844800"/>
+          </a:xfrm>
+          <a:prstGeom prst="triangle">
+            <a:avLst>
+              <a:gd name="adj" fmla="val 0"/>
+            </a:avLst>
+          </a:prstGeom>
+          <a:solidFill>
+            <a:schemeClr val="accent1">
+              <a:alpha val="85000"/>
+            </a:schemeClr>
+          </a:solidFill>
+          <a:ln>
+            <a:noFill/>
+          </a:ln>
+          <a:effectLst/>
+        </p:spPr>
+        <p:style>
+          <a:lnRef idx="1">
+            <a:schemeClr val="accent1"/>
+          </a:lnRef>
+          <a:fillRef idx="3">
+            <a:schemeClr val="accent1"/>
+          </a:fillRef>
+          <a:effectRef idx="2">
+            <a:schemeClr val="accent1"/>
+          </a:effectRef>
+          <a:fontRef idx="minor">
+            <a:schemeClr val="lt1"/>
+          </a:fontRef>
+        </p:style>
+        <p:txBody>
+          <a:bodyPr/>
+          <a:lstStyle/>
+          <a:p>
+            <a:endParaRPr lang="es-CO"/>
+          </a:p>
+        </p:txBody>
+      </p:sp>
+      <p:graphicFrame>
+        <p:nvGraphicFramePr>
+          <p:cNvPr id="7" name="Tabla 6">
+            <a:extLst>
+              <a:ext uri="{FF2B5EF4-FFF2-40B4-BE49-F238E27FC236}">
+                <a16:creationId xmlns:a16="http://schemas.microsoft.com/office/drawing/2014/main" id="{9DDB934C-C0D0-66FD-4D35-67F78E72E7B8}"/>
+              </a:ext>
+            </a:extLst>
+          </p:cNvPr>
+          <p:cNvGraphicFramePr>
+            <a:graphicFrameLocks noGrp="1"/>
+          </p:cNvGraphicFramePr>
+          <p:nvPr>
+            <p:extLst>
+              <p:ext uri="{D42A27DB-BD31-4B8C-83A1-F6EECF244321}">
+                <p14:modId xmlns:p14="http://schemas.microsoft.com/office/powerpoint/2010/main" val="1356907803"/>
+              </p:ext>
+            </p:extLst>
+          </p:nvPr>
+        </p:nvGraphicFramePr>
+        <p:xfrm>
+          <a:off x="1111539" y="1772234"/>
+          <a:ext cx="8596312" cy="1554480"/>
+        </p:xfrm>
+        <a:graphic>
+          <a:graphicData uri="http://schemas.openxmlformats.org/drawingml/2006/table">
+            <a:tbl>
+              <a:tblPr>
+                <a:tableStyleId>{5C22544A-7EE6-4342-B048-85BDC9FD1C3A}</a:tableStyleId>
+              </a:tblPr>
+              <a:tblGrid>
+                <a:gridCol w="4298156">
+                  <a:extLst>
+                    <a:ext uri="{9D8B030D-6E8A-4147-A177-3AD203B41FA5}">
+                      <a16:colId xmlns:a16="http://schemas.microsoft.com/office/drawing/2014/main" val="914380509"/>
+                    </a:ext>
+                  </a:extLst>
+                </a:gridCol>
+                <a:gridCol w="4298156">
+                  <a:extLst>
+                    <a:ext uri="{9D8B030D-6E8A-4147-A177-3AD203B41FA5}">
+                      <a16:colId xmlns:a16="http://schemas.microsoft.com/office/drawing/2014/main" val="3947254877"/>
+                    </a:ext>
+                  </a:extLst>
+                </a:gridCol>
+              </a:tblGrid>
+              <a:tr h="0">
+                <a:tc>
+                  <a:txBody>
+                    <a:bodyPr/>
+                    <a:lstStyle/>
+                    <a:p>
+                      <a:pPr>
+                        <a:spcAft>
+                          <a:spcPts val="1200"/>
+                        </a:spcAft>
+                        <a:buNone/>
+                      </a:pPr>
+                      <a:r>
+                        <a:rPr lang="es-CO">
+                          <a:effectLst/>
+                        </a:rPr>
+                        <a:t>Métrica</a:t>
+                      </a:r>
+                      <a:endParaRPr lang="es-CO" b="1">
+                        <a:effectLst/>
+                      </a:endParaRPr>
+                    </a:p>
+                  </a:txBody>
+                  <a:tcPr marL="123825" marR="123825" marT="57150" marB="57150" anchor="ctr"/>
+                </a:tc>
+                <a:tc>
+                  <a:txBody>
+                    <a:bodyPr/>
+                    <a:lstStyle/>
+                    <a:p>
+                      <a:pPr algn="r">
+                        <a:spcAft>
+                          <a:spcPts val="1200"/>
+                        </a:spcAft>
+                        <a:buNone/>
+                      </a:pPr>
+                      <a:r>
+                        <a:rPr lang="es-CO">
+                          <a:effectLst/>
+                        </a:rPr>
+                        <a:t>Resultado</a:t>
+                      </a:r>
+                      <a:endParaRPr lang="es-CO" b="1">
+                        <a:effectLst/>
+                      </a:endParaRPr>
+                    </a:p>
+                  </a:txBody>
+                  <a:tcPr marL="123825" marR="123825" marT="57150" marB="57150" anchor="ctr"/>
+                </a:tc>
+                <a:extLst>
+                  <a:ext uri="{0D108BD9-81ED-4DB2-BD59-A6C34878D82A}">
+                    <a16:rowId xmlns:a16="http://schemas.microsoft.com/office/drawing/2014/main" val="3028498142"/>
+                  </a:ext>
+                </a:extLst>
+              </a:tr>
+              <a:tr h="0">
+                <a:tc>
+                  <a:txBody>
+                    <a:bodyPr/>
+                    <a:lstStyle/>
+                    <a:p>
+                      <a:pPr>
+                        <a:spcAft>
+                          <a:spcPts val="1200"/>
+                        </a:spcAft>
+                        <a:buNone/>
+                      </a:pPr>
+                      <a:r>
+                        <a:rPr lang="es-CO">
+                          <a:effectLst/>
+                        </a:rPr>
+                        <a:t>MAE</a:t>
+                      </a:r>
+                    </a:p>
+                  </a:txBody>
+                  <a:tcPr marL="123825" marR="123825" marT="57150" marB="57150" anchor="ctr"/>
+                </a:tc>
+                <a:tc>
+                  <a:txBody>
+                    <a:bodyPr/>
+                    <a:lstStyle/>
+                    <a:p>
+                      <a:pPr algn="r">
+                        <a:spcAft>
+                          <a:spcPts val="1200"/>
+                        </a:spcAft>
+                        <a:buNone/>
+                      </a:pPr>
+                      <a:r>
+                        <a:rPr lang="es-CO">
+                          <a:effectLst/>
+                        </a:rPr>
+                        <a:t>1.71</a:t>
+                      </a:r>
+                    </a:p>
+                  </a:txBody>
+                  <a:tcPr marL="123825" marR="123825" marT="57150" marB="57150" anchor="ctr"/>
+                </a:tc>
+                <a:extLst>
+                  <a:ext uri="{0D108BD9-81ED-4DB2-BD59-A6C34878D82A}">
+                    <a16:rowId xmlns:a16="http://schemas.microsoft.com/office/drawing/2014/main" val="1252697640"/>
+                  </a:ext>
+                </a:extLst>
+              </a:tr>
+              <a:tr h="0">
+                <a:tc>
+                  <a:txBody>
+                    <a:bodyPr/>
+                    <a:lstStyle/>
+                    <a:p>
+                      <a:pPr>
+                        <a:spcAft>
+                          <a:spcPts val="1200"/>
+                        </a:spcAft>
+                        <a:buNone/>
+                      </a:pPr>
+                      <a:r>
+                        <a:rPr lang="es-CO">
+                          <a:effectLst/>
+                        </a:rPr>
+                        <a:t>RMSE</a:t>
+                      </a:r>
+                    </a:p>
+                  </a:txBody>
+                  <a:tcPr marL="123825" marR="123825" marT="57150" marB="57150" anchor="ctr"/>
+                </a:tc>
+                <a:tc>
+                  <a:txBody>
+                    <a:bodyPr/>
+                    <a:lstStyle/>
+                    <a:p>
+                      <a:pPr algn="r">
+                        <a:spcAft>
+                          <a:spcPts val="1200"/>
+                        </a:spcAft>
+                        <a:buNone/>
+                      </a:pPr>
+                      <a:r>
+                        <a:rPr lang="es-CO">
+                          <a:effectLst/>
+                        </a:rPr>
+                        <a:t>2.56</a:t>
+                      </a:r>
+                    </a:p>
+                  </a:txBody>
+                  <a:tcPr marL="123825" marR="123825" marT="57150" marB="57150" anchor="ctr"/>
+                </a:tc>
+                <a:extLst>
+                  <a:ext uri="{0D108BD9-81ED-4DB2-BD59-A6C34878D82A}">
+                    <a16:rowId xmlns:a16="http://schemas.microsoft.com/office/drawing/2014/main" val="380399745"/>
+                  </a:ext>
+                </a:extLst>
+              </a:tr>
+              <a:tr h="0">
+                <a:tc>
+                  <a:txBody>
+                    <a:bodyPr/>
+                    <a:lstStyle/>
+                    <a:p>
+                      <a:pPr>
+                        <a:spcAft>
+                          <a:spcPts val="1200"/>
+                        </a:spcAft>
+                        <a:buNone/>
+                      </a:pPr>
+                      <a:r>
+                        <a:rPr lang="es-CO">
+                          <a:effectLst/>
+                        </a:rPr>
+                        <a:t>R²</a:t>
+                      </a:r>
+                    </a:p>
+                  </a:txBody>
+                  <a:tcPr marL="123825" marR="123825" marT="57150" marB="57150" anchor="ctr"/>
+                </a:tc>
+                <a:tc>
+                  <a:txBody>
+                    <a:bodyPr/>
+                    <a:lstStyle/>
+                    <a:p>
+                      <a:pPr algn="r">
+                        <a:spcAft>
+                          <a:spcPts val="1200"/>
+                        </a:spcAft>
+                        <a:buNone/>
+                      </a:pPr>
+                      <a:r>
+                        <a:rPr lang="es-CO" dirty="0">
+                          <a:effectLst/>
+                        </a:rPr>
+                        <a:t>0.116</a:t>
+                      </a:r>
+                    </a:p>
+                  </a:txBody>
+                  <a:tcPr marL="123825" marR="123825" marT="57150" marB="57150" anchor="ctr"/>
+                </a:tc>
+                <a:extLst>
+                  <a:ext uri="{0D108BD9-81ED-4DB2-BD59-A6C34878D82A}">
+                    <a16:rowId xmlns:a16="http://schemas.microsoft.com/office/drawing/2014/main" val="2243382993"/>
+                  </a:ext>
+                </a:extLst>
+              </a:tr>
+            </a:tbl>
+          </a:graphicData>
+        </a:graphic>
+      </p:graphicFrame>
+      <p:sp>
+        <p:nvSpPr>
+          <p:cNvPr id="23" name="CuadroTexto 22">
+            <a:extLst>
+              <a:ext uri="{FF2B5EF4-FFF2-40B4-BE49-F238E27FC236}">
+                <a16:creationId xmlns:a16="http://schemas.microsoft.com/office/drawing/2014/main" id="{021A8C64-BEBB-47EF-558A-41DEAC2CD973}"/>
+              </a:ext>
+            </a:extLst>
+          </p:cNvPr>
+          <p:cNvSpPr txBox="1"/>
+          <p:nvPr/>
+        </p:nvSpPr>
+        <p:spPr>
+          <a:xfrm>
+            <a:off x="1075027" y="3681413"/>
+            <a:ext cx="8949046" cy="1754326"/>
+          </a:xfrm>
+          <a:prstGeom prst="rect">
+            <a:avLst/>
+          </a:prstGeom>
+          <a:noFill/>
+        </p:spPr>
+        <p:txBody>
+          <a:bodyPr wrap="square">
+            <a:spAutoFit/>
+          </a:bodyPr>
+          <a:lstStyle/>
+          <a:p>
+            <a:r>
+              <a:rPr lang="es-ES" dirty="0"/>
+              <a:t>El modelo presenta un error absoluto medio (MAE) de aproximadamente 1.71 puntos y explica cerca del 11.6 % de la variabilidad (R2) del puntaje en los datos de prueba.</a:t>
+            </a:r>
+          </a:p>
+          <a:p>
+            <a:endParaRPr lang="es-ES" dirty="0"/>
+          </a:p>
+          <a:p>
+            <a:r>
+              <a:rPr lang="es-ES" dirty="0"/>
+              <a:t>Los resultados indican que las características analizadas aportan información sobre la calidad, pero no son suficientes por sí solas para predecir con alta precisión el puntaje sensorial.</a:t>
+            </a:r>
+            <a:endParaRPr lang="es-CO" dirty="0"/>
+          </a:p>
+        </p:txBody>
+      </p:sp>
+    </p:spTree>
+    <p:extLst>
+      <p:ext uri="{BB962C8B-B14F-4D97-AF65-F5344CB8AC3E}">
+        <p14:creationId xmlns:p14="http://schemas.microsoft.com/office/powerpoint/2010/main" val="899003741"/>
+      </p:ext>
+    </p:extLst>
+  </p:cSld>
+  <p:clrMapOvr>
+    <a:masterClrMapping/>
+  </p:clrMapOvr>
+</p:sld>
+</file>
+
+<file path=ppt/slides/slide8.xml><?xml version="1.0" encoding="utf-8"?>
+<p:sld xmlns:a="http://schemas.openxmlformats.org/drawingml/2006/main" xmlns:r="http://schemas.openxmlformats.org/officeDocument/2006/relationships" xmlns:p="http://schemas.openxmlformats.org/presentationml/2006/main">
+  <p:cSld>
+    <p:spTree>
+      <p:nvGrpSpPr>
+        <p:cNvPr id="1" name="">
+          <a:extLst>
+            <a:ext uri="{FF2B5EF4-FFF2-40B4-BE49-F238E27FC236}">
+              <a16:creationId xmlns:a16="http://schemas.microsoft.com/office/drawing/2014/main" id="{F7CFFBD4-5D9C-6293-3897-323064F828E6}"/>
+            </a:ext>
+          </a:extLst>
+        </p:cNvPr>
+        <p:cNvGrpSpPr/>
+        <p:nvPr/>
+      </p:nvGrpSpPr>
+      <p:grpSpPr>
+        <a:xfrm>
+          <a:off x="0" y="0"/>
+          <a:ext cx="0" cy="0"/>
+          <a:chOff x="0" y="0"/>
+          <a:chExt cx="0" cy="0"/>
+        </a:xfrm>
+      </p:grpSpPr>
+      <p:sp>
+        <p:nvSpPr>
+          <p:cNvPr id="4" name="CuadroTexto 3">
+            <a:extLst>
+              <a:ext uri="{FF2B5EF4-FFF2-40B4-BE49-F238E27FC236}">
+                <a16:creationId xmlns:a16="http://schemas.microsoft.com/office/drawing/2014/main" id="{82D21C77-7835-D012-9A34-0ABB3166C1CC}"/>
+              </a:ext>
+            </a:extLst>
+          </p:cNvPr>
+          <p:cNvSpPr txBox="1"/>
+          <p:nvPr/>
+        </p:nvSpPr>
+        <p:spPr>
+          <a:xfrm>
+            <a:off x="914401" y="524869"/>
+            <a:ext cx="8357936" cy="707886"/>
+          </a:xfrm>
+          <a:prstGeom prst="rect">
+            <a:avLst/>
+          </a:prstGeom>
+          <a:noFill/>
+        </p:spPr>
+        <p:txBody>
+          <a:bodyPr wrap="square" rtlCol="0">
+            <a:spAutoFit/>
+          </a:bodyPr>
+          <a:lstStyle/>
+          <a:p>
+            <a:pPr algn="ctr"/>
+            <a:r>
+              <a:rPr lang="es-ES" sz="4000" b="1" dirty="0">
+                <a:solidFill>
+                  <a:schemeClr val="accent1">
+                    <a:lumMod val="50000"/>
+                  </a:schemeClr>
+                </a:solidFill>
+              </a:rPr>
+              <a:t>Evaluación Visual del Modelo</a:t>
+            </a:r>
+          </a:p>
+        </p:txBody>
+      </p:sp>
+      <p:pic>
+        <p:nvPicPr>
+          <p:cNvPr id="3" name="Imagen 2">
+            <a:extLst>
+              <a:ext uri="{FF2B5EF4-FFF2-40B4-BE49-F238E27FC236}">
+                <a16:creationId xmlns:a16="http://schemas.microsoft.com/office/drawing/2014/main" id="{C505B5C6-2755-6E97-8032-E75D3995AD10}"/>
+              </a:ext>
+            </a:extLst>
+          </p:cNvPr>
+          <p:cNvPicPr>
+            <a:picLocks noChangeAspect="1"/>
+          </p:cNvPicPr>
+          <p:nvPr/>
+        </p:nvPicPr>
+        <p:blipFill>
+          <a:blip r:embed="rId2"/>
+          <a:stretch>
+            <a:fillRect/>
+          </a:stretch>
+        </p:blipFill>
+        <p:spPr>
+          <a:xfrm>
+            <a:off x="3819524" y="1232755"/>
+            <a:ext cx="6233228" cy="5148263"/>
+          </a:xfrm>
+          <a:prstGeom prst="rect">
+            <a:avLst/>
+          </a:prstGeom>
+        </p:spPr>
+      </p:pic>
+      <p:sp>
+        <p:nvSpPr>
+          <p:cNvPr id="7" name="CuadroTexto 6">
+            <a:extLst>
+              <a:ext uri="{FF2B5EF4-FFF2-40B4-BE49-F238E27FC236}">
+                <a16:creationId xmlns:a16="http://schemas.microsoft.com/office/drawing/2014/main" id="{B95AD77C-B389-D8F9-380A-0F07343161BE}"/>
+              </a:ext>
+            </a:extLst>
+          </p:cNvPr>
+          <p:cNvSpPr txBox="1"/>
+          <p:nvPr/>
+        </p:nvSpPr>
+        <p:spPr>
+          <a:xfrm>
+            <a:off x="538414" y="1903827"/>
+            <a:ext cx="2962024" cy="3416320"/>
+          </a:xfrm>
+          <a:prstGeom prst="rect">
+            <a:avLst/>
+          </a:prstGeom>
+          <a:noFill/>
+        </p:spPr>
+        <p:txBody>
+          <a:bodyPr wrap="square" rtlCol="0">
+            <a:spAutoFit/>
+          </a:bodyPr>
+          <a:lstStyle/>
+          <a:p>
+            <a:r>
+              <a:rPr lang="es-ES" sz="2400" dirty="0"/>
+              <a:t>La mayor parte de las evaluaciones se concentra alrededor de los 80–85 puntos, aunque se observa una mayor extensión hacia los puntajes bajos.</a:t>
+            </a:r>
+            <a:endParaRPr lang="es-CO" dirty="0"/>
+          </a:p>
+        </p:txBody>
+      </p:sp>
+    </p:spTree>
+    <p:extLst>
+      <p:ext uri="{BB962C8B-B14F-4D97-AF65-F5344CB8AC3E}">
+        <p14:creationId xmlns:p14="http://schemas.microsoft.com/office/powerpoint/2010/main" val="617261825"/>
+      </p:ext>
+    </p:extLst>
+  </p:cSld>
+  <p:clrMapOvr>
+    <a:masterClrMapping/>
+  </p:clrMapOvr>
+</p:sld>
+</file>
+
+<file path=ppt/slides/slide9.xml><?xml version="1.0" encoding="utf-8"?>
+<p:sld xmlns:a="http://schemas.openxmlformats.org/drawingml/2006/main" xmlns:r="http://schemas.openxmlformats.org/officeDocument/2006/relationships" xmlns:p="http://schemas.openxmlformats.org/presentationml/2006/main">
+  <p:cSld>
+    <p:spTree>
+      <p:nvGrpSpPr>
+        <p:cNvPr id="1" name=""/>
+        <p:cNvGrpSpPr/>
+        <p:nvPr/>
+      </p:nvGrpSpPr>
+      <p:grpSpPr>
+        <a:xfrm>
+          <a:off x="0" y="0"/>
+          <a:ext cx="0" cy="0"/>
+          <a:chOff x="0" y="0"/>
+          <a:chExt cx="0" cy="0"/>
+        </a:xfrm>
+      </p:grpSpPr>
+      <p:pic>
+        <p:nvPicPr>
+          <p:cNvPr id="3" name="Imagen 2">
+            <a:extLst>
+              <a:ext uri="{FF2B5EF4-FFF2-40B4-BE49-F238E27FC236}">
+                <a16:creationId xmlns:a16="http://schemas.microsoft.com/office/drawing/2014/main" id="{4A18BB7F-B688-B39B-4532-20C5322DA3B2}"/>
+              </a:ext>
+            </a:extLst>
+          </p:cNvPr>
+          <p:cNvPicPr>
+            <a:picLocks noChangeAspect="1"/>
+          </p:cNvPicPr>
+          <p:nvPr/>
+        </p:nvPicPr>
+        <p:blipFill>
+          <a:blip r:embed="rId2"/>
+          <a:stretch>
+            <a:fillRect/>
+          </a:stretch>
+        </p:blipFill>
+        <p:spPr>
+          <a:xfrm>
+            <a:off x="2381250" y="1690938"/>
+            <a:ext cx="5600700" cy="3514725"/>
+          </a:xfrm>
+          <a:prstGeom prst="rect">
+            <a:avLst/>
+          </a:prstGeom>
+        </p:spPr>
+      </p:pic>
+      <p:sp>
+        <p:nvSpPr>
+          <p:cNvPr id="5" name="CuadroTexto 4">
+            <a:extLst>
+              <a:ext uri="{FF2B5EF4-FFF2-40B4-BE49-F238E27FC236}">
+                <a16:creationId xmlns:a16="http://schemas.microsoft.com/office/drawing/2014/main" id="{48AB47C4-8A6F-CEC3-FEF6-AABB92B5BC2E}"/>
+              </a:ext>
+            </a:extLst>
+          </p:cNvPr>
+          <p:cNvSpPr txBox="1"/>
+          <p:nvPr/>
+        </p:nvSpPr>
+        <p:spPr>
+          <a:xfrm>
+            <a:off x="914401" y="524869"/>
+            <a:ext cx="9458324" cy="707886"/>
+          </a:xfrm>
+          <a:prstGeom prst="rect">
+            <a:avLst/>
+          </a:prstGeom>
+          <a:noFill/>
+        </p:spPr>
+        <p:txBody>
+          <a:bodyPr wrap="square" rtlCol="0">
+            <a:spAutoFit/>
+          </a:bodyPr>
+          <a:lstStyle/>
+          <a:p>
+            <a:pPr algn="ctr"/>
+            <a:r>
+              <a:rPr lang="es-ES" sz="4000" b="1" dirty="0">
+                <a:solidFill>
+                  <a:schemeClr val="accent1">
+                    <a:lumMod val="50000"/>
+                  </a:schemeClr>
+                </a:solidFill>
+              </a:rPr>
+              <a:t>Distribución del puntaje de Calidad</a:t>
+            </a:r>
+          </a:p>
+        </p:txBody>
+      </p:sp>
+      <p:sp>
+        <p:nvSpPr>
+          <p:cNvPr id="7" name="CuadroTexto 6">
+            <a:extLst>
+              <a:ext uri="{FF2B5EF4-FFF2-40B4-BE49-F238E27FC236}">
+                <a16:creationId xmlns:a16="http://schemas.microsoft.com/office/drawing/2014/main" id="{67AC9CC1-4F05-9652-A6CB-75793E0C95C7}"/>
+              </a:ext>
+            </a:extLst>
+          </p:cNvPr>
+          <p:cNvSpPr txBox="1"/>
+          <p:nvPr/>
+        </p:nvSpPr>
+        <p:spPr>
+          <a:xfrm>
+            <a:off x="1452814" y="5132802"/>
+            <a:ext cx="8357936" cy="1200329"/>
+          </a:xfrm>
+          <a:prstGeom prst="rect">
+            <a:avLst/>
+          </a:prstGeom>
+          <a:noFill/>
+        </p:spPr>
+        <p:txBody>
+          <a:bodyPr wrap="square" rtlCol="0">
+            <a:spAutoFit/>
+          </a:bodyPr>
+          <a:lstStyle/>
+          <a:p>
+            <a:r>
+              <a:rPr lang="es-ES" sz="2400" dirty="0"/>
+              <a:t>La mayor parte de las evaluaciones se concentra alrededor de los 80–85 puntos, aunque se observa una mayor extensión hacia los puntajes bajos.</a:t>
+            </a:r>
+            <a:endParaRPr lang="es-CO" dirty="0"/>
+          </a:p>
+        </p:txBody>
+      </p:sp>
+    </p:spTree>
+    <p:extLst>
+      <p:ext uri="{BB962C8B-B14F-4D97-AF65-F5344CB8AC3E}">
+        <p14:creationId xmlns:p14="http://schemas.microsoft.com/office/powerpoint/2010/main" val="441664500"/>
       </p:ext>
     </p:extLst>
   </p:cSld>
@@ -13618,4 +15576,319 @@
     </a:ext>
   </a:extLst>
 </a:theme>
+</file>
+
+<file path=ppt/theme/theme2.xml><?xml version="1.0" encoding="utf-8"?>
+<a:theme xmlns:a="http://schemas.openxmlformats.org/drawingml/2006/main" name="Tema de Office">
+  <a:themeElements>
+    <a:clrScheme name="Office">
+      <a:dk1>
+        <a:sysClr val="windowText" lastClr="000000"/>
+      </a:dk1>
+      <a:lt1>
+        <a:sysClr val="window" lastClr="FFFFFF"/>
+      </a:lt1>
+      <a:dk2>
+        <a:srgbClr val="0E2841"/>
+      </a:dk2>
+      <a:lt2>
+        <a:srgbClr val="E8E8E8"/>
+      </a:lt2>
+      <a:accent1>
+        <a:srgbClr val="156082"/>
+      </a:accent1>
+      <a:accent2>
+        <a:srgbClr val="E97132"/>
+      </a:accent2>
+      <a:accent3>
+        <a:srgbClr val="196B24"/>
+      </a:accent3>
+      <a:accent4>
+        <a:srgbClr val="0F9ED5"/>
+      </a:accent4>
+      <a:accent5>
+        <a:srgbClr val="A02B93"/>
+      </a:accent5>
+      <a:accent6>
+        <a:srgbClr val="4EA72E"/>
+      </a:accent6>
+      <a:hlink>
+        <a:srgbClr val="467886"/>
+      </a:hlink>
+      <a:folHlink>
+        <a:srgbClr val="96607D"/>
+      </a:folHlink>
+    </a:clrScheme>
+    <a:fontScheme name="Office">
+      <a:majorFont>
+        <a:latin typeface="Aptos Display" panose="02110004020202020204"/>
+        <a:ea typeface=""/>
+        <a:cs typeface=""/>
+        <a:font script="Jpan" typeface="游ゴシック Light"/>
+        <a:font script="Hang" typeface="맑은 고딕"/>
+        <a:font script="Hans" typeface="等线 Light"/>
+        <a:font script="Hant" typeface="新細明體"/>
+        <a:font script="Arab" typeface="Times New Roman"/>
+        <a:font script="Hebr" typeface="Times New Roman"/>
+        <a:font script="Thai" typeface="Angsana New"/>
+        <a:font script="Ethi" typeface="Nyala"/>
+        <a:font script="Beng" typeface="Vrinda"/>
+        <a:font script="Gujr" typeface="Shruti"/>
+        <a:font script="Khmr" typeface="MoolBoran"/>
+        <a:font script="Knda" typeface="Tunga"/>
+        <a:font script="Guru" typeface="Raavi"/>
+        <a:font script="Cans" typeface="Euphemia"/>
+        <a:font script="Cher" typeface="Plantagenet Cherokee"/>
+        <a:font script="Yiii" typeface="Microsoft Yi Baiti"/>
+        <a:font script="Tibt" typeface="Microsoft Himalaya"/>
+        <a:font script="Thaa" typeface="MV Boli"/>
+        <a:font script="Deva" typeface="Mangal"/>
+        <a:font script="Telu" typeface="Gautami"/>
+        <a:font script="Taml" typeface="Latha"/>
+        <a:font script="Syrc" typeface="Estrangelo Edessa"/>
+        <a:font script="Orya" typeface="Kalinga"/>
+        <a:font script="Mlym" typeface="Kartika"/>
+        <a:font script="Laoo" typeface="DokChampa"/>
+        <a:font script="Sinh" typeface="Iskoola Pota"/>
+        <a:font script="Mong" typeface="Mongolian Baiti"/>
+        <a:font script="Viet" typeface="Times New Roman"/>
+        <a:font script="Uigh" typeface="Microsoft Uighur"/>
+        <a:font script="Geor" typeface="Sylfaen"/>
+        <a:font script="Armn" typeface="Arial"/>
+        <a:font script="Bugi" typeface="Leelawadee UI"/>
+        <a:font script="Bopo" typeface="Microsoft JhengHei"/>
+        <a:font script="Java" typeface="Javanese Text"/>
+        <a:font script="Lisu" typeface="Segoe UI"/>
+        <a:font script="Mymr" typeface="Myanmar Text"/>
+        <a:font script="Nkoo" typeface="Ebrima"/>
+        <a:font script="Olck" typeface="Nirmala UI"/>
+        <a:font script="Osma" typeface="Ebrima"/>
+        <a:font script="Phag" typeface="Phagspa"/>
+        <a:font script="Syrn" typeface="Estrangelo Edessa"/>
+        <a:font script="Syrj" typeface="Estrangelo Edessa"/>
+        <a:font script="Syre" typeface="Estrangelo Edessa"/>
+        <a:font script="Sora" typeface="Nirmala UI"/>
+        <a:font script="Tale" typeface="Microsoft Tai Le"/>
+        <a:font script="Talu" typeface="Microsoft New Tai Lue"/>
+        <a:font script="Tfng" typeface="Ebrima"/>
+      </a:majorFont>
+      <a:minorFont>
+        <a:latin typeface="Aptos" panose="02110004020202020204"/>
+        <a:ea typeface=""/>
+        <a:cs typeface=""/>
+        <a:font script="Jpan" typeface="游ゴシック"/>
+        <a:font script="Hang" typeface="맑은 고딕"/>
+        <a:font script="Hans" typeface="等线"/>
+        <a:font script="Hant" typeface="新細明體"/>
+        <a:font script="Arab" typeface="Arial"/>
+        <a:font script="Hebr" typeface="Arial"/>
+        <a:font script="Thai" typeface="Cordia New"/>
+        <a:font script="Ethi" typeface="Nyala"/>
+        <a:font script="Beng" typeface="Vrinda"/>
+        <a:font script="Gujr" typeface="Shruti"/>
+        <a:font script="Khmr" typeface="DaunPenh"/>
+        <a:font script="Knda" typeface="Tunga"/>
+        <a:font script="Guru" typeface="Raavi"/>
+        <a:font script="Cans" typeface="Euphemia"/>
+        <a:font script="Cher" typeface="Plantagenet Cherokee"/>
+        <a:font script="Yiii" typeface="Microsoft Yi Baiti"/>
+        <a:font script="Tibt" typeface="Microsoft Himalaya"/>
+        <a:font script="Thaa" typeface="MV Boli"/>
+        <a:font script="Deva" typeface="Mangal"/>
+        <a:font script="Telu" typeface="Gautami"/>
+        <a:font script="Taml" typeface="Latha"/>
+        <a:font script="Syrc" typeface="Estrangelo Edessa"/>
+        <a:font script="Orya" typeface="Kalinga"/>
+        <a:font script="Mlym" typeface="Kartika"/>
+        <a:font script="Laoo" typeface="DokChampa"/>
+        <a:font script="Sinh" typeface="Iskoola Pota"/>
+        <a:font script="Mong" typeface="Mongolian Baiti"/>
+        <a:font script="Viet" typeface="Arial"/>
+        <a:font script="Uigh" typeface="Microsoft Uighur"/>
+        <a:font script="Geor" typeface="Sylfaen"/>
+        <a:font script="Armn" typeface="Arial"/>
+        <a:font script="Bugi" typeface="Leelawadee UI"/>
+        <a:font script="Bopo" typeface="Microsoft JhengHei"/>
+        <a:font script="Java" typeface="Javanese Text"/>
+        <a:font script="Lisu" typeface="Segoe UI"/>
+        <a:font script="Mymr" typeface="Myanmar Text"/>
+        <a:font script="Nkoo" typeface="Ebrima"/>
+        <a:font script="Olck" typeface="Nirmala UI"/>
+        <a:font script="Osma" typeface="Ebrima"/>
+        <a:font script="Phag" typeface="Phagspa"/>
+        <a:font script="Syrn" typeface="Estrangelo Edessa"/>
+        <a:font script="Syrj" typeface="Estrangelo Edessa"/>
+        <a:font script="Syre" typeface="Estrangelo Edessa"/>
+        <a:font script="Sora" typeface="Nirmala UI"/>
+        <a:font script="Tale" typeface="Microsoft Tai Le"/>
+        <a:font script="Talu" typeface="Microsoft New Tai Lue"/>
+        <a:font script="Tfng" typeface="Ebrima"/>
+      </a:minorFont>
+    </a:fontScheme>
+    <a:fmtScheme name="Office">
+      <a:fillStyleLst>
+        <a:solidFill>
+          <a:schemeClr val="phClr"/>
+        </a:solidFill>
+        <a:gradFill rotWithShape="1">
+          <a:gsLst>
+            <a:gs pos="0">
+              <a:schemeClr val="phClr">
+                <a:lumMod val="110000"/>
+                <a:satMod val="105000"/>
+                <a:tint val="67000"/>
+              </a:schemeClr>
+            </a:gs>
+            <a:gs pos="50000">
+              <a:schemeClr val="phClr">
+                <a:lumMod val="105000"/>
+                <a:satMod val="103000"/>
+                <a:tint val="73000"/>
+              </a:schemeClr>
+            </a:gs>
+            <a:gs pos="100000">
+              <a:schemeClr val="phClr">
+                <a:lumMod val="105000"/>
+                <a:satMod val="109000"/>
+                <a:tint val="81000"/>
+              </a:schemeClr>
+            </a:gs>
+          </a:gsLst>
+          <a:lin ang="5400000" scaled="0"/>
+        </a:gradFill>
+        <a:gradFill rotWithShape="1">
+          <a:gsLst>
+            <a:gs pos="0">
+              <a:schemeClr val="phClr">
+                <a:satMod val="103000"/>
+                <a:lumMod val="102000"/>
+                <a:tint val="94000"/>
+              </a:schemeClr>
+            </a:gs>
+            <a:gs pos="50000">
+              <a:schemeClr val="phClr">
+                <a:satMod val="110000"/>
+                <a:lumMod val="100000"/>
+                <a:shade val="100000"/>
+              </a:schemeClr>
+            </a:gs>
+            <a:gs pos="100000">
+              <a:schemeClr val="phClr">
+                <a:lumMod val="99000"/>
+                <a:satMod val="120000"/>
+                <a:shade val="78000"/>
+              </a:schemeClr>
+            </a:gs>
+          </a:gsLst>
+          <a:lin ang="5400000" scaled="0"/>
+        </a:gradFill>
+      </a:fillStyleLst>
+      <a:lnStyleLst>
+        <a:ln w="12700" cap="flat" cmpd="sng" algn="ctr">
+          <a:solidFill>
+            <a:schemeClr val="phClr"/>
+          </a:solidFill>
+          <a:prstDash val="solid"/>
+          <a:miter lim="800000"/>
+        </a:ln>
+        <a:ln w="19050" cap="flat" cmpd="sng" algn="ctr">
+          <a:solidFill>
+            <a:schemeClr val="phClr"/>
+          </a:solidFill>
+          <a:prstDash val="solid"/>
+          <a:miter lim="800000"/>
+        </a:ln>
+        <a:ln w="25400" cap="flat" cmpd="sng" algn="ctr">
+          <a:solidFill>
+            <a:schemeClr val="phClr"/>
+          </a:solidFill>
+          <a:prstDash val="solid"/>
+          <a:miter lim="800000"/>
+        </a:ln>
+      </a:lnStyleLst>
+      <a:effectStyleLst>
+        <a:effectStyle>
+          <a:effectLst/>
+        </a:effectStyle>
+        <a:effectStyle>
+          <a:effectLst/>
+        </a:effectStyle>
+        <a:effectStyle>
+          <a:effectLst>
+            <a:outerShdw blurRad="57150" dist="19050" dir="5400000" algn="ctr" rotWithShape="0">
+              <a:srgbClr val="000000">
+                <a:alpha val="63000"/>
+              </a:srgbClr>
+            </a:outerShdw>
+          </a:effectLst>
+        </a:effectStyle>
+      </a:effectStyleLst>
+      <a:bgFillStyleLst>
+        <a:solidFill>
+          <a:schemeClr val="phClr"/>
+        </a:solidFill>
+        <a:solidFill>
+          <a:schemeClr val="phClr">
+            <a:tint val="95000"/>
+            <a:satMod val="170000"/>
+          </a:schemeClr>
+        </a:solidFill>
+        <a:gradFill rotWithShape="1">
+          <a:gsLst>
+            <a:gs pos="0">
+              <a:schemeClr val="phClr">
+                <a:tint val="93000"/>
+                <a:satMod val="150000"/>
+                <a:shade val="98000"/>
+                <a:lumMod val="102000"/>
+              </a:schemeClr>
+            </a:gs>
+            <a:gs pos="50000">
+              <a:schemeClr val="phClr">
+                <a:tint val="98000"/>
+                <a:satMod val="130000"/>
+                <a:shade val="90000"/>
+                <a:lumMod val="103000"/>
+              </a:schemeClr>
+            </a:gs>
+            <a:gs pos="100000">
+              <a:schemeClr val="phClr">
+                <a:shade val="63000"/>
+                <a:satMod val="120000"/>
+              </a:schemeClr>
+            </a:gs>
+          </a:gsLst>
+          <a:lin ang="5400000" scaled="0"/>
+        </a:gradFill>
+      </a:bgFillStyleLst>
+    </a:fmtScheme>
+  </a:themeElements>
+  <a:objectDefaults>
+    <a:lnDef>
+      <a:spPr/>
+      <a:bodyPr/>
+      <a:lstStyle/>
+      <a:style>
+        <a:lnRef idx="2">
+          <a:schemeClr val="accent1"/>
+        </a:lnRef>
+        <a:fillRef idx="0">
+          <a:schemeClr val="accent1"/>
+        </a:fillRef>
+        <a:effectRef idx="1">
+          <a:schemeClr val="accent1"/>
+        </a:effectRef>
+        <a:fontRef idx="minor">
+          <a:schemeClr val="tx1"/>
+        </a:fontRef>
+      </a:style>
+    </a:lnDef>
+  </a:objectDefaults>
+  <a:extraClrSchemeLst/>
+  <a:extLst>
+    <a:ext uri="{05A4C25C-085E-4340-85A3-A5531E510DB2}">
+      <thm15:themeFamily xmlns:thm15="http://schemas.microsoft.com/office/thememl/2012/main" name="Office Theme" id="{2E142A2C-CD16-42D6-873A-C26D2A0506FA}" vid="{1BDDFF52-6CD6-40A5-AB3C-68EB2F1E4D0A}"/>
+    </a:ext>
+  </a:extLst>
+</a:theme>
 </file>